--- a/brand/KODA-deck-FR.pptx
+++ b/brand/KODA-deck-FR.pptx
@@ -17,9 +17,10 @@
     <p:sldId id="265" r:id="rId11"/>
     <p:sldId id="266" r:id="rId12"/>
     <p:sldId id="267" r:id="rId13"/>
+    <p:sldId id="268" r:id="rId14"/>
   </p:sldIdLst>
   <p:notesMasterIdLst>
-    <p:notesMasterId r:id="rId14"/>
+    <p:notesMasterId r:id="rId15"/>
   </p:notesMasterIdLst>
   <p:sldSz cx="12191695" cy="6858000"/>
   <p:notesSz cx="6858000" cy="12191695"/>
@@ -801,6 +802,94 @@
             <a:fld id="{F7021451-1387-4CA6-816F-3879F97B5CBC}" type="slidenum">
               <a:rPr lang="en-US"/>
               <a:t>12</a:t>
+            </a:fld>
+            <a:endParaRPr lang="en-US"/>
+          </a:p>
+        </p:txBody>
+      </p:sp>
+    </p:spTree>
+    <p:extLst>
+      <p:ext uri="{BB962C8B-B14F-4D97-AF65-F5344CB8AC3E}">
+        <p14:creationId xmlns:p14="http://schemas.microsoft.com/office/powerpoint/2010/main" val="1024086991"/>
+      </p:ext>
+    </p:extLst>
+  </p:cSld>
+  <p:clrMapOvr>
+    <a:masterClrMapping/>
+  </p:clrMapOvr>
+</p:notes>
+</file>
+
+<file path=ppt/notesSlides/notesSlide13.xml><?xml version="1.0" encoding="utf-8"?>
+<p:notes xmlns:a="http://schemas.openxmlformats.org/drawingml/2006/main" xmlns:r="http://schemas.openxmlformats.org/officeDocument/2006/relationships" xmlns:p="http://schemas.openxmlformats.org/presentationml/2006/main">
+  <p:cSld>
+    <p:spTree>
+      <p:nvGrpSpPr>
+        <p:cNvPr id="1" name=""/>
+        <p:cNvGrpSpPr/>
+        <p:nvPr/>
+      </p:nvGrpSpPr>
+      <p:grpSpPr>
+        <a:xfrm>
+          <a:off x="0" y="0"/>
+          <a:ext cx="0" cy="0"/>
+          <a:chOff x="0" y="0"/>
+          <a:chExt cx="0" cy="0"/>
+        </a:xfrm>
+      </p:grpSpPr>
+      <p:sp>
+        <p:nvSpPr>
+          <p:cNvPr id="2" name="Slide Image Placeholder 1"/>
+          <p:cNvSpPr>
+            <a:spLocks noGrp="1" noRot="1" noChangeAspect="1"/>
+          </p:cNvSpPr>
+          <p:nvPr>
+            <p:ph type="sldImg"/>
+          </p:nvPr>
+        </p:nvSpPr>
+        <p:spPr/>
+      </p:sp>
+      <p:sp>
+        <p:nvSpPr>
+          <p:cNvPr id="3" name="Notes Placeholder 2"/>
+          <p:cNvSpPr>
+            <a:spLocks noGrp="1"/>
+          </p:cNvSpPr>
+          <p:nvPr>
+            <p:ph type="body" idx="1"/>
+          </p:nvPr>
+        </p:nvSpPr>
+        <p:spPr/>
+        <p:txBody>
+          <a:bodyPr/>
+          <a:lstStyle/>
+          <a:p>
+            <a:r>
+              <a:rPr lang="en-US" dirty="0"/>
+              <a:t/>
+            </a:r>
+            <a:endParaRPr lang="en-US" dirty="0"/>
+          </a:p>
+        </p:txBody>
+      </p:sp>
+      <p:sp>
+        <p:nvSpPr>
+          <p:cNvPr id="4" name="Slide Number Placeholder 3"/>
+          <p:cNvSpPr>
+            <a:spLocks noGrp="1"/>
+          </p:cNvSpPr>
+          <p:nvPr>
+            <p:ph type="sldNum" sz="quarter" idx="10"/>
+          </p:nvPr>
+        </p:nvSpPr>
+        <p:spPr/>
+        <p:txBody>
+          <a:bodyPr/>
+          <a:lstStyle/>
+          <a:p>
+            <a:fld id="{F7021451-1387-4CA6-816F-3879F97B5CBC}" type="slidenum">
+              <a:rPr lang="en-US"/>
+              <a:t>13</a:t>
             </a:fld>
             <a:endParaRPr lang="en-US"/>
           </a:p>
@@ -1863,7 +1952,7 @@
         <p:spPr>
           <a:xfrm>
             <a:off x="566928" y="868680"/>
-            <a:ext cx="8229600" cy="274320"/>
+            <a:ext cx="10058400" cy="274320"/>
           </a:xfrm>
           <a:prstGeom prst="rect">
             <a:avLst/>
@@ -1879,7 +1968,7 @@
               <a:buNone/>
             </a:pPr>
             <a:r>
-              <a:rPr lang="en-US" sz="1150" b="1" spc="300" kern="0" dirty="0">
+              <a:rPr lang="en-US" sz="1150" b="1" spc="250" kern="0" dirty="0">
                 <a:solidFill>
                   <a:srgbClr val="E8A11F"/>
                 </a:solidFill>
@@ -2003,7 +2092,7 @@
         <p:spPr>
           <a:xfrm>
             <a:off x="566928" y="4709160"/>
-            <a:ext cx="9326880" cy="1005840"/>
+            <a:ext cx="9509760" cy="1005840"/>
           </a:xfrm>
           <a:prstGeom prst="rect">
             <a:avLst/>
@@ -2022,7 +2111,7 @@
               <a:buNone/>
             </a:pPr>
             <a:r>
-              <a:rPr lang="en-US" sz="1700" dirty="0">
+              <a:rPr lang="en-US" sz="1650" dirty="0">
                 <a:solidFill>
                   <a:srgbClr val="9BA79B"/>
                 </a:solidFill>
@@ -2030,9 +2119,9 @@
                 <a:ea typeface="Calibri" pitchFamily="34" charset="-122"/>
                 <a:cs typeface="Calibri" pitchFamily="34" charset="-120"/>
               </a:rPr>
-              <a:t>Vérifiez n’importe quel paiement mobile money grâce au SMS de confirmation de l’opérateur. Sans contrat télécom. Sans code à coller. Un verdict en quelques secondes.</a:t>
-            </a:r>
-            <a:endParaRPr lang="en-US" sz="1700" dirty="0"/>
+              <a:t>Ne perdez plus d’argent à cause de fausses captures. Vérifiez chaque paiement mobile money grâce au SMS de confirmation de l’opérateur — en quelques secondes. Gratuit pour commencer.</a:t>
+            </a:r>
+            <a:endParaRPr lang="en-US" sz="1650" dirty="0"/>
           </a:p>
         </p:txBody>
       </p:sp>
@@ -2130,7 +2219,7 @@
         <p:spPr>
           <a:xfrm>
             <a:off x="566928" y="640080"/>
-            <a:ext cx="8229600" cy="274320"/>
+            <a:ext cx="10058400" cy="274320"/>
           </a:xfrm>
           <a:prstGeom prst="rect">
             <a:avLst/>
@@ -2146,7 +2235,7 @@
               <a:buNone/>
             </a:pPr>
             <a:r>
-              <a:rPr lang="en-US" sz="1150" b="1" spc="300" kern="0" dirty="0">
+              <a:rPr lang="en-US" sz="1150" b="1" spc="250" kern="0" dirty="0">
                 <a:solidFill>
                   <a:srgbClr val="E8A11F"/>
                 </a:solidFill>
@@ -2154,7 +2243,7 @@
                 <a:ea typeface="Courier New" pitchFamily="34" charset="-122"/>
                 <a:cs typeface="Courier New" pitchFamily="34" charset="-120"/>
               </a:rPr>
-              <a:t>POUR QUI</a:t>
+              <a:t>MONDIAL PAR CONCEPTION</a:t>
             </a:r>
             <a:endParaRPr lang="en-US" sz="1150" dirty="0"/>
           </a:p>
@@ -2169,7 +2258,7 @@
         <p:spPr>
           <a:xfrm>
             <a:off x="566928" y="960120"/>
-            <a:ext cx="10972800" cy="640080"/>
+            <a:ext cx="11064240" cy="640080"/>
           </a:xfrm>
           <a:prstGeom prst="rect">
             <a:avLst/>
@@ -2185,7 +2274,7 @@
               <a:buNone/>
             </a:pPr>
             <a:r>
-              <a:rPr lang="en-US" sz="3000" b="1" dirty="0">
+              <a:rPr lang="en-US" sz="2900" b="1" dirty="0">
                 <a:solidFill>
                   <a:srgbClr val="E9E4D5"/>
                 </a:solidFill>
@@ -2193,9 +2282,9 @@
                 <a:ea typeface="Arial" pitchFamily="34" charset="-122"/>
                 <a:cs typeface="Arial" pitchFamily="34" charset="-120"/>
               </a:rPr>
-              <a:t>Une couche de vérité, pour tout type de vendeur.</a:t>
-            </a:r>
-            <a:endParaRPr lang="en-US" sz="3000" dirty="0"/>
+              <a:t>La couverture est une carte d’analyse — pas une pile de contrats.</a:t>
+            </a:r>
+            <a:endParaRPr lang="en-US" sz="2900" dirty="0"/>
           </a:p>
         </p:txBody>
       </p:sp>
@@ -2208,11 +2297,11 @@
         <p:spPr>
           <a:xfrm>
             <a:off x="566928" y="2148840"/>
-            <a:ext cx="2558720" cy="3246120"/>
+            <a:ext cx="2558720" cy="1737360"/>
           </a:xfrm>
           <a:prstGeom prst="roundRect">
             <a:avLst>
-              <a:gd name="adj" fmla="val 3931"/>
+              <a:gd name="adj" fmla="val 5789"/>
             </a:avLst>
           </a:prstGeom>
           <a:solidFill>
@@ -2235,119 +2324,65 @@
       </p:sp>
       <p:sp>
         <p:nvSpPr>
-          <p:cNvPr id="5" name="Shape 3"/>
-          <p:cNvSpPr/>
-          <p:nvPr/>
-        </p:nvSpPr>
-        <p:spPr>
-          <a:xfrm>
-            <a:off x="822960" y="2441448"/>
-            <a:ext cx="640080" cy="640080"/>
-          </a:xfrm>
-          <a:prstGeom prst="roundRect">
-            <a:avLst>
-              <a:gd name="adj" fmla="val 14286"/>
-            </a:avLst>
-          </a:prstGeom>
-          <a:solidFill>
-            <a:srgbClr val="17392E"/>
-          </a:solidFill>
-          <a:ln w="12700">
-            <a:solidFill>
-              <a:srgbClr val="E8A11F"/>
-            </a:solidFill>
-            <a:prstDash val="solid"/>
-          </a:ln>
-        </p:spPr>
-      </p:sp>
-      <p:pic>
-        <p:nvPicPr>
-          <p:cNvPr id="6" name="Image 0" descr="preencoded.png">    </p:cNvPr>
-          <p:cNvPicPr>
-            <a:picLocks noChangeAspect="1"/>
-          </p:cNvPicPr>
-          <p:nvPr/>
-        </p:nvPicPr>
-        <p:blipFill>
-          <a:blip r:embed="rId1"/>
-          <a:stretch>
-            <a:fillRect/>
-          </a:stretch>
-        </p:blipFill>
-        <p:spPr>
-          <a:xfrm>
-            <a:off x="950976" y="2569464"/>
-            <a:ext cx="384048" cy="384048"/>
-          </a:xfrm>
-          <a:prstGeom prst="rect">
-            <a:avLst/>
-          </a:prstGeom>
-        </p:spPr>
-      </p:pic>
-      <p:sp>
-        <p:nvSpPr>
-          <p:cNvPr id="7" name="Text 4"/>
-          <p:cNvSpPr txBox="1"/>
-          <p:nvPr/>
-        </p:nvSpPr>
-        <p:spPr>
-          <a:xfrm>
-            <a:off x="804672" y="3291840"/>
-            <a:ext cx="2101520" cy="731520"/>
-          </a:xfrm>
-          <a:prstGeom prst="rect">
-            <a:avLst/>
-          </a:prstGeom>
-          <a:noFill/>
-          <a:ln/>
-        </p:spPr>
-        <p:txBody>
-          <a:bodyPr wrap="square" lIns="0" tIns="0" rIns="0" bIns="0" rtlCol="0" anchor="ctr"/>
-          <a:lstStyle/>
-          <a:p>
-            <a:pPr indent="0" marL="0">
-              <a:buNone/>
-            </a:pPr>
-            <a:r>
-              <a:rPr lang="en-US" sz="1450" b="1" dirty="0">
-                <a:solidFill>
-                  <a:srgbClr val="F2B944"/>
+          <p:cNvPr id="5" name="Text 3"/>
+          <p:cNvSpPr txBox="1"/>
+          <p:nvPr/>
+        </p:nvSpPr>
+        <p:spPr>
+          <a:xfrm>
+            <a:off x="658368" y="2377440"/>
+            <a:ext cx="2375840" cy="868680"/>
+          </a:xfrm>
+          <a:prstGeom prst="rect">
+            <a:avLst/>
+          </a:prstGeom>
+          <a:noFill/>
+          <a:ln/>
+        </p:spPr>
+        <p:txBody>
+          <a:bodyPr wrap="square" lIns="0" tIns="0" rIns="0" bIns="0" rtlCol="0" anchor="ctr"/>
+          <a:lstStyle/>
+          <a:p>
+            <a:pPr algn="ctr" indent="0" marL="0">
+              <a:buNone/>
+            </a:pPr>
+            <a:r>
+              <a:rPr lang="en-US" sz="6000" b="1" dirty="0">
+                <a:solidFill>
+                  <a:srgbClr val="E8A11F"/>
                 </a:solidFill>
                 <a:latin typeface="Arial" pitchFamily="34" charset="0"/>
                 <a:ea typeface="Arial" pitchFamily="34" charset="-122"/>
                 <a:cs typeface="Arial" pitchFamily="34" charset="-120"/>
               </a:rPr>
-              <a:t>Commerçants &amp; PME</a:t>
-            </a:r>
-            <a:endParaRPr lang="en-US" sz="1450" dirty="0"/>
-          </a:p>
-        </p:txBody>
-      </p:sp>
-      <p:sp>
-        <p:nvSpPr>
-          <p:cNvPr id="8" name="Text 5"/>
-          <p:cNvSpPr txBox="1"/>
-          <p:nvPr/>
-        </p:nvSpPr>
-        <p:spPr>
-          <a:xfrm>
-            <a:off x="804672" y="3995928"/>
-            <a:ext cx="2101520" cy="1325880"/>
-          </a:xfrm>
-          <a:prstGeom prst="rect">
-            <a:avLst/>
-          </a:prstGeom>
-          <a:noFill/>
-          <a:ln/>
-        </p:spPr>
-        <p:txBody>
-          <a:bodyPr wrap="square" lIns="0" tIns="0" rIns="0" bIns="0" rtlCol="0" anchor="ctr"/>
-          <a:lstStyle/>
-          <a:p>
-            <a:pPr indent="0" marL="0">
-              <a:lnSpc>
-                <a:spcPct val="110000"/>
-              </a:lnSpc>
+              <a:t>235</a:t>
+            </a:r>
+            <a:endParaRPr lang="en-US" sz="6000" dirty="0"/>
+          </a:p>
+        </p:txBody>
+      </p:sp>
+      <p:sp>
+        <p:nvSpPr>
+          <p:cNvPr id="6" name="Text 4"/>
+          <p:cNvSpPr txBox="1"/>
+          <p:nvPr/>
+        </p:nvSpPr>
+        <p:spPr>
+          <a:xfrm>
+            <a:off x="640080" y="3319272"/>
+            <a:ext cx="2412416" cy="457200"/>
+          </a:xfrm>
+          <a:prstGeom prst="rect">
+            <a:avLst/>
+          </a:prstGeom>
+          <a:noFill/>
+          <a:ln/>
+        </p:spPr>
+        <p:txBody>
+          <a:bodyPr wrap="square" lIns="0" tIns="0" rIns="0" bIns="0" rtlCol="0" anchor="ctr"/>
+          <a:lstStyle/>
+          <a:p>
+            <a:pPr algn="ctr" indent="0" marL="0">
               <a:buNone/>
             </a:pPr>
             <a:r>
@@ -2359,7 +2394,7 @@
                 <a:ea typeface="Calibri" pitchFamily="34" charset="-122"/>
                 <a:cs typeface="Calibri" pitchFamily="34" charset="-120"/>
               </a:rPr>
-              <a:t>Restauration, commerce, transport, hôtellerie — vérifiez avant de remettre la marchandise.</a:t>
+              <a:t>opérateurs au registre</a:t>
             </a:r>
             <a:endParaRPr lang="en-US" sz="1200" dirty="0"/>
           </a:p>
@@ -2367,18 +2402,18 @@
       </p:sp>
       <p:sp>
         <p:nvSpPr>
-          <p:cNvPr id="9" name="Shape 6"/>
+          <p:cNvPr id="7" name="Shape 5"/>
           <p:cNvSpPr/>
           <p:nvPr/>
         </p:nvSpPr>
         <p:spPr>
           <a:xfrm>
             <a:off x="3399968" y="2148840"/>
-            <a:ext cx="2558720" cy="3246120"/>
+            <a:ext cx="2558720" cy="1737360"/>
           </a:xfrm>
           <a:prstGeom prst="roundRect">
             <a:avLst>
-              <a:gd name="adj" fmla="val 3931"/>
+              <a:gd name="adj" fmla="val 5789"/>
             </a:avLst>
           </a:prstGeom>
           <a:solidFill>
@@ -2401,119 +2436,65 @@
       </p:sp>
       <p:sp>
         <p:nvSpPr>
-          <p:cNvPr id="10" name="Shape 7"/>
-          <p:cNvSpPr/>
-          <p:nvPr/>
-        </p:nvSpPr>
-        <p:spPr>
-          <a:xfrm>
-            <a:off x="3656000" y="2441448"/>
-            <a:ext cx="640080" cy="640080"/>
-          </a:xfrm>
-          <a:prstGeom prst="roundRect">
-            <a:avLst>
-              <a:gd name="adj" fmla="val 14286"/>
-            </a:avLst>
-          </a:prstGeom>
-          <a:solidFill>
-            <a:srgbClr val="17392E"/>
-          </a:solidFill>
-          <a:ln w="12700">
-            <a:solidFill>
-              <a:srgbClr val="E8A11F"/>
-            </a:solidFill>
-            <a:prstDash val="solid"/>
-          </a:ln>
-        </p:spPr>
-      </p:sp>
-      <p:pic>
-        <p:nvPicPr>
-          <p:cNvPr id="11" name="Image 1" descr="preencoded.png">    </p:cNvPr>
-          <p:cNvPicPr>
-            <a:picLocks noChangeAspect="1"/>
-          </p:cNvPicPr>
-          <p:nvPr/>
-        </p:nvPicPr>
-        <p:blipFill>
-          <a:blip r:embed="rId2"/>
-          <a:stretch>
-            <a:fillRect/>
-          </a:stretch>
-        </p:blipFill>
-        <p:spPr>
-          <a:xfrm>
-            <a:off x="3784016" y="2569464"/>
-            <a:ext cx="384048" cy="384048"/>
-          </a:xfrm>
-          <a:prstGeom prst="rect">
-            <a:avLst/>
-          </a:prstGeom>
-        </p:spPr>
-      </p:pic>
-      <p:sp>
-        <p:nvSpPr>
-          <p:cNvPr id="12" name="Text 8"/>
-          <p:cNvSpPr txBox="1"/>
-          <p:nvPr/>
-        </p:nvSpPr>
-        <p:spPr>
-          <a:xfrm>
-            <a:off x="3637712" y="3291840"/>
-            <a:ext cx="2101520" cy="731520"/>
-          </a:xfrm>
-          <a:prstGeom prst="rect">
-            <a:avLst/>
-          </a:prstGeom>
-          <a:noFill/>
-          <a:ln/>
-        </p:spPr>
-        <p:txBody>
-          <a:bodyPr wrap="square" lIns="0" tIns="0" rIns="0" bIns="0" rtlCol="0" anchor="ctr"/>
-          <a:lstStyle/>
-          <a:p>
-            <a:pPr indent="0" marL="0">
-              <a:buNone/>
-            </a:pPr>
-            <a:r>
-              <a:rPr lang="en-US" sz="1450" b="1" dirty="0">
-                <a:solidFill>
-                  <a:srgbClr val="F2B944"/>
+          <p:cNvPr id="8" name="Text 6"/>
+          <p:cNvSpPr txBox="1"/>
+          <p:nvPr/>
+        </p:nvSpPr>
+        <p:spPr>
+          <a:xfrm>
+            <a:off x="3491408" y="2377440"/>
+            <a:ext cx="2375840" cy="868680"/>
+          </a:xfrm>
+          <a:prstGeom prst="rect">
+            <a:avLst/>
+          </a:prstGeom>
+          <a:noFill/>
+          <a:ln/>
+        </p:spPr>
+        <p:txBody>
+          <a:bodyPr wrap="square" lIns="0" tIns="0" rIns="0" bIns="0" rtlCol="0" anchor="ctr"/>
+          <a:lstStyle/>
+          <a:p>
+            <a:pPr algn="ctr" indent="0" marL="0">
+              <a:buNone/>
+            </a:pPr>
+            <a:r>
+              <a:rPr lang="en-US" sz="6000" b="1" dirty="0">
+                <a:solidFill>
+                  <a:srgbClr val="E8A11F"/>
                 </a:solidFill>
                 <a:latin typeface="Arial" pitchFamily="34" charset="0"/>
                 <a:ea typeface="Arial" pitchFamily="34" charset="-122"/>
                 <a:cs typeface="Arial" pitchFamily="34" charset="-120"/>
               </a:rPr>
-              <a:t>Places de marché &amp; plateformes</a:t>
-            </a:r>
-            <a:endParaRPr lang="en-US" sz="1450" dirty="0"/>
-          </a:p>
-        </p:txBody>
-      </p:sp>
-      <p:sp>
-        <p:nvSpPr>
-          <p:cNvPr id="13" name="Text 9"/>
-          <p:cNvSpPr txBox="1"/>
-          <p:nvPr/>
-        </p:nvSpPr>
-        <p:spPr>
-          <a:xfrm>
-            <a:off x="3637712" y="3995928"/>
-            <a:ext cx="2101520" cy="1325880"/>
-          </a:xfrm>
-          <a:prstGeom prst="rect">
-            <a:avLst/>
-          </a:prstGeom>
-          <a:noFill/>
-          <a:ln/>
-        </p:spPr>
-        <p:txBody>
-          <a:bodyPr wrap="square" lIns="0" tIns="0" rIns="0" bIns="0" rtlCol="0" anchor="ctr"/>
-          <a:lstStyle/>
-          <a:p>
-            <a:pPr indent="0" marL="0">
-              <a:lnSpc>
-                <a:spcPct val="110000"/>
-              </a:lnSpc>
+              <a:t>95</a:t>
+            </a:r>
+            <a:endParaRPr lang="en-US" sz="6000" dirty="0"/>
+          </a:p>
+        </p:txBody>
+      </p:sp>
+      <p:sp>
+        <p:nvSpPr>
+          <p:cNvPr id="9" name="Text 7"/>
+          <p:cNvSpPr txBox="1"/>
+          <p:nvPr/>
+        </p:nvSpPr>
+        <p:spPr>
+          <a:xfrm>
+            <a:off x="3473120" y="3319272"/>
+            <a:ext cx="2412416" cy="457200"/>
+          </a:xfrm>
+          <a:prstGeom prst="rect">
+            <a:avLst/>
+          </a:prstGeom>
+          <a:noFill/>
+          <a:ln/>
+        </p:spPr>
+        <p:txBody>
+          <a:bodyPr wrap="square" lIns="0" tIns="0" rIns="0" bIns="0" rtlCol="0" anchor="ctr"/>
+          <a:lstStyle/>
+          <a:p>
+            <a:pPr algn="ctr" indent="0" marL="0">
               <a:buNone/>
             </a:pPr>
             <a:r>
@@ -2525,7 +2506,7 @@
                 <a:ea typeface="Calibri" pitchFamily="34" charset="-122"/>
                 <a:cs typeface="Calibri" pitchFamily="34" charset="-120"/>
               </a:rPr>
-              <a:t>API sous-marchand, clés limitées, scores de confiance — intégrez des milliers de marchands en gros.</a:t>
+              <a:t>pays</a:t>
             </a:r>
             <a:endParaRPr lang="en-US" sz="1200" dirty="0"/>
           </a:p>
@@ -2533,18 +2514,18 @@
       </p:sp>
       <p:sp>
         <p:nvSpPr>
-          <p:cNvPr id="14" name="Shape 10"/>
+          <p:cNvPr id="10" name="Shape 8"/>
           <p:cNvSpPr/>
           <p:nvPr/>
         </p:nvSpPr>
         <p:spPr>
           <a:xfrm>
             <a:off x="6233008" y="2148840"/>
-            <a:ext cx="2558720" cy="3246120"/>
+            <a:ext cx="2558720" cy="1737360"/>
           </a:xfrm>
           <a:prstGeom prst="roundRect">
             <a:avLst>
-              <a:gd name="adj" fmla="val 3931"/>
+              <a:gd name="adj" fmla="val 5789"/>
             </a:avLst>
           </a:prstGeom>
           <a:solidFill>
@@ -2567,119 +2548,65 @@
       </p:sp>
       <p:sp>
         <p:nvSpPr>
-          <p:cNvPr id="15" name="Shape 11"/>
-          <p:cNvSpPr/>
-          <p:nvPr/>
-        </p:nvSpPr>
-        <p:spPr>
-          <a:xfrm>
-            <a:off x="6489040" y="2441448"/>
-            <a:ext cx="640080" cy="640080"/>
-          </a:xfrm>
-          <a:prstGeom prst="roundRect">
-            <a:avLst>
-              <a:gd name="adj" fmla="val 14286"/>
-            </a:avLst>
-          </a:prstGeom>
-          <a:solidFill>
-            <a:srgbClr val="17392E"/>
-          </a:solidFill>
-          <a:ln w="12700">
-            <a:solidFill>
-              <a:srgbClr val="E8A11F"/>
-            </a:solidFill>
-            <a:prstDash val="solid"/>
-          </a:ln>
-        </p:spPr>
-      </p:sp>
-      <p:pic>
-        <p:nvPicPr>
-          <p:cNvPr id="16" name="Image 2" descr="preencoded.png">    </p:cNvPr>
-          <p:cNvPicPr>
-            <a:picLocks noChangeAspect="1"/>
-          </p:cNvPicPr>
-          <p:nvPr/>
-        </p:nvPicPr>
-        <p:blipFill>
-          <a:blip r:embed="rId3"/>
-          <a:stretch>
-            <a:fillRect/>
-          </a:stretch>
-        </p:blipFill>
-        <p:spPr>
-          <a:xfrm>
-            <a:off x="6617056" y="2569464"/>
-            <a:ext cx="384048" cy="384048"/>
-          </a:xfrm>
-          <a:prstGeom prst="rect">
-            <a:avLst/>
-          </a:prstGeom>
-        </p:spPr>
-      </p:pic>
-      <p:sp>
-        <p:nvSpPr>
-          <p:cNvPr id="17" name="Text 12"/>
-          <p:cNvSpPr txBox="1"/>
-          <p:nvPr/>
-        </p:nvSpPr>
-        <p:spPr>
-          <a:xfrm>
-            <a:off x="6470752" y="3291840"/>
-            <a:ext cx="2101520" cy="731520"/>
-          </a:xfrm>
-          <a:prstGeom prst="rect">
-            <a:avLst/>
-          </a:prstGeom>
-          <a:noFill/>
-          <a:ln/>
-        </p:spPr>
-        <p:txBody>
-          <a:bodyPr wrap="square" lIns="0" tIns="0" rIns="0" bIns="0" rtlCol="0" anchor="ctr"/>
-          <a:lstStyle/>
-          <a:p>
-            <a:pPr indent="0" marL="0">
-              <a:buNone/>
-            </a:pPr>
-            <a:r>
-              <a:rPr lang="en-US" sz="1450" b="1" dirty="0">
-                <a:solidFill>
-                  <a:srgbClr val="F2B944"/>
+          <p:cNvPr id="11" name="Text 9"/>
+          <p:cNvSpPr txBox="1"/>
+          <p:nvPr/>
+        </p:nvSpPr>
+        <p:spPr>
+          <a:xfrm>
+            <a:off x="6324448" y="2377440"/>
+            <a:ext cx="2375840" cy="868680"/>
+          </a:xfrm>
+          <a:prstGeom prst="rect">
+            <a:avLst/>
+          </a:prstGeom>
+          <a:noFill/>
+          <a:ln/>
+        </p:spPr>
+        <p:txBody>
+          <a:bodyPr wrap="square" lIns="0" tIns="0" rIns="0" bIns="0" rtlCol="0" anchor="ctr"/>
+          <a:lstStyle/>
+          <a:p>
+            <a:pPr algn="ctr" indent="0" marL="0">
+              <a:buNone/>
+            </a:pPr>
+            <a:r>
+              <a:rPr lang="en-US" sz="6000" b="1" dirty="0">
+                <a:solidFill>
+                  <a:srgbClr val="E8A11F"/>
                 </a:solidFill>
                 <a:latin typeface="Arial" pitchFamily="34" charset="0"/>
                 <a:ea typeface="Arial" pitchFamily="34" charset="-122"/>
                 <a:cs typeface="Arial" pitchFamily="34" charset="-120"/>
               </a:rPr>
-              <a:t>Distributeurs &amp; revendeurs</a:t>
-            </a:r>
-            <a:endParaRPr lang="en-US" sz="1450" dirty="0"/>
-          </a:p>
-        </p:txBody>
-      </p:sp>
-      <p:sp>
-        <p:nvSpPr>
-          <p:cNvPr id="18" name="Text 13"/>
-          <p:cNvSpPr txBox="1"/>
-          <p:nvPr/>
-        </p:nvSpPr>
-        <p:spPr>
-          <a:xfrm>
-            <a:off x="6470752" y="3995928"/>
-            <a:ext cx="2101520" cy="1325880"/>
-          </a:xfrm>
-          <a:prstGeom prst="rect">
-            <a:avLst/>
-          </a:prstGeom>
-          <a:noFill/>
-          <a:ln/>
-        </p:spPr>
-        <p:txBody>
-          <a:bodyPr wrap="square" lIns="0" tIns="0" rIns="0" bIns="0" rtlCol="0" anchor="ctr"/>
-          <a:lstStyle/>
-          <a:p>
-            <a:pPr indent="0" marL="0">
-              <a:lnSpc>
-                <a:spcPct val="110000"/>
-              </a:lnSpc>
+              <a:t>12</a:t>
+            </a:r>
+            <a:endParaRPr lang="en-US" sz="6000" dirty="0"/>
+          </a:p>
+        </p:txBody>
+      </p:sp>
+      <p:sp>
+        <p:nvSpPr>
+          <p:cNvPr id="12" name="Text 10"/>
+          <p:cNvSpPr txBox="1"/>
+          <p:nvPr/>
+        </p:nvSpPr>
+        <p:spPr>
+          <a:xfrm>
+            <a:off x="6306160" y="3319272"/>
+            <a:ext cx="2412416" cy="457200"/>
+          </a:xfrm>
+          <a:prstGeom prst="rect">
+            <a:avLst/>
+          </a:prstGeom>
+          <a:noFill/>
+          <a:ln/>
+        </p:spPr>
+        <p:txBody>
+          <a:bodyPr wrap="square" lIns="0" tIns="0" rIns="0" bIns="0" rtlCol="0" anchor="ctr"/>
+          <a:lstStyle/>
+          <a:p>
+            <a:pPr algn="ctr" indent="0" marL="0">
               <a:buNone/>
             </a:pPr>
             <a:r>
@@ -2691,7 +2618,7 @@
                 <a:ea typeface="Calibri" pitchFamily="34" charset="-122"/>
                 <a:cs typeface="Calibri" pitchFamily="34" charset="-120"/>
               </a:rPr>
-              <a:t>ACU en gros, rails de dépôt-garantie et bons PIN pour revendre KODA en aval.</a:t>
+              <a:t>régions du monde</a:t>
             </a:r>
             <a:endParaRPr lang="en-US" sz="1200" dirty="0"/>
           </a:p>
@@ -2699,18 +2626,18 @@
       </p:sp>
       <p:sp>
         <p:nvSpPr>
-          <p:cNvPr id="19" name="Shape 14"/>
+          <p:cNvPr id="13" name="Shape 11"/>
           <p:cNvSpPr/>
           <p:nvPr/>
         </p:nvSpPr>
         <p:spPr>
           <a:xfrm>
             <a:off x="9066047" y="2148840"/>
-            <a:ext cx="2558720" cy="3246120"/>
+            <a:ext cx="2558720" cy="1737360"/>
           </a:xfrm>
           <a:prstGeom prst="roundRect">
             <a:avLst>
-              <a:gd name="adj" fmla="val 3931"/>
+              <a:gd name="adj" fmla="val 5789"/>
             </a:avLst>
           </a:prstGeom>
           <a:solidFill>
@@ -2733,104 +2660,126 @@
       </p:sp>
       <p:sp>
         <p:nvSpPr>
-          <p:cNvPr id="20" name="Shape 15"/>
+          <p:cNvPr id="14" name="Text 12"/>
+          <p:cNvSpPr txBox="1"/>
+          <p:nvPr/>
+        </p:nvSpPr>
+        <p:spPr>
+          <a:xfrm>
+            <a:off x="9157487" y="2377440"/>
+            <a:ext cx="2375840" cy="868680"/>
+          </a:xfrm>
+          <a:prstGeom prst="rect">
+            <a:avLst/>
+          </a:prstGeom>
+          <a:noFill/>
+          <a:ln/>
+        </p:spPr>
+        <p:txBody>
+          <a:bodyPr wrap="square" lIns="0" tIns="0" rIns="0" bIns="0" rtlCol="0" anchor="ctr"/>
+          <a:lstStyle/>
+          <a:p>
+            <a:pPr algn="ctr" indent="0" marL="0">
+              <a:buNone/>
+            </a:pPr>
+            <a:r>
+              <a:rPr lang="en-US" sz="6000" b="1" dirty="0">
+                <a:solidFill>
+                  <a:srgbClr val="E8A11F"/>
+                </a:solidFill>
+                <a:latin typeface="Arial" pitchFamily="34" charset="0"/>
+                <a:ea typeface="Arial" pitchFamily="34" charset="-122"/>
+                <a:cs typeface="Arial" pitchFamily="34" charset="-120"/>
+              </a:rPr>
+              <a:t>111</a:t>
+            </a:r>
+            <a:endParaRPr lang="en-US" sz="6000" dirty="0"/>
+          </a:p>
+        </p:txBody>
+      </p:sp>
+      <p:sp>
+        <p:nvSpPr>
+          <p:cNvPr id="15" name="Text 13"/>
+          <p:cNvSpPr txBox="1"/>
+          <p:nvPr/>
+        </p:nvSpPr>
+        <p:spPr>
+          <a:xfrm>
+            <a:off x="9139199" y="3319272"/>
+            <a:ext cx="2412416" cy="457200"/>
+          </a:xfrm>
+          <a:prstGeom prst="rect">
+            <a:avLst/>
+          </a:prstGeom>
+          <a:noFill/>
+          <a:ln/>
+        </p:spPr>
+        <p:txBody>
+          <a:bodyPr wrap="square" lIns="0" tIns="0" rIns="0" bIns="0" rtlCol="0" anchor="ctr"/>
+          <a:lstStyle/>
+          <a:p>
+            <a:pPr algn="ctr" indent="0" marL="0">
+              <a:buNone/>
+            </a:pPr>
+            <a:r>
+              <a:rPr lang="en-US" sz="1200" dirty="0">
+                <a:solidFill>
+                  <a:srgbClr val="9BA79B"/>
+                </a:solidFill>
+                <a:latin typeface="Calibri" pitchFamily="34" charset="0"/>
+                <a:ea typeface="Calibri" pitchFamily="34" charset="-122"/>
+                <a:cs typeface="Calibri" pitchFamily="34" charset="-120"/>
+              </a:rPr>
+              <a:t>familles de modèles</a:t>
+            </a:r>
+            <a:endParaRPr lang="en-US" sz="1200" dirty="0"/>
+          </a:p>
+        </p:txBody>
+      </p:sp>
+      <p:sp>
+        <p:nvSpPr>
+          <p:cNvPr id="16" name="Shape 14"/>
           <p:cNvSpPr/>
           <p:nvPr/>
         </p:nvSpPr>
         <p:spPr>
           <a:xfrm>
-            <a:off x="9322079" y="2441448"/>
-            <a:ext cx="640080" cy="640080"/>
+            <a:off x="566928" y="4160520"/>
+            <a:ext cx="11057839" cy="1600200"/>
           </a:xfrm>
           <a:prstGeom prst="roundRect">
             <a:avLst>
-              <a:gd name="adj" fmla="val 14286"/>
+              <a:gd name="adj" fmla="val 6286"/>
             </a:avLst>
           </a:prstGeom>
           <a:solidFill>
-            <a:srgbClr val="17392E"/>
+            <a:srgbClr val="0C231C"/>
           </a:solidFill>
           <a:ln w="12700">
             <a:solidFill>
-              <a:srgbClr val="E8A11F"/>
+              <a:srgbClr val="2A4034"/>
             </a:solidFill>
             <a:prstDash val="solid"/>
           </a:ln>
-        </p:spPr>
-      </p:sp>
-      <p:pic>
-        <p:nvPicPr>
-          <p:cNvPr id="21" name="Image 3" descr="preencoded.png">    </p:cNvPr>
-          <p:cNvPicPr>
-            <a:picLocks noChangeAspect="1"/>
-          </p:cNvPicPr>
-          <p:nvPr/>
-        </p:nvPicPr>
-        <p:blipFill>
-          <a:blip r:embed="rId4"/>
-          <a:stretch>
-            <a:fillRect/>
-          </a:stretch>
-        </p:blipFill>
-        <p:spPr>
-          <a:xfrm>
-            <a:off x="9450095" y="2569464"/>
-            <a:ext cx="384048" cy="384048"/>
-          </a:xfrm>
-          <a:prstGeom prst="rect">
-            <a:avLst/>
-          </a:prstGeom>
-        </p:spPr>
-      </p:pic>
-      <p:sp>
-        <p:nvSpPr>
-          <p:cNvPr id="22" name="Text 16"/>
-          <p:cNvSpPr txBox="1"/>
-          <p:nvPr/>
-        </p:nvSpPr>
-        <p:spPr>
-          <a:xfrm>
-            <a:off x="9303791" y="3291840"/>
-            <a:ext cx="2101520" cy="731520"/>
-          </a:xfrm>
-          <a:prstGeom prst="rect">
-            <a:avLst/>
-          </a:prstGeom>
-          <a:noFill/>
-          <a:ln/>
-        </p:spPr>
-        <p:txBody>
-          <a:bodyPr wrap="square" lIns="0" tIns="0" rIns="0" bIns="0" rtlCol="0" anchor="ctr"/>
-          <a:lstStyle/>
-          <a:p>
-            <a:pPr indent="0" marL="0">
-              <a:buNone/>
-            </a:pPr>
-            <a:r>
-              <a:rPr lang="en-US" sz="1450" b="1" dirty="0">
-                <a:solidFill>
-                  <a:srgbClr val="F2B944"/>
-                </a:solidFill>
-                <a:latin typeface="Arial" pitchFamily="34" charset="0"/>
-                <a:ea typeface="Arial" pitchFamily="34" charset="-122"/>
-                <a:cs typeface="Arial" pitchFamily="34" charset="-120"/>
-              </a:rPr>
-              <a:t>Services publics, IMF &amp; Gouv.</a:t>
-            </a:r>
-            <a:endParaRPr lang="en-US" sz="1450" dirty="0"/>
-          </a:p>
-        </p:txBody>
-      </p:sp>
-      <p:sp>
-        <p:nvSpPr>
-          <p:cNvPr id="23" name="Text 17"/>
-          <p:cNvSpPr txBox="1"/>
-          <p:nvPr/>
-        </p:nvSpPr>
-        <p:spPr>
-          <a:xfrm>
-            <a:off x="9303791" y="3995928"/>
-            <a:ext cx="2101520" cy="1325880"/>
+          <a:effectLst>
+            <a:outerShdw sx="100000" sy="100000" kx="0" ky="0" algn="bl" rotWithShape="0" blurRad="127000" dist="50800" dir="5400000">
+              <a:srgbClr val="000000">
+                <a:alpha val="35000"/>
+              </a:srgbClr>
+            </a:outerShdw>
+          </a:effectLst>
+        </p:spPr>
+      </p:sp>
+      <p:sp>
+        <p:nvSpPr>
+          <p:cNvPr id="17" name="Text 15"/>
+          <p:cNvSpPr txBox="1"/>
+          <p:nvPr/>
+        </p:nvSpPr>
+        <p:spPr>
+          <a:xfrm>
+            <a:off x="886968" y="4370832"/>
+            <a:ext cx="10417759" cy="1188720"/>
           </a:xfrm>
           <a:prstGeom prst="rect">
             <a:avLst/>
@@ -2844,28 +2793,79 @@
           <a:p>
             <a:pPr indent="0" marL="0">
               <a:lnSpc>
-                <a:spcPct val="110000"/>
+                <a:spcPct val="112000"/>
               </a:lnSpc>
               <a:buNone/>
             </a:pPr>
             <a:r>
-              <a:rPr lang="en-US" sz="1200" dirty="0">
-                <a:solidFill>
-                  <a:srgbClr val="9BA79B"/>
+              <a:rPr lang="en-US" sz="1350" b="1" dirty="0">
+                <a:solidFill>
+                  <a:srgbClr val="F2B944"/>
                 </a:solidFill>
                 <a:latin typeface="Calibri" pitchFamily="34" charset="0"/>
                 <a:ea typeface="Calibri" pitchFamily="34" charset="-122"/>
                 <a:cs typeface="Calibri" pitchFamily="34" charset="-120"/>
               </a:rPr>
-              <a:t>Rapprochement en masse et traces de décision de qualité audit pour chaque vérification.</a:t>
-            </a:r>
-            <a:endParaRPr lang="en-US" sz="1200" dirty="0"/>
-          </a:p>
-        </p:txBody>
-      </p:sp>
-      <p:sp>
-        <p:nvSpPr>
-          <p:cNvPr id="24" name="Text 18"/>
+              <a:t>6 packs LIVE ajustés à la main aujourd’hui</a:t>
+            </a:r>
+            <a:pPr indent="0" marL="0">
+              <a:lnSpc>
+                <a:spcPct val="112000"/>
+              </a:lnSpc>
+              <a:buNone/>
+            </a:pPr>
+            <a:r>
+              <a:rPr lang="en-US" sz="1350" dirty="0">
+                <a:solidFill>
+                  <a:srgbClr val="E9E4D5"/>
+                </a:solidFill>
+                <a:latin typeface="Calibri" pitchFamily="34" charset="0"/>
+                <a:ea typeface="Calibri" pitchFamily="34" charset="-122"/>
+                <a:cs typeface="Calibri" pitchFamily="34" charset="-120"/>
+              </a:rPr>
+              <a:t> et en croissance — vérification automatique, sans intervention. Tout autre opérateur est </a:t>
+            </a:r>
+            <a:pPr indent="0" marL="0">
+              <a:lnSpc>
+                <a:spcPct val="112000"/>
+              </a:lnSpc>
+              <a:buNone/>
+            </a:pPr>
+            <a:r>
+              <a:rPr lang="en-US" sz="1350" b="1" dirty="0">
+                <a:solidFill>
+                  <a:srgbClr val="F2B944"/>
+                </a:solidFill>
+                <a:latin typeface="Calibri" pitchFamily="34" charset="0"/>
+                <a:ea typeface="Calibri" pitchFamily="34" charset="-122"/>
+                <a:cs typeface="Calibri" pitchFamily="34" charset="-120"/>
+              </a:rPr>
+              <a:t>prêt à l’emploi</a:t>
+            </a:r>
+            <a:pPr indent="0" marL="0">
+              <a:lnSpc>
+                <a:spcPct val="112000"/>
+              </a:lnSpc>
+              <a:buNone/>
+            </a:pPr>
+            <a:r>
+              <a:rPr lang="en-US" sz="1350" dirty="0">
+                <a:solidFill>
+                  <a:srgbClr val="E9E4D5"/>
+                </a:solidFill>
+                <a:latin typeface="Calibri" pitchFamily="34" charset="0"/>
+                <a:ea typeface="Calibri" pitchFamily="34" charset="-122"/>
+                <a:cs typeface="Calibri" pitchFamily="34" charset="-120"/>
+              </a:rPr>
+              <a:t> : un analyseur générique multilingue structure déjà son SMS à un niveau de confiance moindre jusqu’à la publication d’un pack précis. Rien n’est présenté comme pleinement pris en charge tant que ça ne l’est pas — et aucune API opérateur n’est jamais requise.</a:t>
+            </a:r>
+            <a:endParaRPr lang="en-US" sz="1350" dirty="0"/>
+          </a:p>
+        </p:txBody>
+      </p:sp>
+      <p:sp>
+        <p:nvSpPr>
+          <p:cNvPr id="18" name="Text 16"/>
           <p:cNvSpPr txBox="1"/>
           <p:nvPr/>
         </p:nvSpPr>
@@ -2930,7 +2930,7 @@
     <p:bg>
       <p:bgPr>
         <a:solidFill>
-          <a:srgbClr val="F5EFDF"/>
+          <a:srgbClr val="0C231C"/>
         </a:solidFill>
       </p:bgPr>
     </p:bg>
@@ -2956,8 +2956,8 @@
         </p:nvSpPr>
         <p:spPr>
           <a:xfrm>
-            <a:off x="566928" y="777240"/>
-            <a:ext cx="8229600" cy="274320"/>
+            <a:off x="566928" y="640080"/>
+            <a:ext cx="10058400" cy="274320"/>
           </a:xfrm>
           <a:prstGeom prst="rect">
             <a:avLst/>
@@ -2973,7 +2973,7 @@
               <a:buNone/>
             </a:pPr>
             <a:r>
-              <a:rPr lang="en-US" sz="1150" b="1" spc="300" kern="0" dirty="0">
+              <a:rPr lang="en-US" sz="1150" b="1" spc="250" kern="0" dirty="0">
                 <a:solidFill>
                   <a:srgbClr val="E8A11F"/>
                 </a:solidFill>
@@ -2981,7 +2981,7 @@
                 <a:ea typeface="Courier New" pitchFamily="34" charset="-122"/>
                 <a:cs typeface="Courier New" pitchFamily="34" charset="-120"/>
               </a:rPr>
-              <a:t>POURQUOI KODA, POURQUOI MAINTENANT</a:t>
+              <a:t>LE MODÈLE</a:t>
             </a:r>
             <a:endParaRPr lang="en-US" sz="1150" dirty="0"/>
           </a:p>
@@ -2995,8 +2995,8 @@
         </p:nvSpPr>
         <p:spPr>
           <a:xfrm>
-            <a:off x="566928" y="1143000"/>
-            <a:ext cx="11155680" cy="822960"/>
+            <a:off x="566928" y="960120"/>
+            <a:ext cx="11064240" cy="640080"/>
           </a:xfrm>
           <a:prstGeom prst="rect">
             <a:avLst/>
@@ -3012,17 +3012,17 @@
               <a:buNone/>
             </a:pPr>
             <a:r>
-              <a:rPr lang="en-US" sz="3100" b="1" dirty="0">
-                <a:solidFill>
-                  <a:srgbClr val="081813"/>
+              <a:rPr lang="en-US" sz="2900" b="1" dirty="0">
+                <a:solidFill>
+                  <a:srgbClr val="E9E4D5"/>
                 </a:solidFill>
                 <a:latin typeface="Arial" pitchFamily="34" charset="0"/>
                 <a:ea typeface="Arial" pitchFamily="34" charset="-122"/>
                 <a:cs typeface="Arial" pitchFamily="34" charset="-120"/>
               </a:rPr>
-              <a:t>Ça marche aujourd’hui — et c’est honnête sur ce que ça fait.</a:t>
-            </a:r>
-            <a:endParaRPr lang="en-US" sz="3100" dirty="0"/>
+              <a:t>Gratuit jusqu’à ce que votre commerçant soit vraiment payé.</a:t>
+            </a:r>
+            <a:endParaRPr lang="en-US" sz="2900" dirty="0"/>
           </a:p>
         </p:txBody>
       </p:sp>
@@ -3034,120 +3034,990 @@
         </p:nvSpPr>
         <p:spPr>
           <a:xfrm>
-            <a:off x="566928" y="2331720"/>
-            <a:ext cx="5349240" cy="1371600"/>
+            <a:off x="566928" y="2148840"/>
+            <a:ext cx="1660093" cy="2148840"/>
           </a:xfrm>
           <a:prstGeom prst="roundRect">
             <a:avLst>
-              <a:gd name="adj" fmla="val 6667"/>
+              <a:gd name="adj" fmla="val 6059"/>
             </a:avLst>
           </a:prstGeom>
           <a:solidFill>
-            <a:srgbClr val="FFFFFF"/>
+            <a:srgbClr val="123027"/>
           </a:solidFill>
           <a:ln w="12700">
             <a:solidFill>
-              <a:srgbClr val="E4DCC6"/>
+              <a:srgbClr val="2A4034"/>
             </a:solidFill>
             <a:prstDash val="solid"/>
           </a:ln>
-        </p:spPr>
-      </p:sp>
-      <p:sp>
-        <p:nvSpPr>
-          <p:cNvPr id="5" name="Shape 3"/>
+          <a:effectLst>
+            <a:outerShdw sx="100000" sy="100000" kx="0" ky="0" algn="bl" rotWithShape="0" blurRad="127000" dist="50800" dir="5400000">
+              <a:srgbClr val="000000">
+                <a:alpha val="35000"/>
+              </a:srgbClr>
+            </a:outerShdw>
+          </a:effectLst>
+        </p:spPr>
+      </p:sp>
+      <p:sp>
+        <p:nvSpPr>
+          <p:cNvPr id="5" name="Text 3"/>
+          <p:cNvSpPr txBox="1"/>
+          <p:nvPr/>
+        </p:nvSpPr>
+        <p:spPr>
+          <a:xfrm>
+            <a:off x="612648" y="2368296"/>
+            <a:ext cx="1568653" cy="365760"/>
+          </a:xfrm>
+          <a:prstGeom prst="rect">
+            <a:avLst/>
+          </a:prstGeom>
+          <a:noFill/>
+          <a:ln/>
+        </p:spPr>
+        <p:txBody>
+          <a:bodyPr wrap="square" lIns="0" tIns="0" rIns="0" bIns="0" rtlCol="0" anchor="ctr"/>
+          <a:lstStyle/>
+          <a:p>
+            <a:pPr algn="ctr" indent="0" marL="0">
+              <a:buNone/>
+            </a:pPr>
+            <a:r>
+              <a:rPr lang="en-US" sz="1350" b="1" dirty="0">
+                <a:solidFill>
+                  <a:srgbClr val="E9E4D5"/>
+                </a:solidFill>
+                <a:latin typeface="Arial" pitchFamily="34" charset="0"/>
+                <a:ea typeface="Arial" pitchFamily="34" charset="-122"/>
+                <a:cs typeface="Arial" pitchFamily="34" charset="-120"/>
+              </a:rPr>
+              <a:t>Marché</a:t>
+            </a:r>
+            <a:endParaRPr lang="en-US" sz="1350" dirty="0"/>
+          </a:p>
+        </p:txBody>
+      </p:sp>
+      <p:sp>
+        <p:nvSpPr>
+          <p:cNvPr id="6" name="Text 4"/>
+          <p:cNvSpPr txBox="1"/>
+          <p:nvPr/>
+        </p:nvSpPr>
+        <p:spPr>
+          <a:xfrm>
+            <a:off x="603504" y="2834640"/>
+            <a:ext cx="1586941" cy="640080"/>
+          </a:xfrm>
+          <a:prstGeom prst="rect">
+            <a:avLst/>
+          </a:prstGeom>
+          <a:noFill/>
+          <a:ln/>
+        </p:spPr>
+        <p:txBody>
+          <a:bodyPr wrap="square" lIns="0" tIns="0" rIns="0" bIns="0" rtlCol="0" anchor="ctr"/>
+          <a:lstStyle/>
+          <a:p>
+            <a:pPr algn="ctr" indent="0" marL="0">
+              <a:buNone/>
+            </a:pPr>
+            <a:r>
+              <a:rPr lang="en-US" sz="2700" b="1" dirty="0">
+                <a:solidFill>
+                  <a:srgbClr val="E8A11F"/>
+                </a:solidFill>
+                <a:latin typeface="Arial" pitchFamily="34" charset="0"/>
+                <a:ea typeface="Arial" pitchFamily="34" charset="-122"/>
+                <a:cs typeface="Arial" pitchFamily="34" charset="-120"/>
+              </a:rPr>
+              <a:t>$0</a:t>
+            </a:r>
+            <a:endParaRPr lang="en-US" sz="2700" dirty="0"/>
+          </a:p>
+        </p:txBody>
+      </p:sp>
+      <p:sp>
+        <p:nvSpPr>
+          <p:cNvPr id="7" name="Text 5"/>
+          <p:cNvSpPr txBox="1"/>
+          <p:nvPr/>
+        </p:nvSpPr>
+        <p:spPr>
+          <a:xfrm>
+            <a:off x="621792" y="3566160"/>
+            <a:ext cx="1550365" cy="594360"/>
+          </a:xfrm>
+          <a:prstGeom prst="rect">
+            <a:avLst/>
+          </a:prstGeom>
+          <a:noFill/>
+          <a:ln/>
+        </p:spPr>
+        <p:txBody>
+          <a:bodyPr wrap="square" lIns="0" tIns="0" rIns="0" bIns="0" rtlCol="0" anchor="ctr"/>
+          <a:lstStyle/>
+          <a:p>
+            <a:pPr algn="ctr" indent="0" marL="0">
+              <a:lnSpc>
+                <a:spcPct val="105000"/>
+              </a:lnSpc>
+              <a:buNone/>
+            </a:pPr>
+            <a:r>
+              <a:rPr lang="en-US" sz="1000" dirty="0">
+                <a:solidFill>
+                  <a:srgbClr val="9BA79B"/>
+                </a:solidFill>
+                <a:latin typeface="Calibri" pitchFamily="34" charset="0"/>
+                <a:ea typeface="Calibri" pitchFamily="34" charset="-122"/>
+                <a:cs typeface="Calibri" pitchFamily="34" charset="-120"/>
+              </a:rPr>
+              <a:t>10 / mois · à vie</a:t>
+            </a:r>
+            <a:endParaRPr lang="en-US" sz="1000" dirty="0"/>
+          </a:p>
+        </p:txBody>
+      </p:sp>
+      <p:sp>
+        <p:nvSpPr>
+          <p:cNvPr id="8" name="Shape 6"/>
           <p:cNvSpPr/>
           <p:nvPr/>
         </p:nvSpPr>
         <p:spPr>
           <a:xfrm>
-            <a:off x="804672" y="2606040"/>
-            <a:ext cx="548640" cy="548640"/>
+            <a:off x="2446477" y="2148840"/>
+            <a:ext cx="1660093" cy="2148840"/>
           </a:xfrm>
           <a:prstGeom prst="roundRect">
             <a:avLst>
-              <a:gd name="adj" fmla="val 16667"/>
+              <a:gd name="adj" fmla="val 6059"/>
+            </a:avLst>
+          </a:prstGeom>
+          <a:solidFill>
+            <a:srgbClr val="123027"/>
+          </a:solidFill>
+          <a:ln w="12700">
+            <a:solidFill>
+              <a:srgbClr val="2A4034"/>
+            </a:solidFill>
+            <a:prstDash val="solid"/>
+          </a:ln>
+          <a:effectLst>
+            <a:outerShdw sx="100000" sy="100000" kx="0" ky="0" algn="bl" rotWithShape="0" blurRad="127000" dist="50800" dir="5400000">
+              <a:srgbClr val="000000">
+                <a:alpha val="35000"/>
+              </a:srgbClr>
+            </a:outerShdw>
+          </a:effectLst>
+        </p:spPr>
+      </p:sp>
+      <p:sp>
+        <p:nvSpPr>
+          <p:cNvPr id="9" name="Text 7"/>
+          <p:cNvSpPr txBox="1"/>
+          <p:nvPr/>
+        </p:nvSpPr>
+        <p:spPr>
+          <a:xfrm>
+            <a:off x="2492197" y="2368296"/>
+            <a:ext cx="1568653" cy="365760"/>
+          </a:xfrm>
+          <a:prstGeom prst="rect">
+            <a:avLst/>
+          </a:prstGeom>
+          <a:noFill/>
+          <a:ln/>
+        </p:spPr>
+        <p:txBody>
+          <a:bodyPr wrap="square" lIns="0" tIns="0" rIns="0" bIns="0" rtlCol="0" anchor="ctr"/>
+          <a:lstStyle/>
+          <a:p>
+            <a:pPr algn="ctr" indent="0" marL="0">
+              <a:buNone/>
+            </a:pPr>
+            <a:r>
+              <a:rPr lang="en-US" sz="1350" b="1" dirty="0">
+                <a:solidFill>
+                  <a:srgbClr val="E9E4D5"/>
+                </a:solidFill>
+                <a:latin typeface="Arial" pitchFamily="34" charset="0"/>
+                <a:ea typeface="Arial" pitchFamily="34" charset="-122"/>
+                <a:cs typeface="Arial" pitchFamily="34" charset="-120"/>
+              </a:rPr>
+              <a:t>Boutique</a:t>
+            </a:r>
+            <a:endParaRPr lang="en-US" sz="1350" dirty="0"/>
+          </a:p>
+        </p:txBody>
+      </p:sp>
+      <p:sp>
+        <p:nvSpPr>
+          <p:cNvPr id="10" name="Text 8"/>
+          <p:cNvSpPr txBox="1"/>
+          <p:nvPr/>
+        </p:nvSpPr>
+        <p:spPr>
+          <a:xfrm>
+            <a:off x="2483053" y="2834640"/>
+            <a:ext cx="1586941" cy="640080"/>
+          </a:xfrm>
+          <a:prstGeom prst="rect">
+            <a:avLst/>
+          </a:prstGeom>
+          <a:noFill/>
+          <a:ln/>
+        </p:spPr>
+        <p:txBody>
+          <a:bodyPr wrap="square" lIns="0" tIns="0" rIns="0" bIns="0" rtlCol="0" anchor="ctr"/>
+          <a:lstStyle/>
+          <a:p>
+            <a:pPr algn="ctr" indent="0" marL="0">
+              <a:buNone/>
+            </a:pPr>
+            <a:r>
+              <a:rPr lang="en-US" sz="2700" b="1" dirty="0">
+                <a:solidFill>
+                  <a:srgbClr val="E8A11F"/>
+                </a:solidFill>
+                <a:latin typeface="Arial" pitchFamily="34" charset="0"/>
+                <a:ea typeface="Arial" pitchFamily="34" charset="-122"/>
+                <a:cs typeface="Arial" pitchFamily="34" charset="-120"/>
+              </a:rPr>
+              <a:t>$5</a:t>
+            </a:r>
+            <a:endParaRPr lang="en-US" sz="2700" dirty="0"/>
+          </a:p>
+        </p:txBody>
+      </p:sp>
+      <p:sp>
+        <p:nvSpPr>
+          <p:cNvPr id="11" name="Text 9"/>
+          <p:cNvSpPr txBox="1"/>
+          <p:nvPr/>
+        </p:nvSpPr>
+        <p:spPr>
+          <a:xfrm>
+            <a:off x="2501341" y="3566160"/>
+            <a:ext cx="1550365" cy="594360"/>
+          </a:xfrm>
+          <a:prstGeom prst="rect">
+            <a:avLst/>
+          </a:prstGeom>
+          <a:noFill/>
+          <a:ln/>
+        </p:spPr>
+        <p:txBody>
+          <a:bodyPr wrap="square" lIns="0" tIns="0" rIns="0" bIns="0" rtlCol="0" anchor="ctr"/>
+          <a:lstStyle/>
+          <a:p>
+            <a:pPr algn="ctr" indent="0" marL="0">
+              <a:lnSpc>
+                <a:spcPct val="105000"/>
+              </a:lnSpc>
+              <a:buNone/>
+            </a:pPr>
+            <a:r>
+              <a:rPr lang="en-US" sz="1000" dirty="0">
+                <a:solidFill>
+                  <a:srgbClr val="9BA79B"/>
+                </a:solidFill>
+                <a:latin typeface="Calibri" pitchFamily="34" charset="0"/>
+                <a:ea typeface="Calibri" pitchFamily="34" charset="-122"/>
+                <a:cs typeface="Calibri" pitchFamily="34" charset="-120"/>
+              </a:rPr>
+              <a:t>190 vérifs / mois</a:t>
+            </a:r>
+            <a:endParaRPr lang="en-US" sz="1000" dirty="0"/>
+          </a:p>
+        </p:txBody>
+      </p:sp>
+      <p:sp>
+        <p:nvSpPr>
+          <p:cNvPr id="12" name="Shape 10"/>
+          <p:cNvSpPr/>
+          <p:nvPr/>
+        </p:nvSpPr>
+        <p:spPr>
+          <a:xfrm>
+            <a:off x="4326026" y="2148840"/>
+            <a:ext cx="1660093" cy="2148840"/>
+          </a:xfrm>
+          <a:prstGeom prst="roundRect">
+            <a:avLst>
+              <a:gd name="adj" fmla="val 6059"/>
+            </a:avLst>
+          </a:prstGeom>
+          <a:solidFill>
+            <a:srgbClr val="17392E"/>
+          </a:solidFill>
+          <a:ln w="12700">
+            <a:solidFill>
+              <a:srgbClr val="2A4034"/>
+            </a:solidFill>
+            <a:prstDash val="solid"/>
+          </a:ln>
+          <a:effectLst>
+            <a:outerShdw sx="100000" sy="100000" kx="0" ky="0" algn="bl" rotWithShape="0" blurRad="127000" dist="50800" dir="5400000">
+              <a:srgbClr val="000000">
+                <a:alpha val="35000"/>
+              </a:srgbClr>
+            </a:outerShdw>
+          </a:effectLst>
+        </p:spPr>
+      </p:sp>
+      <p:sp>
+        <p:nvSpPr>
+          <p:cNvPr id="13" name="Shape 11"/>
+          <p:cNvSpPr/>
+          <p:nvPr/>
+        </p:nvSpPr>
+        <p:spPr>
+          <a:xfrm>
+            <a:off x="4326026" y="2148840"/>
+            <a:ext cx="1660093" cy="2148840"/>
+          </a:xfrm>
+          <a:prstGeom prst="roundRect">
+            <a:avLst>
+              <a:gd name="adj" fmla="val 6059"/>
+            </a:avLst>
+          </a:prstGeom>
+          <a:ln w="25400">
+            <a:solidFill>
+              <a:srgbClr val="E8A11F"/>
+            </a:solidFill>
+            <a:prstDash val="solid"/>
+          </a:ln>
+        </p:spPr>
+      </p:sp>
+      <p:sp>
+        <p:nvSpPr>
+          <p:cNvPr id="14" name="Text 12"/>
+          <p:cNvSpPr txBox="1"/>
+          <p:nvPr/>
+        </p:nvSpPr>
+        <p:spPr>
+          <a:xfrm>
+            <a:off x="4371746" y="2368296"/>
+            <a:ext cx="1568653" cy="365760"/>
+          </a:xfrm>
+          <a:prstGeom prst="rect">
+            <a:avLst/>
+          </a:prstGeom>
+          <a:noFill/>
+          <a:ln/>
+        </p:spPr>
+        <p:txBody>
+          <a:bodyPr wrap="square" lIns="0" tIns="0" rIns="0" bIns="0" rtlCol="0" anchor="ctr"/>
+          <a:lstStyle/>
+          <a:p>
+            <a:pPr algn="ctr" indent="0" marL="0">
+              <a:buNone/>
+            </a:pPr>
+            <a:r>
+              <a:rPr lang="en-US" sz="1350" b="1" dirty="0">
+                <a:solidFill>
+                  <a:srgbClr val="E9E4D5"/>
+                </a:solidFill>
+                <a:latin typeface="Arial" pitchFamily="34" charset="0"/>
+                <a:ea typeface="Arial" pitchFamily="34" charset="-122"/>
+                <a:cs typeface="Arial" pitchFamily="34" charset="-120"/>
+              </a:rPr>
+              <a:t>Commerce</a:t>
+            </a:r>
+            <a:endParaRPr lang="en-US" sz="1350" dirty="0"/>
+          </a:p>
+        </p:txBody>
+      </p:sp>
+      <p:sp>
+        <p:nvSpPr>
+          <p:cNvPr id="15" name="Text 13"/>
+          <p:cNvSpPr txBox="1"/>
+          <p:nvPr/>
+        </p:nvSpPr>
+        <p:spPr>
+          <a:xfrm>
+            <a:off x="4362602" y="2834640"/>
+            <a:ext cx="1586941" cy="640080"/>
+          </a:xfrm>
+          <a:prstGeom prst="rect">
+            <a:avLst/>
+          </a:prstGeom>
+          <a:noFill/>
+          <a:ln/>
+        </p:spPr>
+        <p:txBody>
+          <a:bodyPr wrap="square" lIns="0" tIns="0" rIns="0" bIns="0" rtlCol="0" anchor="ctr"/>
+          <a:lstStyle/>
+          <a:p>
+            <a:pPr algn="ctr" indent="0" marL="0">
+              <a:buNone/>
+            </a:pPr>
+            <a:r>
+              <a:rPr lang="en-US" sz="2700" b="1" dirty="0">
+                <a:solidFill>
+                  <a:srgbClr val="E8A11F"/>
+                </a:solidFill>
+                <a:latin typeface="Arial" pitchFamily="34" charset="0"/>
+                <a:ea typeface="Arial" pitchFamily="34" charset="-122"/>
+                <a:cs typeface="Arial" pitchFamily="34" charset="-120"/>
+              </a:rPr>
+              <a:t>$20</a:t>
+            </a:r>
+            <a:endParaRPr lang="en-US" sz="2700" dirty="0"/>
+          </a:p>
+        </p:txBody>
+      </p:sp>
+      <p:sp>
+        <p:nvSpPr>
+          <p:cNvPr id="16" name="Text 14"/>
+          <p:cNvSpPr txBox="1"/>
+          <p:nvPr/>
+        </p:nvSpPr>
+        <p:spPr>
+          <a:xfrm>
+            <a:off x="4380890" y="3566160"/>
+            <a:ext cx="1550365" cy="594360"/>
+          </a:xfrm>
+          <a:prstGeom prst="rect">
+            <a:avLst/>
+          </a:prstGeom>
+          <a:noFill/>
+          <a:ln/>
+        </p:spPr>
+        <p:txBody>
+          <a:bodyPr wrap="square" lIns="0" tIns="0" rIns="0" bIns="0" rtlCol="0" anchor="ctr"/>
+          <a:lstStyle/>
+          <a:p>
+            <a:pPr algn="ctr" indent="0" marL="0">
+              <a:lnSpc>
+                <a:spcPct val="105000"/>
+              </a:lnSpc>
+              <a:buNone/>
+            </a:pPr>
+            <a:r>
+              <a:rPr lang="en-US" sz="1000" dirty="0">
+                <a:solidFill>
+                  <a:srgbClr val="9BA79B"/>
+                </a:solidFill>
+                <a:latin typeface="Calibri" pitchFamily="34" charset="0"/>
+                <a:ea typeface="Calibri" pitchFamily="34" charset="-122"/>
+                <a:cs typeface="Calibri" pitchFamily="34" charset="-120"/>
+              </a:rPr>
+              <a:t>760 vérifs / mois</a:t>
+            </a:r>
+            <a:endParaRPr lang="en-US" sz="1000" dirty="0"/>
+          </a:p>
+        </p:txBody>
+      </p:sp>
+      <p:sp>
+        <p:nvSpPr>
+          <p:cNvPr id="17" name="Shape 15"/>
+          <p:cNvSpPr/>
+          <p:nvPr/>
+        </p:nvSpPr>
+        <p:spPr>
+          <a:xfrm>
+            <a:off x="6205576" y="2148840"/>
+            <a:ext cx="1660093" cy="2148840"/>
+          </a:xfrm>
+          <a:prstGeom prst="roundRect">
+            <a:avLst>
+              <a:gd name="adj" fmla="val 6059"/>
+            </a:avLst>
+          </a:prstGeom>
+          <a:solidFill>
+            <a:srgbClr val="123027"/>
+          </a:solidFill>
+          <a:ln w="12700">
+            <a:solidFill>
+              <a:srgbClr val="2A4034"/>
+            </a:solidFill>
+            <a:prstDash val="solid"/>
+          </a:ln>
+          <a:effectLst>
+            <a:outerShdw sx="100000" sy="100000" kx="0" ky="0" algn="bl" rotWithShape="0" blurRad="127000" dist="50800" dir="5400000">
+              <a:srgbClr val="000000">
+                <a:alpha val="35000"/>
+              </a:srgbClr>
+            </a:outerShdw>
+          </a:effectLst>
+        </p:spPr>
+      </p:sp>
+      <p:sp>
+        <p:nvSpPr>
+          <p:cNvPr id="18" name="Text 16"/>
+          <p:cNvSpPr txBox="1"/>
+          <p:nvPr/>
+        </p:nvSpPr>
+        <p:spPr>
+          <a:xfrm>
+            <a:off x="6251296" y="2368296"/>
+            <a:ext cx="1568653" cy="365760"/>
+          </a:xfrm>
+          <a:prstGeom prst="rect">
+            <a:avLst/>
+          </a:prstGeom>
+          <a:noFill/>
+          <a:ln/>
+        </p:spPr>
+        <p:txBody>
+          <a:bodyPr wrap="square" lIns="0" tIns="0" rIns="0" bIns="0" rtlCol="0" anchor="ctr"/>
+          <a:lstStyle/>
+          <a:p>
+            <a:pPr algn="ctr" indent="0" marL="0">
+              <a:buNone/>
+            </a:pPr>
+            <a:r>
+              <a:rPr lang="en-US" sz="1350" b="1" dirty="0">
+                <a:solidFill>
+                  <a:srgbClr val="E9E4D5"/>
+                </a:solidFill>
+                <a:latin typeface="Arial" pitchFamily="34" charset="0"/>
+                <a:ea typeface="Arial" pitchFamily="34" charset="-122"/>
+                <a:cs typeface="Arial" pitchFamily="34" charset="-120"/>
+              </a:rPr>
+              <a:t>Plateforme</a:t>
+            </a:r>
+            <a:endParaRPr lang="en-US" sz="1350" dirty="0"/>
+          </a:p>
+        </p:txBody>
+      </p:sp>
+      <p:sp>
+        <p:nvSpPr>
+          <p:cNvPr id="19" name="Text 17"/>
+          <p:cNvSpPr txBox="1"/>
+          <p:nvPr/>
+        </p:nvSpPr>
+        <p:spPr>
+          <a:xfrm>
+            <a:off x="6242152" y="2834640"/>
+            <a:ext cx="1586941" cy="640080"/>
+          </a:xfrm>
+          <a:prstGeom prst="rect">
+            <a:avLst/>
+          </a:prstGeom>
+          <a:noFill/>
+          <a:ln/>
+        </p:spPr>
+        <p:txBody>
+          <a:bodyPr wrap="square" lIns="0" tIns="0" rIns="0" bIns="0" rtlCol="0" anchor="ctr"/>
+          <a:lstStyle/>
+          <a:p>
+            <a:pPr algn="ctr" indent="0" marL="0">
+              <a:buNone/>
+            </a:pPr>
+            <a:r>
+              <a:rPr lang="en-US" sz="2700" b="1" dirty="0">
+                <a:solidFill>
+                  <a:srgbClr val="E8A11F"/>
+                </a:solidFill>
+                <a:latin typeface="Arial" pitchFamily="34" charset="0"/>
+                <a:ea typeface="Arial" pitchFamily="34" charset="-122"/>
+                <a:cs typeface="Arial" pitchFamily="34" charset="-120"/>
+              </a:rPr>
+              <a:t>$100</a:t>
+            </a:r>
+            <a:endParaRPr lang="en-US" sz="2700" dirty="0"/>
+          </a:p>
+        </p:txBody>
+      </p:sp>
+      <p:sp>
+        <p:nvSpPr>
+          <p:cNvPr id="20" name="Text 18"/>
+          <p:cNvSpPr txBox="1"/>
+          <p:nvPr/>
+        </p:nvSpPr>
+        <p:spPr>
+          <a:xfrm>
+            <a:off x="6260440" y="3566160"/>
+            <a:ext cx="1550365" cy="594360"/>
+          </a:xfrm>
+          <a:prstGeom prst="rect">
+            <a:avLst/>
+          </a:prstGeom>
+          <a:noFill/>
+          <a:ln/>
+        </p:spPr>
+        <p:txBody>
+          <a:bodyPr wrap="square" lIns="0" tIns="0" rIns="0" bIns="0" rtlCol="0" anchor="ctr"/>
+          <a:lstStyle/>
+          <a:p>
+            <a:pPr algn="ctr" indent="0" marL="0">
+              <a:lnSpc>
+                <a:spcPct val="105000"/>
+              </a:lnSpc>
+              <a:buNone/>
+            </a:pPr>
+            <a:r>
+              <a:rPr lang="en-US" sz="1000" dirty="0">
+                <a:solidFill>
+                  <a:srgbClr val="9BA79B"/>
+                </a:solidFill>
+                <a:latin typeface="Calibri" pitchFamily="34" charset="0"/>
+                <a:ea typeface="Calibri" pitchFamily="34" charset="-122"/>
+                <a:cs typeface="Calibri" pitchFamily="34" charset="-120"/>
+              </a:rPr>
+              <a:t>3 800 / mois</a:t>
+            </a:r>
+            <a:endParaRPr lang="en-US" sz="1000" dirty="0"/>
+          </a:p>
+        </p:txBody>
+      </p:sp>
+      <p:sp>
+        <p:nvSpPr>
+          <p:cNvPr id="21" name="Shape 19"/>
+          <p:cNvSpPr/>
+          <p:nvPr/>
+        </p:nvSpPr>
+        <p:spPr>
+          <a:xfrm>
+            <a:off x="8085125" y="2148840"/>
+            <a:ext cx="1660093" cy="2148840"/>
+          </a:xfrm>
+          <a:prstGeom prst="roundRect">
+            <a:avLst>
+              <a:gd name="adj" fmla="val 6059"/>
+            </a:avLst>
+          </a:prstGeom>
+          <a:solidFill>
+            <a:srgbClr val="123027"/>
+          </a:solidFill>
+          <a:ln w="12700">
+            <a:solidFill>
+              <a:srgbClr val="2A4034"/>
+            </a:solidFill>
+            <a:prstDash val="solid"/>
+          </a:ln>
+          <a:effectLst>
+            <a:outerShdw sx="100000" sy="100000" kx="0" ky="0" algn="bl" rotWithShape="0" blurRad="127000" dist="50800" dir="5400000">
+              <a:srgbClr val="000000">
+                <a:alpha val="35000"/>
+              </a:srgbClr>
+            </a:outerShdw>
+          </a:effectLst>
+        </p:spPr>
+      </p:sp>
+      <p:sp>
+        <p:nvSpPr>
+          <p:cNvPr id="22" name="Text 20"/>
+          <p:cNvSpPr txBox="1"/>
+          <p:nvPr/>
+        </p:nvSpPr>
+        <p:spPr>
+          <a:xfrm>
+            <a:off x="8130845" y="2368296"/>
+            <a:ext cx="1568653" cy="365760"/>
+          </a:xfrm>
+          <a:prstGeom prst="rect">
+            <a:avLst/>
+          </a:prstGeom>
+          <a:noFill/>
+          <a:ln/>
+        </p:spPr>
+        <p:txBody>
+          <a:bodyPr wrap="square" lIns="0" tIns="0" rIns="0" bIns="0" rtlCol="0" anchor="ctr"/>
+          <a:lstStyle/>
+          <a:p>
+            <a:pPr algn="ctr" indent="0" marL="0">
+              <a:buNone/>
+            </a:pPr>
+            <a:r>
+              <a:rPr lang="en-US" sz="1350" b="1" dirty="0">
+                <a:solidFill>
+                  <a:srgbClr val="E9E4D5"/>
+                </a:solidFill>
+                <a:latin typeface="Arial" pitchFamily="34" charset="0"/>
+                <a:ea typeface="Arial" pitchFamily="34" charset="-122"/>
+                <a:cs typeface="Arial" pitchFamily="34" charset="-120"/>
+              </a:rPr>
+              <a:t>Scale</a:t>
+            </a:r>
+            <a:endParaRPr lang="en-US" sz="1350" dirty="0"/>
+          </a:p>
+        </p:txBody>
+      </p:sp>
+      <p:sp>
+        <p:nvSpPr>
+          <p:cNvPr id="23" name="Text 21"/>
+          <p:cNvSpPr txBox="1"/>
+          <p:nvPr/>
+        </p:nvSpPr>
+        <p:spPr>
+          <a:xfrm>
+            <a:off x="8121701" y="2834640"/>
+            <a:ext cx="1586941" cy="640080"/>
+          </a:xfrm>
+          <a:prstGeom prst="rect">
+            <a:avLst/>
+          </a:prstGeom>
+          <a:noFill/>
+          <a:ln/>
+        </p:spPr>
+        <p:txBody>
+          <a:bodyPr wrap="square" lIns="0" tIns="0" rIns="0" bIns="0" rtlCol="0" anchor="ctr"/>
+          <a:lstStyle/>
+          <a:p>
+            <a:pPr algn="ctr" indent="0" marL="0">
+              <a:buNone/>
+            </a:pPr>
+            <a:r>
+              <a:rPr lang="en-US" sz="2700" b="1" dirty="0">
+                <a:solidFill>
+                  <a:srgbClr val="E8A11F"/>
+                </a:solidFill>
+                <a:latin typeface="Arial" pitchFamily="34" charset="0"/>
+                <a:ea typeface="Arial" pitchFamily="34" charset="-122"/>
+                <a:cs typeface="Arial" pitchFamily="34" charset="-120"/>
+              </a:rPr>
+              <a:t>$399</a:t>
+            </a:r>
+            <a:endParaRPr lang="en-US" sz="2700" dirty="0"/>
+          </a:p>
+        </p:txBody>
+      </p:sp>
+      <p:sp>
+        <p:nvSpPr>
+          <p:cNvPr id="24" name="Text 22"/>
+          <p:cNvSpPr txBox="1"/>
+          <p:nvPr/>
+        </p:nvSpPr>
+        <p:spPr>
+          <a:xfrm>
+            <a:off x="8139989" y="3566160"/>
+            <a:ext cx="1550365" cy="594360"/>
+          </a:xfrm>
+          <a:prstGeom prst="rect">
+            <a:avLst/>
+          </a:prstGeom>
+          <a:noFill/>
+          <a:ln/>
+        </p:spPr>
+        <p:txBody>
+          <a:bodyPr wrap="square" lIns="0" tIns="0" rIns="0" bIns="0" rtlCol="0" anchor="ctr"/>
+          <a:lstStyle/>
+          <a:p>
+            <a:pPr algn="ctr" indent="0" marL="0">
+              <a:lnSpc>
+                <a:spcPct val="105000"/>
+              </a:lnSpc>
+              <a:buNone/>
+            </a:pPr>
+            <a:r>
+              <a:rPr lang="en-US" sz="1000" dirty="0">
+                <a:solidFill>
+                  <a:srgbClr val="9BA79B"/>
+                </a:solidFill>
+                <a:latin typeface="Calibri" pitchFamily="34" charset="0"/>
+                <a:ea typeface="Calibri" pitchFamily="34" charset="-122"/>
+                <a:cs typeface="Calibri" pitchFamily="34" charset="-120"/>
+              </a:rPr>
+              <a:t>15 200 / mois</a:t>
+            </a:r>
+            <a:endParaRPr lang="en-US" sz="1000" dirty="0"/>
+          </a:p>
+        </p:txBody>
+      </p:sp>
+      <p:sp>
+        <p:nvSpPr>
+          <p:cNvPr id="25" name="Shape 23"/>
+          <p:cNvSpPr/>
+          <p:nvPr/>
+        </p:nvSpPr>
+        <p:spPr>
+          <a:xfrm>
+            <a:off x="9964674" y="2148840"/>
+            <a:ext cx="1660093" cy="2148840"/>
+          </a:xfrm>
+          <a:prstGeom prst="roundRect">
+            <a:avLst>
+              <a:gd name="adj" fmla="val 6059"/>
+            </a:avLst>
+          </a:prstGeom>
+          <a:solidFill>
+            <a:srgbClr val="123027"/>
+          </a:solidFill>
+          <a:ln w="12700">
+            <a:solidFill>
+              <a:srgbClr val="2A4034"/>
+            </a:solidFill>
+            <a:prstDash val="solid"/>
+          </a:ln>
+          <a:effectLst>
+            <a:outerShdw sx="100000" sy="100000" kx="0" ky="0" algn="bl" rotWithShape="0" blurRad="127000" dist="50800" dir="5400000">
+              <a:srgbClr val="000000">
+                <a:alpha val="35000"/>
+              </a:srgbClr>
+            </a:outerShdw>
+          </a:effectLst>
+        </p:spPr>
+      </p:sp>
+      <p:sp>
+        <p:nvSpPr>
+          <p:cNvPr id="26" name="Text 24"/>
+          <p:cNvSpPr txBox="1"/>
+          <p:nvPr/>
+        </p:nvSpPr>
+        <p:spPr>
+          <a:xfrm>
+            <a:off x="10010394" y="2368296"/>
+            <a:ext cx="1568653" cy="365760"/>
+          </a:xfrm>
+          <a:prstGeom prst="rect">
+            <a:avLst/>
+          </a:prstGeom>
+          <a:noFill/>
+          <a:ln/>
+        </p:spPr>
+        <p:txBody>
+          <a:bodyPr wrap="square" lIns="0" tIns="0" rIns="0" bIns="0" rtlCol="0" anchor="ctr"/>
+          <a:lstStyle/>
+          <a:p>
+            <a:pPr algn="ctr" indent="0" marL="0">
+              <a:buNone/>
+            </a:pPr>
+            <a:r>
+              <a:rPr lang="en-US" sz="1350" b="1" dirty="0">
+                <a:solidFill>
+                  <a:srgbClr val="E9E4D5"/>
+                </a:solidFill>
+                <a:latin typeface="Arial" pitchFamily="34" charset="0"/>
+                <a:ea typeface="Arial" pitchFamily="34" charset="-122"/>
+                <a:cs typeface="Arial" pitchFamily="34" charset="-120"/>
+              </a:rPr>
+              <a:t>Entreprise</a:t>
+            </a:r>
+            <a:endParaRPr lang="en-US" sz="1350" dirty="0"/>
+          </a:p>
+        </p:txBody>
+      </p:sp>
+      <p:sp>
+        <p:nvSpPr>
+          <p:cNvPr id="27" name="Text 25"/>
+          <p:cNvSpPr txBox="1"/>
+          <p:nvPr/>
+        </p:nvSpPr>
+        <p:spPr>
+          <a:xfrm>
+            <a:off x="10001250" y="2834640"/>
+            <a:ext cx="1586941" cy="640080"/>
+          </a:xfrm>
+          <a:prstGeom prst="rect">
+            <a:avLst/>
+          </a:prstGeom>
+          <a:noFill/>
+          <a:ln/>
+        </p:spPr>
+        <p:txBody>
+          <a:bodyPr wrap="square" lIns="0" tIns="0" rIns="0" bIns="0" rtlCol="0" anchor="ctr"/>
+          <a:lstStyle/>
+          <a:p>
+            <a:pPr algn="ctr" indent="0" marL="0">
+              <a:buNone/>
+            </a:pPr>
+            <a:r>
+              <a:rPr lang="en-US" sz="1500" b="1" dirty="0">
+                <a:solidFill>
+                  <a:srgbClr val="E8A11F"/>
+                </a:solidFill>
+                <a:latin typeface="Arial" pitchFamily="34" charset="0"/>
+                <a:ea typeface="Arial" pitchFamily="34" charset="-122"/>
+                <a:cs typeface="Arial" pitchFamily="34" charset="-120"/>
+              </a:rPr>
+              <a:t>Sur mesure</a:t>
+            </a:r>
+            <a:endParaRPr lang="en-US" sz="1500" dirty="0"/>
+          </a:p>
+        </p:txBody>
+      </p:sp>
+      <p:sp>
+        <p:nvSpPr>
+          <p:cNvPr id="28" name="Text 26"/>
+          <p:cNvSpPr txBox="1"/>
+          <p:nvPr/>
+        </p:nvSpPr>
+        <p:spPr>
+          <a:xfrm>
+            <a:off x="10019538" y="3566160"/>
+            <a:ext cx="1550365" cy="594360"/>
+          </a:xfrm>
+          <a:prstGeom prst="rect">
+            <a:avLst/>
+          </a:prstGeom>
+          <a:noFill/>
+          <a:ln/>
+        </p:spPr>
+        <p:txBody>
+          <a:bodyPr wrap="square" lIns="0" tIns="0" rIns="0" bIns="0" rtlCol="0" anchor="ctr"/>
+          <a:lstStyle/>
+          <a:p>
+            <a:pPr algn="ctr" indent="0" marL="0">
+              <a:lnSpc>
+                <a:spcPct val="105000"/>
+              </a:lnSpc>
+              <a:buNone/>
+            </a:pPr>
+            <a:r>
+              <a:rPr lang="en-US" sz="1000" dirty="0">
+                <a:solidFill>
+                  <a:srgbClr val="9BA79B"/>
+                </a:solidFill>
+                <a:latin typeface="Calibri" pitchFamily="34" charset="0"/>
+                <a:ea typeface="Calibri" pitchFamily="34" charset="-122"/>
+                <a:cs typeface="Calibri" pitchFamily="34" charset="-120"/>
+              </a:rPr>
+              <a:t>volume engagé</a:t>
+            </a:r>
+            <a:endParaRPr lang="en-US" sz="1000" dirty="0"/>
+          </a:p>
+        </p:txBody>
+      </p:sp>
+      <p:sp>
+        <p:nvSpPr>
+          <p:cNvPr id="29" name="Shape 27"/>
+          <p:cNvSpPr/>
+          <p:nvPr/>
+        </p:nvSpPr>
+        <p:spPr>
+          <a:xfrm>
+            <a:off x="566928" y="4663440"/>
+            <a:ext cx="11057839" cy="1097280"/>
+          </a:xfrm>
+          <a:prstGeom prst="roundRect">
+            <a:avLst>
+              <a:gd name="adj" fmla="val 9167"/>
             </a:avLst>
           </a:prstGeom>
           <a:solidFill>
             <a:srgbClr val="081813"/>
           </a:solidFill>
-          <a:ln/>
-        </p:spPr>
-      </p:sp>
-      <p:pic>
-        <p:nvPicPr>
-          <p:cNvPr id="6" name="Image 0" descr="preencoded.png">    </p:cNvPr>
-          <p:cNvPicPr>
-            <a:picLocks noChangeAspect="1"/>
-          </p:cNvPicPr>
-          <p:nvPr/>
-        </p:nvPicPr>
-        <p:blipFill>
-          <a:blip r:embed="rId1"/>
-          <a:stretch>
-            <a:fillRect/>
-          </a:stretch>
-        </p:blipFill>
-        <p:spPr>
-          <a:xfrm>
-            <a:off x="914400" y="2715768"/>
-            <a:ext cx="329184" cy="329184"/>
-          </a:xfrm>
-          <a:prstGeom prst="rect">
-            <a:avLst/>
-          </a:prstGeom>
-        </p:spPr>
-      </p:pic>
-      <p:sp>
-        <p:nvSpPr>
-          <p:cNvPr id="7" name="Text 4"/>
-          <p:cNvSpPr txBox="1"/>
-          <p:nvPr/>
-        </p:nvSpPr>
-        <p:spPr>
-          <a:xfrm>
-            <a:off x="1536192" y="2496312"/>
-            <a:ext cx="4224528" cy="365760"/>
-          </a:xfrm>
-          <a:prstGeom prst="rect">
-            <a:avLst/>
-          </a:prstGeom>
-          <a:noFill/>
-          <a:ln/>
-        </p:spPr>
-        <p:txBody>
-          <a:bodyPr wrap="square" lIns="0" tIns="0" rIns="0" bIns="0" rtlCol="0" anchor="ctr"/>
-          <a:lstStyle/>
-          <a:p>
-            <a:pPr indent="0" marL="0">
-              <a:buNone/>
-            </a:pPr>
-            <a:r>
-              <a:rPr lang="en-US" sz="1450" b="1" dirty="0">
-                <a:solidFill>
-                  <a:srgbClr val="081813"/>
-                </a:solidFill>
-                <a:latin typeface="Arial" pitchFamily="34" charset="0"/>
-                <a:ea typeface="Arial" pitchFamily="34" charset="-122"/>
-                <a:cs typeface="Arial" pitchFamily="34" charset="-120"/>
-              </a:rPr>
-              <a:t>Opérationnel maintenant, pas un jour</a:t>
-            </a:r>
-            <a:endParaRPr lang="en-US" sz="1450" dirty="0"/>
-          </a:p>
-        </p:txBody>
-      </p:sp>
-      <p:sp>
-        <p:nvSpPr>
-          <p:cNvPr id="8" name="Text 5"/>
-          <p:cNvSpPr txBox="1"/>
-          <p:nvPr/>
-        </p:nvSpPr>
-        <p:spPr>
-          <a:xfrm>
-            <a:off x="1536192" y="2880360"/>
-            <a:ext cx="4224528" cy="731520"/>
+          <a:ln w="12700">
+            <a:solidFill>
+              <a:srgbClr val="2A4034"/>
+            </a:solidFill>
+            <a:prstDash val="solid"/>
+          </a:ln>
+          <a:effectLst>
+            <a:outerShdw sx="100000" sy="100000" kx="0" ky="0" algn="bl" rotWithShape="0" blurRad="127000" dist="50800" dir="5400000">
+              <a:srgbClr val="000000">
+                <a:alpha val="35000"/>
+              </a:srgbClr>
+            </a:outerShdw>
+          </a:effectLst>
+        </p:spPr>
+      </p:sp>
+      <p:sp>
+        <p:nvSpPr>
+          <p:cNvPr id="30" name="Text 28"/>
+          <p:cNvSpPr txBox="1"/>
+          <p:nvPr/>
+        </p:nvSpPr>
+        <p:spPr>
+          <a:xfrm>
+            <a:off x="886968" y="4828032"/>
+            <a:ext cx="10417759" cy="822960"/>
           </a:xfrm>
           <a:prstGeom prst="rect">
             <a:avLst/>
@@ -3161,174 +4031,37 @@
           <a:p>
             <a:pPr indent="0" marL="0">
               <a:lnSpc>
-                <a:spcPct val="106000"/>
+                <a:spcPct val="108000"/>
               </a:lnSpc>
               <a:buNone/>
             </a:pPr>
             <a:r>
-              <a:rPr lang="en-US" sz="1200" dirty="0">
-                <a:solidFill>
-                  <a:srgbClr val="5A6A5E"/>
+              <a:rPr lang="en-US" sz="1200" b="1" i="1" dirty="0">
+                <a:solidFill>
+                  <a:srgbClr val="F2B944"/>
                 </a:solidFill>
                 <a:latin typeface="Calibri" pitchFamily="34" charset="0"/>
                 <a:ea typeface="Calibri" pitchFamily="34" charset="-122"/>
                 <a:cs typeface="Calibri" pitchFamily="34" charset="-120"/>
               </a:rPr>
-              <a:t>Un moteur sans dépendance qui vérifie déjà sur cinq portes — pas une feuille de route.</a:t>
-            </a:r>
-            <a:endParaRPr lang="en-US" sz="1200" dirty="0"/>
-          </a:p>
-        </p:txBody>
-      </p:sp>
-      <p:sp>
-        <p:nvSpPr>
-          <p:cNvPr id="9" name="Shape 6"/>
-          <p:cNvSpPr/>
-          <p:nvPr/>
-        </p:nvSpPr>
-        <p:spPr>
-          <a:xfrm>
-            <a:off x="6144768" y="2331720"/>
-            <a:ext cx="5349240" cy="1371600"/>
-          </a:xfrm>
-          <a:prstGeom prst="roundRect">
-            <a:avLst>
-              <a:gd name="adj" fmla="val 6667"/>
-            </a:avLst>
-          </a:prstGeom>
-          <a:solidFill>
-            <a:srgbClr val="FFFFFF"/>
-          </a:solidFill>
-          <a:ln w="12700">
-            <a:solidFill>
-              <a:srgbClr val="E4DCC6"/>
-            </a:solidFill>
-            <a:prstDash val="solid"/>
-          </a:ln>
-        </p:spPr>
-      </p:sp>
-      <p:sp>
-        <p:nvSpPr>
-          <p:cNvPr id="10" name="Shape 7"/>
-          <p:cNvSpPr/>
-          <p:nvPr/>
-        </p:nvSpPr>
-        <p:spPr>
-          <a:xfrm>
-            <a:off x="6382512" y="2606040"/>
-            <a:ext cx="548640" cy="548640"/>
-          </a:xfrm>
-          <a:prstGeom prst="roundRect">
-            <a:avLst>
-              <a:gd name="adj" fmla="val 16667"/>
-            </a:avLst>
-          </a:prstGeom>
-          <a:solidFill>
-            <a:srgbClr val="081813"/>
-          </a:solidFill>
-          <a:ln/>
-        </p:spPr>
-      </p:sp>
-      <p:pic>
-        <p:nvPicPr>
-          <p:cNvPr id="11" name="Image 1" descr="preencoded.png">    </p:cNvPr>
-          <p:cNvPicPr>
-            <a:picLocks noChangeAspect="1"/>
-          </p:cNvPicPr>
-          <p:nvPr/>
-        </p:nvPicPr>
-        <p:blipFill>
-          <a:blip r:embed="rId2"/>
-          <a:stretch>
-            <a:fillRect/>
-          </a:stretch>
-        </p:blipFill>
-        <p:spPr>
-          <a:xfrm>
-            <a:off x="6492240" y="2715768"/>
-            <a:ext cx="329184" cy="329184"/>
-          </a:xfrm>
-          <a:prstGeom prst="rect">
-            <a:avLst/>
-          </a:prstGeom>
-        </p:spPr>
-      </p:pic>
-      <p:sp>
-        <p:nvSpPr>
-          <p:cNvPr id="12" name="Text 8"/>
-          <p:cNvSpPr txBox="1"/>
-          <p:nvPr/>
-        </p:nvSpPr>
-        <p:spPr>
-          <a:xfrm>
-            <a:off x="7114032" y="2496312"/>
-            <a:ext cx="4224528" cy="365760"/>
-          </a:xfrm>
-          <a:prstGeom prst="rect">
-            <a:avLst/>
-          </a:prstGeom>
-          <a:noFill/>
-          <a:ln/>
-        </p:spPr>
-        <p:txBody>
-          <a:bodyPr wrap="square" lIns="0" tIns="0" rIns="0" bIns="0" rtlCol="0" anchor="ctr"/>
-          <a:lstStyle/>
-          <a:p>
-            <a:pPr indent="0" marL="0">
-              <a:buNone/>
-            </a:pPr>
-            <a:r>
-              <a:rPr lang="en-US" sz="1450" b="1" dirty="0">
-                <a:solidFill>
-                  <a:srgbClr val="081813"/>
-                </a:solidFill>
-                <a:latin typeface="Arial" pitchFamily="34" charset="0"/>
-                <a:ea typeface="Arial" pitchFamily="34" charset="-122"/>
-                <a:cs typeface="Arial" pitchFamily="34" charset="-120"/>
-              </a:rPr>
-              <a:t>Honnête par conception</a:t>
-            </a:r>
-            <a:endParaRPr lang="en-US" sz="1450" dirty="0"/>
-          </a:p>
-        </p:txBody>
-      </p:sp>
-      <p:sp>
-        <p:nvSpPr>
-          <p:cNvPr id="13" name="Text 9"/>
-          <p:cNvSpPr txBox="1"/>
-          <p:nvPr/>
-        </p:nvSpPr>
-        <p:spPr>
-          <a:xfrm>
-            <a:off x="7114032" y="2880360"/>
-            <a:ext cx="4224528" cy="731520"/>
-          </a:xfrm>
-          <a:prstGeom prst="rect">
-            <a:avLst/>
-          </a:prstGeom>
-          <a:noFill/>
-          <a:ln/>
-        </p:spPr>
-        <p:txBody>
-          <a:bodyPr wrap="square" lIns="0" tIns="0" rIns="0" bIns="0" rtlCol="0" anchor="ctr"/>
-          <a:lstStyle/>
-          <a:p>
+              <a:t>« Payez seulement quand votre commerçant est payé. »  </a:t>
+            </a:r>
             <a:pPr indent="0" marL="0">
               <a:lnSpc>
-                <a:spcPct val="106000"/>
+                <a:spcPct val="108000"/>
               </a:lnSpc>
               <a:buNone/>
             </a:pPr>
             <a:r>
               <a:rPr lang="en-US" sz="1200" dirty="0">
                 <a:solidFill>
-                  <a:srgbClr val="5A6A5E"/>
+                  <a:srgbClr val="E9E4D5"/>
                 </a:solidFill>
                 <a:latin typeface="Calibri" pitchFamily="34" charset="0"/>
                 <a:ea typeface="Calibri" pitchFamily="34" charset="-122"/>
                 <a:cs typeface="Calibri" pitchFamily="34" charset="-120"/>
               </a:rPr>
-              <a:t>Aucune preuve fabriquée ; les chiffres de couverture viennent directement du registre en direct.</a:t>
+              <a:t>Commencez gratuitement à vie — 10 vérifications par mois, sans carte. Au-delà, les ACU prépayés (rechargés via mobile money, vérifiés par le moteur de KODA) couvrent le dépassement. Le tarif inclus d’un forfait bat toujours le paiement à l’usage.</a:t>
             </a:r>
             <a:endParaRPr lang="en-US" sz="1200" dirty="0"/>
           </a:p>
@@ -3336,315 +4069,7 @@
       </p:sp>
       <p:sp>
         <p:nvSpPr>
-          <p:cNvPr id="14" name="Shape 10"/>
-          <p:cNvSpPr/>
-          <p:nvPr/>
-        </p:nvSpPr>
-        <p:spPr>
-          <a:xfrm>
-            <a:off x="566928" y="3931920"/>
-            <a:ext cx="5349240" cy="1371600"/>
-          </a:xfrm>
-          <a:prstGeom prst="roundRect">
-            <a:avLst>
-              <a:gd name="adj" fmla="val 6667"/>
-            </a:avLst>
-          </a:prstGeom>
-          <a:solidFill>
-            <a:srgbClr val="FFFFFF"/>
-          </a:solidFill>
-          <a:ln w="12700">
-            <a:solidFill>
-              <a:srgbClr val="E4DCC6"/>
-            </a:solidFill>
-            <a:prstDash val="solid"/>
-          </a:ln>
-        </p:spPr>
-      </p:sp>
-      <p:sp>
-        <p:nvSpPr>
-          <p:cNvPr id="15" name="Shape 11"/>
-          <p:cNvSpPr/>
-          <p:nvPr/>
-        </p:nvSpPr>
-        <p:spPr>
-          <a:xfrm>
-            <a:off x="804672" y="4206240"/>
-            <a:ext cx="548640" cy="548640"/>
-          </a:xfrm>
-          <a:prstGeom prst="roundRect">
-            <a:avLst>
-              <a:gd name="adj" fmla="val 16667"/>
-            </a:avLst>
-          </a:prstGeom>
-          <a:solidFill>
-            <a:srgbClr val="081813"/>
-          </a:solidFill>
-          <a:ln/>
-        </p:spPr>
-      </p:sp>
-      <p:pic>
-        <p:nvPicPr>
-          <p:cNvPr id="16" name="Image 2" descr="preencoded.png">    </p:cNvPr>
-          <p:cNvPicPr>
-            <a:picLocks noChangeAspect="1"/>
-          </p:cNvPicPr>
-          <p:nvPr/>
-        </p:nvPicPr>
-        <p:blipFill>
-          <a:blip r:embed="rId3"/>
-          <a:stretch>
-            <a:fillRect/>
-          </a:stretch>
-        </p:blipFill>
-        <p:spPr>
-          <a:xfrm>
-            <a:off x="914400" y="4315968"/>
-            <a:ext cx="329184" cy="329184"/>
-          </a:xfrm>
-          <a:prstGeom prst="rect">
-            <a:avLst/>
-          </a:prstGeom>
-        </p:spPr>
-      </p:pic>
-      <p:sp>
-        <p:nvSpPr>
-          <p:cNvPr id="17" name="Text 12"/>
-          <p:cNvSpPr txBox="1"/>
-          <p:nvPr/>
-        </p:nvSpPr>
-        <p:spPr>
-          <a:xfrm>
-            <a:off x="1536192" y="4096512"/>
-            <a:ext cx="4224528" cy="365760"/>
-          </a:xfrm>
-          <a:prstGeom prst="rect">
-            <a:avLst/>
-          </a:prstGeom>
-          <a:noFill/>
-          <a:ln/>
-        </p:spPr>
-        <p:txBody>
-          <a:bodyPr wrap="square" lIns="0" tIns="0" rIns="0" bIns="0" rtlCol="0" anchor="ctr"/>
-          <a:lstStyle/>
-          <a:p>
-            <a:pPr indent="0" marL="0">
-              <a:buNone/>
-            </a:pPr>
-            <a:r>
-              <a:rPr lang="en-US" sz="1450" b="1" dirty="0">
-                <a:solidFill>
-                  <a:srgbClr val="081813"/>
-                </a:solidFill>
-                <a:latin typeface="Arial" pitchFamily="34" charset="0"/>
-                <a:ea typeface="Arial" pitchFamily="34" charset="-122"/>
-                <a:cs typeface="Arial" pitchFamily="34" charset="-120"/>
-              </a:rPr>
-              <a:t>Vous ne déplacez jamais l’argent</a:t>
-            </a:r>
-            <a:endParaRPr lang="en-US" sz="1450" dirty="0"/>
-          </a:p>
-        </p:txBody>
-      </p:sp>
-      <p:sp>
-        <p:nvSpPr>
-          <p:cNvPr id="18" name="Text 13"/>
-          <p:cNvSpPr txBox="1"/>
-          <p:nvPr/>
-        </p:nvSpPr>
-        <p:spPr>
-          <a:xfrm>
-            <a:off x="1536192" y="4480560"/>
-            <a:ext cx="4224528" cy="731520"/>
-          </a:xfrm>
-          <a:prstGeom prst="rect">
-            <a:avLst/>
-          </a:prstGeom>
-          <a:noFill/>
-          <a:ln/>
-        </p:spPr>
-        <p:txBody>
-          <a:bodyPr wrap="square" lIns="0" tIns="0" rIns="0" bIns="0" rtlCol="0" anchor="ctr"/>
-          <a:lstStyle/>
-          <a:p>
-            <a:pPr indent="0" marL="0">
-              <a:lnSpc>
-                <a:spcPct val="106000"/>
-              </a:lnSpc>
-              <a:buNone/>
-            </a:pPr>
-            <a:r>
-              <a:rPr lang="en-US" sz="1200" dirty="0">
-                <a:solidFill>
-                  <a:srgbClr val="5A6A5E"/>
-                </a:solidFill>
-                <a:latin typeface="Calibri" pitchFamily="34" charset="0"/>
-                <a:ea typeface="Calibri" pitchFamily="34" charset="-122"/>
-                <a:cs typeface="Calibri" pitchFamily="34" charset="-120"/>
-              </a:rPr>
-              <a:t>KODA vérifie les paiements et vous informe en premier — les fonds vont droit à votre portefeuille.</a:t>
-            </a:r>
-            <a:endParaRPr lang="en-US" sz="1200" dirty="0"/>
-          </a:p>
-        </p:txBody>
-      </p:sp>
-      <p:sp>
-        <p:nvSpPr>
-          <p:cNvPr id="19" name="Shape 14"/>
-          <p:cNvSpPr/>
-          <p:nvPr/>
-        </p:nvSpPr>
-        <p:spPr>
-          <a:xfrm>
-            <a:off x="6144768" y="3931920"/>
-            <a:ext cx="5349240" cy="1371600"/>
-          </a:xfrm>
-          <a:prstGeom prst="roundRect">
-            <a:avLst>
-              <a:gd name="adj" fmla="val 6667"/>
-            </a:avLst>
-          </a:prstGeom>
-          <a:solidFill>
-            <a:srgbClr val="FFFFFF"/>
-          </a:solidFill>
-          <a:ln w="12700">
-            <a:solidFill>
-              <a:srgbClr val="E4DCC6"/>
-            </a:solidFill>
-            <a:prstDash val="solid"/>
-          </a:ln>
-        </p:spPr>
-      </p:sp>
-      <p:sp>
-        <p:nvSpPr>
-          <p:cNvPr id="20" name="Shape 15"/>
-          <p:cNvSpPr/>
-          <p:nvPr/>
-        </p:nvSpPr>
-        <p:spPr>
-          <a:xfrm>
-            <a:off x="6382512" y="4206240"/>
-            <a:ext cx="548640" cy="548640"/>
-          </a:xfrm>
-          <a:prstGeom prst="roundRect">
-            <a:avLst>
-              <a:gd name="adj" fmla="val 16667"/>
-            </a:avLst>
-          </a:prstGeom>
-          <a:solidFill>
-            <a:srgbClr val="081813"/>
-          </a:solidFill>
-          <a:ln/>
-        </p:spPr>
-      </p:sp>
-      <p:pic>
-        <p:nvPicPr>
-          <p:cNvPr id="21" name="Image 3" descr="preencoded.png">    </p:cNvPr>
-          <p:cNvPicPr>
-            <a:picLocks noChangeAspect="1"/>
-          </p:cNvPicPr>
-          <p:nvPr/>
-        </p:nvPicPr>
-        <p:blipFill>
-          <a:blip r:embed="rId4"/>
-          <a:stretch>
-            <a:fillRect/>
-          </a:stretch>
-        </p:blipFill>
-        <p:spPr>
-          <a:xfrm>
-            <a:off x="6492240" y="4315968"/>
-            <a:ext cx="329184" cy="329184"/>
-          </a:xfrm>
-          <a:prstGeom prst="rect">
-            <a:avLst/>
-          </a:prstGeom>
-        </p:spPr>
-      </p:pic>
-      <p:sp>
-        <p:nvSpPr>
-          <p:cNvPr id="22" name="Text 16"/>
-          <p:cNvSpPr txBox="1"/>
-          <p:nvPr/>
-        </p:nvSpPr>
-        <p:spPr>
-          <a:xfrm>
-            <a:off x="7114032" y="4096512"/>
-            <a:ext cx="4224528" cy="365760"/>
-          </a:xfrm>
-          <a:prstGeom prst="rect">
-            <a:avLst/>
-          </a:prstGeom>
-          <a:noFill/>
-          <a:ln/>
-        </p:spPr>
-        <p:txBody>
-          <a:bodyPr wrap="square" lIns="0" tIns="0" rIns="0" bIns="0" rtlCol="0" anchor="ctr"/>
-          <a:lstStyle/>
-          <a:p>
-            <a:pPr indent="0" marL="0">
-              <a:buNone/>
-            </a:pPr>
-            <a:r>
-              <a:rPr lang="en-US" sz="1450" b="1" dirty="0">
-                <a:solidFill>
-                  <a:srgbClr val="081813"/>
-                </a:solidFill>
-                <a:latin typeface="Arial" pitchFamily="34" charset="0"/>
-                <a:ea typeface="Arial" pitchFamily="34" charset="-122"/>
-                <a:cs typeface="Arial" pitchFamily="34" charset="-120"/>
-              </a:rPr>
-              <a:t>Pensé pour toute l’Afrique</a:t>
-            </a:r>
-            <a:endParaRPr lang="en-US" sz="1450" dirty="0"/>
-          </a:p>
-        </p:txBody>
-      </p:sp>
-      <p:sp>
-        <p:nvSpPr>
-          <p:cNvPr id="23" name="Text 17"/>
-          <p:cNvSpPr txBox="1"/>
-          <p:nvPr/>
-        </p:nvSpPr>
-        <p:spPr>
-          <a:xfrm>
-            <a:off x="7114032" y="4480560"/>
-            <a:ext cx="4224528" cy="731520"/>
-          </a:xfrm>
-          <a:prstGeom prst="rect">
-            <a:avLst/>
-          </a:prstGeom>
-          <a:noFill/>
-          <a:ln/>
-        </p:spPr>
-        <p:txBody>
-          <a:bodyPr wrap="square" lIns="0" tIns="0" rIns="0" bIns="0" rtlCol="0" anchor="ctr"/>
-          <a:lstStyle/>
-          <a:p>
-            <a:pPr indent="0" marL="0">
-              <a:lnSpc>
-                <a:spcPct val="106000"/>
-              </a:lnSpc>
-              <a:buNone/>
-            </a:pPr>
-            <a:r>
-              <a:rPr lang="en-US" sz="1200" dirty="0">
-                <a:solidFill>
-                  <a:srgbClr val="5A6A5E"/>
-                </a:solidFill>
-                <a:latin typeface="Calibri" pitchFamily="34" charset="0"/>
-                <a:ea typeface="Calibri" pitchFamily="34" charset="-122"/>
-                <a:cs typeface="Calibri" pitchFamily="34" charset="-120"/>
-              </a:rPr>
-              <a:t>La RDC d’abord ; chaque opérateur partageant une même grammaire SMS ouvre toute sa carte d’un coup.</a:t>
-            </a:r>
-            <a:endParaRPr lang="en-US" sz="1200" dirty="0"/>
-          </a:p>
-        </p:txBody>
-      </p:sp>
-      <p:sp>
-        <p:nvSpPr>
-          <p:cNvPr id="24" name="Text 18"/>
+          <p:cNvPr id="31" name="Text 29"/>
           <p:cNvSpPr txBox="1"/>
           <p:nvPr/>
         </p:nvSpPr>
@@ -3663,19 +4088,33 @@
           <a:bodyPr wrap="square" lIns="0" tIns="0" rIns="0" bIns="0" rtlCol="0" anchor="ctr"/>
           <a:lstStyle/>
           <a:p>
-            <a:pPr indent="0" marL="0">
-              <a:buNone/>
-            </a:pPr>
-            <a:r>
-              <a:rPr lang="en-US" sz="950" dirty="0">
-                <a:solidFill>
-                  <a:srgbClr val="8A968C"/>
+            <a:pPr algn="l" indent="0" marL="0">
+              <a:buNone/>
+            </a:pPr>
+            <a:r>
+              <a:rPr lang="en-US" sz="950" b="1" dirty="0">
+                <a:solidFill>
+                  <a:srgbClr val="E8A11F"/>
                 </a:solidFill>
                 <a:latin typeface="Courier New" pitchFamily="34" charset="0"/>
                 <a:ea typeface="Courier New" pitchFamily="34" charset="-122"/>
                 <a:cs typeface="Courier New" pitchFamily="34" charset="-120"/>
               </a:rPr>
-              <a:t>kodajnn.com   ·   Groupe Nseya Digital  ·  Kinshasa, RD Congo</a:t>
+              <a:t>kodajnn.com</a:t>
+            </a:r>
+            <a:pPr algn="l" indent="0" marL="0">
+              <a:buNone/>
+            </a:pPr>
+            <a:r>
+              <a:rPr lang="en-US" sz="950" dirty="0">
+                <a:solidFill>
+                  <a:srgbClr val="9BA79B"/>
+                </a:solidFill>
+                <a:latin typeface="Courier New" pitchFamily="34" charset="0"/>
+                <a:ea typeface="Courier New" pitchFamily="34" charset="-122"/>
+                <a:cs typeface="Courier New" pitchFamily="34" charset="-120"/>
+              </a:rPr>
+              <a:t>   ·   Groupe Nseya Digital  ·  Kinshasa, RD Congo</a:t>
             </a:r>
             <a:endParaRPr lang="en-US" sz="950" dirty="0"/>
           </a:p>
@@ -3721,8 +4160,47 @@
         </p:nvSpPr>
         <p:spPr>
           <a:xfrm>
-            <a:off x="566928" y="1325880"/>
-            <a:ext cx="7315200" cy="1005840"/>
+            <a:off x="566928" y="640080"/>
+            <a:ext cx="10058400" cy="274320"/>
+          </a:xfrm>
+          <a:prstGeom prst="rect">
+            <a:avLst/>
+          </a:prstGeom>
+          <a:noFill/>
+          <a:ln/>
+        </p:spPr>
+        <p:txBody>
+          <a:bodyPr wrap="square" lIns="0" tIns="0" rIns="0" bIns="0" rtlCol="0" anchor="ctr"/>
+          <a:lstStyle/>
+          <a:p>
+            <a:pPr algn="l" indent="0" marL="0">
+              <a:buNone/>
+            </a:pPr>
+            <a:r>
+              <a:rPr lang="en-US" sz="1150" b="1" spc="250" kern="0" dirty="0">
+                <a:solidFill>
+                  <a:srgbClr val="E8A11F"/>
+                </a:solidFill>
+                <a:latin typeface="Courier New" pitchFamily="34" charset="0"/>
+                <a:ea typeface="Courier New" pitchFamily="34" charset="-122"/>
+                <a:cs typeface="Courier New" pitchFamily="34" charset="-120"/>
+              </a:rPr>
+              <a:t>COMMENCEZ DANS LES 10 PROCHAINES MINUTES</a:t>
+            </a:r>
+            <a:endParaRPr lang="en-US" sz="1150" dirty="0"/>
+          </a:p>
+        </p:txBody>
+      </p:sp>
+      <p:sp>
+        <p:nvSpPr>
+          <p:cNvPr id="3" name="Text 1"/>
+          <p:cNvSpPr txBox="1"/>
+          <p:nvPr/>
+        </p:nvSpPr>
+        <p:spPr>
+          <a:xfrm>
+            <a:off x="566928" y="960120"/>
+            <a:ext cx="10972800" cy="640080"/>
           </a:xfrm>
           <a:prstGeom prst="rect">
             <a:avLst/>
@@ -3738,69 +4216,123 @@
               <a:buNone/>
             </a:pPr>
             <a:r>
-              <a:rPr lang="en-US" sz="6000" b="1" spc="500" kern="0" dirty="0">
-                <a:solidFill>
-                  <a:srgbClr val="E8A11F"/>
+              <a:rPr lang="en-US" sz="3200" b="1" dirty="0">
+                <a:solidFill>
+                  <a:srgbClr val="E9E4D5"/>
                 </a:solidFill>
                 <a:latin typeface="Arial" pitchFamily="34" charset="0"/>
                 <a:ea typeface="Arial" pitchFamily="34" charset="-122"/>
                 <a:cs typeface="Arial" pitchFamily="34" charset="-120"/>
               </a:rPr>
-              <a:t>KODA</a:t>
-            </a:r>
-            <a:endParaRPr lang="en-US" sz="6000" dirty="0"/>
-          </a:p>
-        </p:txBody>
-      </p:sp>
-      <p:sp>
-        <p:nvSpPr>
-          <p:cNvPr id="3" name="Text 1"/>
-          <p:cNvSpPr txBox="1"/>
-          <p:nvPr/>
-        </p:nvSpPr>
-        <p:spPr>
-          <a:xfrm>
-            <a:off x="566928" y="2468880"/>
-            <a:ext cx="11064240" cy="1005840"/>
-          </a:xfrm>
-          <a:prstGeom prst="rect">
-            <a:avLst/>
-          </a:prstGeom>
-          <a:noFill/>
-          <a:ln/>
-        </p:spPr>
-        <p:txBody>
-          <a:bodyPr wrap="square" lIns="0" tIns="0" rIns="0" bIns="0" rtlCol="0" anchor="ctr"/>
-          <a:lstStyle/>
-          <a:p>
-            <a:pPr indent="0" marL="0">
-              <a:buNone/>
-            </a:pPr>
-            <a:r>
-              <a:rPr lang="en-US" sz="4000" b="1" dirty="0">
-                <a:solidFill>
-                  <a:srgbClr val="E9E4D5"/>
+              <a:t>Gratuit à vie. Sans carte. Sans contrat.</a:t>
+            </a:r>
+            <a:endParaRPr lang="en-US" sz="3200" dirty="0"/>
+          </a:p>
+        </p:txBody>
+      </p:sp>
+      <p:sp>
+        <p:nvSpPr>
+          <p:cNvPr id="4" name="Shape 2"/>
+          <p:cNvSpPr/>
+          <p:nvPr/>
+        </p:nvSpPr>
+        <p:spPr>
+          <a:xfrm>
+            <a:off x="566928" y="2286000"/>
+            <a:ext cx="3503066" cy="2651760"/>
+          </a:xfrm>
+          <a:prstGeom prst="roundRect">
+            <a:avLst>
+              <a:gd name="adj" fmla="val 3793"/>
+            </a:avLst>
+          </a:prstGeom>
+          <a:solidFill>
+            <a:srgbClr val="123027"/>
+          </a:solidFill>
+          <a:ln w="12700">
+            <a:solidFill>
+              <a:srgbClr val="2A4034"/>
+            </a:solidFill>
+            <a:prstDash val="solid"/>
+          </a:ln>
+          <a:effectLst>
+            <a:outerShdw sx="100000" sy="100000" kx="0" ky="0" algn="bl" rotWithShape="0" blurRad="127000" dist="50800" dir="5400000">
+              <a:srgbClr val="000000">
+                <a:alpha val="35000"/>
+              </a:srgbClr>
+            </a:outerShdw>
+          </a:effectLst>
+        </p:spPr>
+      </p:sp>
+      <p:sp>
+        <p:nvSpPr>
+          <p:cNvPr id="5" name="Shape 3"/>
+          <p:cNvSpPr/>
+          <p:nvPr/>
+        </p:nvSpPr>
+        <p:spPr>
+          <a:xfrm>
+            <a:off x="841248" y="2578608"/>
+            <a:ext cx="658368" cy="658368"/>
+          </a:xfrm>
+          <a:prstGeom prst="ellipse">
+            <a:avLst/>
+          </a:prstGeom>
+          <a:solidFill>
+            <a:srgbClr val="E8A11F"/>
+          </a:solidFill>
+          <a:ln/>
+        </p:spPr>
+      </p:sp>
+      <p:sp>
+        <p:nvSpPr>
+          <p:cNvPr id="6" name="Text 4"/>
+          <p:cNvSpPr txBox="1"/>
+          <p:nvPr/>
+        </p:nvSpPr>
+        <p:spPr>
+          <a:xfrm>
+            <a:off x="841248" y="2578608"/>
+            <a:ext cx="658368" cy="658368"/>
+          </a:xfrm>
+          <a:prstGeom prst="rect">
+            <a:avLst/>
+          </a:prstGeom>
+          <a:noFill/>
+          <a:ln/>
+        </p:spPr>
+        <p:txBody>
+          <a:bodyPr wrap="square" lIns="0" tIns="0" rIns="0" bIns="0" rtlCol="0" anchor="ctr"/>
+          <a:lstStyle/>
+          <a:p>
+            <a:pPr algn="ctr" indent="0" marL="0">
+              <a:buNone/>
+            </a:pPr>
+            <a:r>
+              <a:rPr lang="en-US" sz="2600" b="1" dirty="0">
+                <a:solidFill>
+                  <a:srgbClr val="081813"/>
                 </a:solidFill>
                 <a:latin typeface="Arial" pitchFamily="34" charset="0"/>
                 <a:ea typeface="Arial" pitchFamily="34" charset="-122"/>
                 <a:cs typeface="Arial" pitchFamily="34" charset="-120"/>
               </a:rPr>
-              <a:t>Vérifiez votre premier paiement gratuitement.</a:t>
-            </a:r>
-            <a:endParaRPr lang="en-US" sz="4000" dirty="0"/>
-          </a:p>
-        </p:txBody>
-      </p:sp>
-      <p:sp>
-        <p:nvSpPr>
-          <p:cNvPr id="4" name="Text 2"/>
-          <p:cNvSpPr txBox="1"/>
-          <p:nvPr/>
-        </p:nvSpPr>
-        <p:spPr>
-          <a:xfrm>
-            <a:off x="566928" y="3520440"/>
-            <a:ext cx="10972800" cy="548640"/>
+              <a:t>1</a:t>
+            </a:r>
+            <a:endParaRPr lang="en-US" sz="2600" dirty="0"/>
+          </a:p>
+        </p:txBody>
+      </p:sp>
+      <p:sp>
+        <p:nvSpPr>
+          <p:cNvPr id="7" name="Text 5"/>
+          <p:cNvSpPr txBox="1"/>
+          <p:nvPr/>
+        </p:nvSpPr>
+        <p:spPr>
+          <a:xfrm>
+            <a:off x="841248" y="3364992"/>
+            <a:ext cx="2954426" cy="685800"/>
           </a:xfrm>
           <a:prstGeom prst="rect">
             <a:avLst/>
@@ -3816,17 +4348,693 @@
               <a:buNone/>
             </a:pPr>
             <a:r>
-              <a:rPr lang="en-US" sz="1900" i="1" dirty="0">
+              <a:rPr lang="en-US" sz="1600" b="1" dirty="0">
                 <a:solidFill>
                   <a:srgbClr val="F2B944"/>
+                </a:solidFill>
+                <a:latin typeface="Arial" pitchFamily="34" charset="0"/>
+                <a:ea typeface="Arial" pitchFamily="34" charset="-122"/>
+                <a:cs typeface="Arial" pitchFamily="34" charset="-120"/>
+              </a:rPr>
+              <a:t>Créez un compte gratuit</a:t>
+            </a:r>
+            <a:endParaRPr lang="en-US" sz="1600" dirty="0"/>
+          </a:p>
+        </p:txBody>
+      </p:sp>
+      <p:sp>
+        <p:nvSpPr>
+          <p:cNvPr id="8" name="Text 6"/>
+          <p:cNvSpPr txBox="1"/>
+          <p:nvPr/>
+        </p:nvSpPr>
+        <p:spPr>
+          <a:xfrm>
+            <a:off x="841248" y="4041648"/>
+            <a:ext cx="2954426" cy="822960"/>
+          </a:xfrm>
+          <a:prstGeom prst="rect">
+            <a:avLst/>
+          </a:prstGeom>
+          <a:noFill/>
+          <a:ln/>
+        </p:spPr>
+        <p:txBody>
+          <a:bodyPr wrap="square" lIns="0" tIns="0" rIns="0" bIns="0" rtlCol="0" anchor="ctr"/>
+          <a:lstStyle/>
+          <a:p>
+            <a:pPr indent="0" marL="0">
+              <a:lnSpc>
+                <a:spcPct val="110000"/>
+              </a:lnSpc>
+              <a:buNone/>
+            </a:pPr>
+            <a:r>
+              <a:rPr lang="en-US" sz="1250" dirty="0">
+                <a:solidFill>
+                  <a:srgbClr val="9BA79B"/>
                 </a:solidFill>
                 <a:latin typeface="Calibri" pitchFamily="34" charset="0"/>
                 <a:ea typeface="Calibri" pitchFamily="34" charset="-122"/>
                 <a:cs typeface="Calibri" pitchFamily="34" charset="-120"/>
               </a:rPr>
-              <a:t>Une capture peut être truquée. Le SMS, non.</a:t>
-            </a:r>
-            <a:endParaRPr lang="en-US" sz="1900" dirty="0"/>
+              <a:t>En une minute — 10 vérifications par mois, gratuites à vie.</a:t>
+            </a:r>
+            <a:endParaRPr lang="en-US" sz="1250" dirty="0"/>
+          </a:p>
+        </p:txBody>
+      </p:sp>
+      <p:sp>
+        <p:nvSpPr>
+          <p:cNvPr id="9" name="Shape 7"/>
+          <p:cNvSpPr/>
+          <p:nvPr/>
+        </p:nvSpPr>
+        <p:spPr>
+          <a:xfrm>
+            <a:off x="4344314" y="2286000"/>
+            <a:ext cx="3503066" cy="2651760"/>
+          </a:xfrm>
+          <a:prstGeom prst="roundRect">
+            <a:avLst>
+              <a:gd name="adj" fmla="val 3793"/>
+            </a:avLst>
+          </a:prstGeom>
+          <a:solidFill>
+            <a:srgbClr val="123027"/>
+          </a:solidFill>
+          <a:ln w="12700">
+            <a:solidFill>
+              <a:srgbClr val="2A4034"/>
+            </a:solidFill>
+            <a:prstDash val="solid"/>
+          </a:ln>
+          <a:effectLst>
+            <a:outerShdw sx="100000" sy="100000" kx="0" ky="0" algn="bl" rotWithShape="0" blurRad="127000" dist="50800" dir="5400000">
+              <a:srgbClr val="000000">
+                <a:alpha val="35000"/>
+              </a:srgbClr>
+            </a:outerShdw>
+          </a:effectLst>
+        </p:spPr>
+      </p:sp>
+      <p:sp>
+        <p:nvSpPr>
+          <p:cNvPr id="10" name="Shape 8"/>
+          <p:cNvSpPr/>
+          <p:nvPr/>
+        </p:nvSpPr>
+        <p:spPr>
+          <a:xfrm>
+            <a:off x="4618634" y="2578608"/>
+            <a:ext cx="658368" cy="658368"/>
+          </a:xfrm>
+          <a:prstGeom prst="ellipse">
+            <a:avLst/>
+          </a:prstGeom>
+          <a:solidFill>
+            <a:srgbClr val="E8A11F"/>
+          </a:solidFill>
+          <a:ln/>
+        </p:spPr>
+      </p:sp>
+      <p:sp>
+        <p:nvSpPr>
+          <p:cNvPr id="11" name="Text 9"/>
+          <p:cNvSpPr txBox="1"/>
+          <p:nvPr/>
+        </p:nvSpPr>
+        <p:spPr>
+          <a:xfrm>
+            <a:off x="4618634" y="2578608"/>
+            <a:ext cx="658368" cy="658368"/>
+          </a:xfrm>
+          <a:prstGeom prst="rect">
+            <a:avLst/>
+          </a:prstGeom>
+          <a:noFill/>
+          <a:ln/>
+        </p:spPr>
+        <p:txBody>
+          <a:bodyPr wrap="square" lIns="0" tIns="0" rIns="0" bIns="0" rtlCol="0" anchor="ctr"/>
+          <a:lstStyle/>
+          <a:p>
+            <a:pPr algn="ctr" indent="0" marL="0">
+              <a:buNone/>
+            </a:pPr>
+            <a:r>
+              <a:rPr lang="en-US" sz="2600" b="1" dirty="0">
+                <a:solidFill>
+                  <a:srgbClr val="081813"/>
+                </a:solidFill>
+                <a:latin typeface="Arial" pitchFamily="34" charset="0"/>
+                <a:ea typeface="Arial" pitchFamily="34" charset="-122"/>
+                <a:cs typeface="Arial" pitchFamily="34" charset="-120"/>
+              </a:rPr>
+              <a:t>2</a:t>
+            </a:r>
+            <a:endParaRPr lang="en-US" sz="2600" dirty="0"/>
+          </a:p>
+        </p:txBody>
+      </p:sp>
+      <p:sp>
+        <p:nvSpPr>
+          <p:cNvPr id="12" name="Text 10"/>
+          <p:cNvSpPr txBox="1"/>
+          <p:nvPr/>
+        </p:nvSpPr>
+        <p:spPr>
+          <a:xfrm>
+            <a:off x="4618634" y="3364992"/>
+            <a:ext cx="2954426" cy="685800"/>
+          </a:xfrm>
+          <a:prstGeom prst="rect">
+            <a:avLst/>
+          </a:prstGeom>
+          <a:noFill/>
+          <a:ln/>
+        </p:spPr>
+        <p:txBody>
+          <a:bodyPr wrap="square" lIns="0" tIns="0" rIns="0" bIns="0" rtlCol="0" anchor="ctr"/>
+          <a:lstStyle/>
+          <a:p>
+            <a:pPr indent="0" marL="0">
+              <a:buNone/>
+            </a:pPr>
+            <a:r>
+              <a:rPr lang="en-US" sz="1600" b="1" dirty="0">
+                <a:solidFill>
+                  <a:srgbClr val="F2B944"/>
+                </a:solidFill>
+                <a:latin typeface="Arial" pitchFamily="34" charset="0"/>
+                <a:ea typeface="Arial" pitchFamily="34" charset="-122"/>
+                <a:cs typeface="Arial" pitchFamily="34" charset="-120"/>
+              </a:rPr>
+              <a:t>Ajoutez votre numéro mobile money</a:t>
+            </a:r>
+            <a:endParaRPr lang="en-US" sz="1600" dirty="0"/>
+          </a:p>
+        </p:txBody>
+      </p:sp>
+      <p:sp>
+        <p:nvSpPr>
+          <p:cNvPr id="13" name="Text 11"/>
+          <p:cNvSpPr txBox="1"/>
+          <p:nvPr/>
+        </p:nvSpPr>
+        <p:spPr>
+          <a:xfrm>
+            <a:off x="4618634" y="4041648"/>
+            <a:ext cx="2954426" cy="822960"/>
+          </a:xfrm>
+          <a:prstGeom prst="rect">
+            <a:avLst/>
+          </a:prstGeom>
+          <a:noFill/>
+          <a:ln/>
+        </p:spPr>
+        <p:txBody>
+          <a:bodyPr wrap="square" lIns="0" tIns="0" rIns="0" bIns="0" rtlCol="0" anchor="ctr"/>
+          <a:lstStyle/>
+          <a:p>
+            <a:pPr indent="0" marL="0">
+              <a:lnSpc>
+                <a:spcPct val="110000"/>
+              </a:lnSpc>
+              <a:buNone/>
+            </a:pPr>
+            <a:r>
+              <a:rPr lang="en-US" sz="1250" dirty="0">
+                <a:solidFill>
+                  <a:srgbClr val="9BA79B"/>
+                </a:solidFill>
+                <a:latin typeface="Calibri" pitchFamily="34" charset="0"/>
+                <a:ea typeface="Calibri" pitchFamily="34" charset="-122"/>
+                <a:cs typeface="Calibri" pitchFamily="34" charset="-120"/>
+              </a:rPr>
+              <a:t>Le numéro marchand sur lequel arrive déjà le SMS de confirmation.</a:t>
+            </a:r>
+            <a:endParaRPr lang="en-US" sz="1250" dirty="0"/>
+          </a:p>
+        </p:txBody>
+      </p:sp>
+      <p:sp>
+        <p:nvSpPr>
+          <p:cNvPr id="14" name="Shape 12"/>
+          <p:cNvSpPr/>
+          <p:nvPr/>
+        </p:nvSpPr>
+        <p:spPr>
+          <a:xfrm>
+            <a:off x="8121701" y="2286000"/>
+            <a:ext cx="3503066" cy="2651760"/>
+          </a:xfrm>
+          <a:prstGeom prst="roundRect">
+            <a:avLst>
+              <a:gd name="adj" fmla="val 3793"/>
+            </a:avLst>
+          </a:prstGeom>
+          <a:solidFill>
+            <a:srgbClr val="123027"/>
+          </a:solidFill>
+          <a:ln w="12700">
+            <a:solidFill>
+              <a:srgbClr val="2A4034"/>
+            </a:solidFill>
+            <a:prstDash val="solid"/>
+          </a:ln>
+          <a:effectLst>
+            <a:outerShdw sx="100000" sy="100000" kx="0" ky="0" algn="bl" rotWithShape="0" blurRad="127000" dist="50800" dir="5400000">
+              <a:srgbClr val="000000">
+                <a:alpha val="35000"/>
+              </a:srgbClr>
+            </a:outerShdw>
+          </a:effectLst>
+        </p:spPr>
+      </p:sp>
+      <p:sp>
+        <p:nvSpPr>
+          <p:cNvPr id="15" name="Shape 13"/>
+          <p:cNvSpPr/>
+          <p:nvPr/>
+        </p:nvSpPr>
+        <p:spPr>
+          <a:xfrm>
+            <a:off x="8396021" y="2578608"/>
+            <a:ext cx="658368" cy="658368"/>
+          </a:xfrm>
+          <a:prstGeom prst="ellipse">
+            <a:avLst/>
+          </a:prstGeom>
+          <a:solidFill>
+            <a:srgbClr val="E8A11F"/>
+          </a:solidFill>
+          <a:ln/>
+        </p:spPr>
+      </p:sp>
+      <p:sp>
+        <p:nvSpPr>
+          <p:cNvPr id="16" name="Text 14"/>
+          <p:cNvSpPr txBox="1"/>
+          <p:nvPr/>
+        </p:nvSpPr>
+        <p:spPr>
+          <a:xfrm>
+            <a:off x="8396021" y="2578608"/>
+            <a:ext cx="658368" cy="658368"/>
+          </a:xfrm>
+          <a:prstGeom prst="rect">
+            <a:avLst/>
+          </a:prstGeom>
+          <a:noFill/>
+          <a:ln/>
+        </p:spPr>
+        <p:txBody>
+          <a:bodyPr wrap="square" lIns="0" tIns="0" rIns="0" bIns="0" rtlCol="0" anchor="ctr"/>
+          <a:lstStyle/>
+          <a:p>
+            <a:pPr algn="ctr" indent="0" marL="0">
+              <a:buNone/>
+            </a:pPr>
+            <a:r>
+              <a:rPr lang="en-US" sz="2600" b="1" dirty="0">
+                <a:solidFill>
+                  <a:srgbClr val="081813"/>
+                </a:solidFill>
+                <a:latin typeface="Arial" pitchFamily="34" charset="0"/>
+                <a:ea typeface="Arial" pitchFamily="34" charset="-122"/>
+                <a:cs typeface="Arial" pitchFamily="34" charset="-120"/>
+              </a:rPr>
+              <a:t>3</a:t>
+            </a:r>
+            <a:endParaRPr lang="en-US" sz="2600" dirty="0"/>
+          </a:p>
+        </p:txBody>
+      </p:sp>
+      <p:sp>
+        <p:nvSpPr>
+          <p:cNvPr id="17" name="Text 15"/>
+          <p:cNvSpPr txBox="1"/>
+          <p:nvPr/>
+        </p:nvSpPr>
+        <p:spPr>
+          <a:xfrm>
+            <a:off x="8396021" y="3364992"/>
+            <a:ext cx="2954426" cy="685800"/>
+          </a:xfrm>
+          <a:prstGeom prst="rect">
+            <a:avLst/>
+          </a:prstGeom>
+          <a:noFill/>
+          <a:ln/>
+        </p:spPr>
+        <p:txBody>
+          <a:bodyPr wrap="square" lIns="0" tIns="0" rIns="0" bIns="0" rtlCol="0" anchor="ctr"/>
+          <a:lstStyle/>
+          <a:p>
+            <a:pPr indent="0" marL="0">
+              <a:buNone/>
+            </a:pPr>
+            <a:r>
+              <a:rPr lang="en-US" sz="1600" b="1" dirty="0">
+                <a:solidFill>
+                  <a:srgbClr val="F2B944"/>
+                </a:solidFill>
+                <a:latin typeface="Arial" pitchFamily="34" charset="0"/>
+                <a:ea typeface="Arial" pitchFamily="34" charset="-122"/>
+                <a:cs typeface="Arial" pitchFamily="34" charset="-120"/>
+              </a:rPr>
+              <a:t>Vérifiez votre premier paiement</a:t>
+            </a:r>
+            <a:endParaRPr lang="en-US" sz="1600" dirty="0"/>
+          </a:p>
+        </p:txBody>
+      </p:sp>
+      <p:sp>
+        <p:nvSpPr>
+          <p:cNvPr id="18" name="Text 16"/>
+          <p:cNvSpPr txBox="1"/>
+          <p:nvPr/>
+        </p:nvSpPr>
+        <p:spPr>
+          <a:xfrm>
+            <a:off x="8396021" y="4041648"/>
+            <a:ext cx="2954426" cy="822960"/>
+          </a:xfrm>
+          <a:prstGeom prst="rect">
+            <a:avLst/>
+          </a:prstGeom>
+          <a:noFill/>
+          <a:ln/>
+        </p:spPr>
+        <p:txBody>
+          <a:bodyPr wrap="square" lIns="0" tIns="0" rIns="0" bIns="0" rtlCol="0" anchor="ctr"/>
+          <a:lstStyle/>
+          <a:p>
+            <a:pPr indent="0" marL="0">
+              <a:lnSpc>
+                <a:spcPct val="110000"/>
+              </a:lnSpc>
+              <a:buNone/>
+            </a:pPr>
+            <a:r>
+              <a:rPr lang="en-US" sz="1250" dirty="0">
+                <a:solidFill>
+                  <a:srgbClr val="9BA79B"/>
+                </a:solidFill>
+                <a:latin typeface="Calibri" pitchFamily="34" charset="0"/>
+                <a:ea typeface="Calibri" pitchFamily="34" charset="-122"/>
+                <a:cs typeface="Calibri" pitchFamily="34" charset="-120"/>
+              </a:rPr>
+              <a:t>Collez le code du client — un verdict anti-fraude en trois secondes environ.</a:t>
+            </a:r>
+            <a:endParaRPr lang="en-US" sz="1250" dirty="0"/>
+          </a:p>
+        </p:txBody>
+      </p:sp>
+      <p:sp>
+        <p:nvSpPr>
+          <p:cNvPr id="19" name="Shape 17"/>
+          <p:cNvSpPr/>
+          <p:nvPr/>
+        </p:nvSpPr>
+        <p:spPr>
+          <a:xfrm>
+            <a:off x="566928" y="5257800"/>
+            <a:ext cx="5029200" cy="566928"/>
+          </a:xfrm>
+          <a:prstGeom prst="roundRect">
+            <a:avLst>
+              <a:gd name="adj" fmla="val 50000"/>
+            </a:avLst>
+          </a:prstGeom>
+          <a:solidFill>
+            <a:srgbClr val="E8A11F"/>
+          </a:solidFill>
+          <a:ln/>
+        </p:spPr>
+      </p:sp>
+      <p:sp>
+        <p:nvSpPr>
+          <p:cNvPr id="20" name="Text 18"/>
+          <p:cNvSpPr txBox="1"/>
+          <p:nvPr/>
+        </p:nvSpPr>
+        <p:spPr>
+          <a:xfrm>
+            <a:off x="566928" y="5257800"/>
+            <a:ext cx="5029200" cy="566928"/>
+          </a:xfrm>
+          <a:prstGeom prst="rect">
+            <a:avLst/>
+          </a:prstGeom>
+          <a:noFill/>
+          <a:ln/>
+        </p:spPr>
+        <p:txBody>
+          <a:bodyPr wrap="square" lIns="0" tIns="0" rIns="0" bIns="0" rtlCol="0" anchor="ctr"/>
+          <a:lstStyle/>
+          <a:p>
+            <a:pPr algn="ctr" indent="0" marL="0">
+              <a:buNone/>
+            </a:pPr>
+            <a:r>
+              <a:rPr lang="en-US" sz="1450" b="1" dirty="0">
+                <a:solidFill>
+                  <a:srgbClr val="081813"/>
+                </a:solidFill>
+                <a:latin typeface="Arial" pitchFamily="34" charset="0"/>
+                <a:ea typeface="Arial" pitchFamily="34" charset="-122"/>
+                <a:cs typeface="Arial" pitchFamily="34" charset="-120"/>
+              </a:rPr>
+              <a:t>Commencer gratuitement  →  kodajnn.com/app</a:t>
+            </a:r>
+            <a:endParaRPr lang="en-US" sz="1450" dirty="0"/>
+          </a:p>
+        </p:txBody>
+      </p:sp>
+      <p:sp>
+        <p:nvSpPr>
+          <p:cNvPr id="21" name="Text 19"/>
+          <p:cNvSpPr txBox="1"/>
+          <p:nvPr/>
+        </p:nvSpPr>
+        <p:spPr>
+          <a:xfrm>
+            <a:off x="566928" y="6400800"/>
+            <a:ext cx="11057839" cy="274320"/>
+          </a:xfrm>
+          <a:prstGeom prst="rect">
+            <a:avLst/>
+          </a:prstGeom>
+          <a:noFill/>
+          <a:ln/>
+        </p:spPr>
+        <p:txBody>
+          <a:bodyPr wrap="square" lIns="0" tIns="0" rIns="0" bIns="0" rtlCol="0" anchor="ctr"/>
+          <a:lstStyle/>
+          <a:p>
+            <a:pPr algn="l" indent="0" marL="0">
+              <a:buNone/>
+            </a:pPr>
+            <a:r>
+              <a:rPr lang="en-US" sz="950" b="1" dirty="0">
+                <a:solidFill>
+                  <a:srgbClr val="E8A11F"/>
+                </a:solidFill>
+                <a:latin typeface="Courier New" pitchFamily="34" charset="0"/>
+                <a:ea typeface="Courier New" pitchFamily="34" charset="-122"/>
+                <a:cs typeface="Courier New" pitchFamily="34" charset="-120"/>
+              </a:rPr>
+              <a:t>kodajnn.com</a:t>
+            </a:r>
+            <a:pPr algn="l" indent="0" marL="0">
+              <a:buNone/>
+            </a:pPr>
+            <a:r>
+              <a:rPr lang="en-US" sz="950" dirty="0">
+                <a:solidFill>
+                  <a:srgbClr val="9BA79B"/>
+                </a:solidFill>
+                <a:latin typeface="Courier New" pitchFamily="34" charset="0"/>
+                <a:ea typeface="Courier New" pitchFamily="34" charset="-122"/>
+                <a:cs typeface="Courier New" pitchFamily="34" charset="-120"/>
+              </a:rPr>
+              <a:t>   ·   Groupe Nseya Digital  ·  Kinshasa, RD Congo</a:t>
+            </a:r>
+            <a:endParaRPr lang="en-US" sz="950" dirty="0"/>
+          </a:p>
+        </p:txBody>
+      </p:sp>
+    </p:spTree>
+  </p:cSld>
+  <p:clrMapOvr>
+    <a:masterClrMapping/>
+  </p:clrMapOvr>
+</p:sld>
+</file>
+
+<file path=ppt/slides/slide13.xml><?xml version="1.0" encoding="utf-8"?>
+<p:sld xmlns:a="http://schemas.openxmlformats.org/drawingml/2006/main" xmlns:r="http://schemas.openxmlformats.org/officeDocument/2006/relationships" xmlns:p="http://schemas.openxmlformats.org/presentationml/2006/main">
+  <p:cSld name="Slide 13">
+    <p:bg>
+      <p:bgPr>
+        <a:solidFill>
+          <a:srgbClr val="081813"/>
+        </a:solidFill>
+      </p:bgPr>
+    </p:bg>
+    <p:spTree>
+      <p:nvGrpSpPr>
+        <p:cNvPr id="1" name=""/>
+        <p:cNvGrpSpPr/>
+        <p:nvPr/>
+      </p:nvGrpSpPr>
+      <p:grpSpPr>
+        <a:xfrm>
+          <a:off x="0" y="0"/>
+          <a:ext cx="0" cy="0"/>
+          <a:chOff x="0" y="0"/>
+          <a:chExt cx="0" cy="0"/>
+        </a:xfrm>
+      </p:grpSpPr>
+      <p:sp>
+        <p:nvSpPr>
+          <p:cNvPr id="2" name="Text 0"/>
+          <p:cNvSpPr txBox="1"/>
+          <p:nvPr/>
+        </p:nvSpPr>
+        <p:spPr>
+          <a:xfrm>
+            <a:off x="566928" y="1234440"/>
+            <a:ext cx="7315200" cy="1005840"/>
+          </a:xfrm>
+          <a:prstGeom prst="rect">
+            <a:avLst/>
+          </a:prstGeom>
+          <a:noFill/>
+          <a:ln/>
+        </p:spPr>
+        <p:txBody>
+          <a:bodyPr wrap="square" lIns="0" tIns="0" rIns="0" bIns="0" rtlCol="0" anchor="ctr"/>
+          <a:lstStyle/>
+          <a:p>
+            <a:pPr indent="0" marL="0">
+              <a:buNone/>
+            </a:pPr>
+            <a:r>
+              <a:rPr lang="en-US" sz="5800" b="1" spc="500" kern="0" dirty="0">
+                <a:solidFill>
+                  <a:srgbClr val="E8A11F"/>
+                </a:solidFill>
+                <a:latin typeface="Arial" pitchFamily="34" charset="0"/>
+                <a:ea typeface="Arial" pitchFamily="34" charset="-122"/>
+                <a:cs typeface="Arial" pitchFamily="34" charset="-120"/>
+              </a:rPr>
+              <a:t>KODA</a:t>
+            </a:r>
+            <a:endParaRPr lang="en-US" sz="5800" dirty="0"/>
+          </a:p>
+        </p:txBody>
+      </p:sp>
+      <p:sp>
+        <p:nvSpPr>
+          <p:cNvPr id="3" name="Text 1"/>
+          <p:cNvSpPr txBox="1"/>
+          <p:nvPr/>
+        </p:nvSpPr>
+        <p:spPr>
+          <a:xfrm>
+            <a:off x="566928" y="2331720"/>
+            <a:ext cx="11064240" cy="1371600"/>
+          </a:xfrm>
+          <a:prstGeom prst="rect">
+            <a:avLst/>
+          </a:prstGeom>
+          <a:noFill/>
+          <a:ln/>
+        </p:spPr>
+        <p:txBody>
+          <a:bodyPr wrap="square" lIns="0" tIns="0" rIns="0" bIns="0" rtlCol="0" anchor="ctr"/>
+          <a:lstStyle/>
+          <a:p>
+            <a:pPr indent="0" marL="0">
+              <a:lnSpc>
+                <a:spcPct val="98000"/>
+              </a:lnSpc>
+              <a:buNone/>
+            </a:pPr>
+            <a:r>
+              <a:rPr lang="en-US" sz="3800" b="1" dirty="0">
+                <a:solidFill>
+                  <a:srgbClr val="E9E4D5"/>
+                </a:solidFill>
+                <a:latin typeface="Arial" pitchFamily="34" charset="0"/>
+                <a:ea typeface="Arial" pitchFamily="34" charset="-122"/>
+                <a:cs typeface="Arial" pitchFamily="34" charset="-120"/>
+              </a:rPr>
+              <a:t>Vérifiez votre premier paiement</a:t>
+            </a:r>
+            <a:endParaRPr lang="en-US" sz="3800" dirty="0"/>
+          </a:p>
+          <a:p>
+            <a:pPr indent="0" marL="0">
+              <a:lnSpc>
+                <a:spcPct val="98000"/>
+              </a:lnSpc>
+              <a:buNone/>
+            </a:pPr>
+            <a:r>
+              <a:rPr lang="en-US" sz="3800" b="1" dirty="0">
+                <a:solidFill>
+                  <a:srgbClr val="E9E4D5"/>
+                </a:solidFill>
+                <a:latin typeface="Arial" pitchFamily="34" charset="0"/>
+                <a:ea typeface="Arial" pitchFamily="34" charset="-122"/>
+                <a:cs typeface="Arial" pitchFamily="34" charset="-120"/>
+              </a:rPr>
+              <a:t>gratuitement — maintenant.</a:t>
+            </a:r>
+            <a:endParaRPr lang="en-US" sz="3800" dirty="0"/>
+          </a:p>
+        </p:txBody>
+      </p:sp>
+      <p:sp>
+        <p:nvSpPr>
+          <p:cNvPr id="4" name="Text 2"/>
+          <p:cNvSpPr txBox="1"/>
+          <p:nvPr/>
+        </p:nvSpPr>
+        <p:spPr>
+          <a:xfrm>
+            <a:off x="566928" y="3794760"/>
+            <a:ext cx="11064240" cy="457200"/>
+          </a:xfrm>
+          <a:prstGeom prst="rect">
+            <a:avLst/>
+          </a:prstGeom>
+          <a:noFill/>
+          <a:ln/>
+        </p:spPr>
+        <p:txBody>
+          <a:bodyPr wrap="square" lIns="0" tIns="0" rIns="0" bIns="0" rtlCol="0" anchor="ctr"/>
+          <a:lstStyle/>
+          <a:p>
+            <a:pPr indent="0" marL="0">
+              <a:buNone/>
+            </a:pPr>
+            <a:r>
+              <a:rPr lang="en-US" sz="1650" i="1" dirty="0">
+                <a:solidFill>
+                  <a:srgbClr val="F2B944"/>
+                </a:solidFill>
+                <a:latin typeface="Calibri" pitchFamily="34" charset="0"/>
+                <a:ea typeface="Calibri" pitchFamily="34" charset="-122"/>
+                <a:cs typeface="Calibri" pitchFamily="34" charset="-120"/>
+              </a:rPr>
+              <a:t>Une capture peut être truquée. Le SMS, non.  ·  Gratuit à vie, sans carte.</a:t>
+            </a:r>
+            <a:endParaRPr lang="en-US" sz="1650" dirty="0"/>
           </a:p>
         </p:txBody>
       </p:sp>
@@ -3838,7 +5046,7 @@
         </p:nvSpPr>
         <p:spPr>
           <a:xfrm>
-            <a:off x="566928" y="4663440"/>
+            <a:off x="566928" y="4617720"/>
             <a:ext cx="3383280" cy="914400"/>
           </a:xfrm>
           <a:prstGeom prst="roundRect">
@@ -3872,7 +5080,7 @@
         </p:nvSpPr>
         <p:spPr>
           <a:xfrm>
-            <a:off x="841248" y="4828032"/>
+            <a:off x="841248" y="4782312"/>
             <a:ext cx="2834640" cy="274320"/>
           </a:xfrm>
           <a:prstGeom prst="rect">
@@ -3911,7 +5119,7 @@
         </p:nvSpPr>
         <p:spPr>
           <a:xfrm>
-            <a:off x="841248" y="5084064"/>
+            <a:off x="841248" y="5038344"/>
             <a:ext cx="2926080" cy="365760"/>
           </a:xfrm>
           <a:prstGeom prst="rect">
@@ -3950,7 +5158,7 @@
         </p:nvSpPr>
         <p:spPr>
           <a:xfrm>
-            <a:off x="4224528" y="4663440"/>
+            <a:off x="4224528" y="4617720"/>
             <a:ext cx="3383280" cy="914400"/>
           </a:xfrm>
           <a:prstGeom prst="roundRect">
@@ -3984,7 +5192,7 @@
         </p:nvSpPr>
         <p:spPr>
           <a:xfrm>
-            <a:off x="4498848" y="4828032"/>
+            <a:off x="4498848" y="4782312"/>
             <a:ext cx="2834640" cy="274320"/>
           </a:xfrm>
           <a:prstGeom prst="rect">
@@ -4023,7 +5231,7 @@
         </p:nvSpPr>
         <p:spPr>
           <a:xfrm>
-            <a:off x="4498848" y="5084064"/>
+            <a:off x="4498848" y="5038344"/>
             <a:ext cx="2926080" cy="365760"/>
           </a:xfrm>
           <a:prstGeom prst="rect">
@@ -4062,7 +5270,7 @@
         </p:nvSpPr>
         <p:spPr>
           <a:xfrm>
-            <a:off x="7882128" y="4663440"/>
+            <a:off x="7882128" y="4617720"/>
             <a:ext cx="3383280" cy="914400"/>
           </a:xfrm>
           <a:prstGeom prst="roundRect">
@@ -4096,7 +5304,7 @@
         </p:nvSpPr>
         <p:spPr>
           <a:xfrm>
-            <a:off x="8156448" y="4828032"/>
+            <a:off x="8156448" y="4782312"/>
             <a:ext cx="2834640" cy="274320"/>
           </a:xfrm>
           <a:prstGeom prst="rect">
@@ -4135,7 +5343,7 @@
         </p:nvSpPr>
         <p:spPr>
           <a:xfrm>
-            <a:off x="8156448" y="5084064"/>
+            <a:off x="8156448" y="5038344"/>
             <a:ext cx="2926080" cy="365760"/>
           </a:xfrm>
           <a:prstGeom prst="rect">
@@ -4174,7 +5382,7 @@
         </p:nvSpPr>
         <p:spPr>
           <a:xfrm>
-            <a:off x="566928" y="6400800"/>
+            <a:off x="566928" y="6419088"/>
             <a:ext cx="11057839" cy="274320"/>
           </a:xfrm>
           <a:prstGeom prst="rect">
@@ -4199,7 +5407,7 @@
                 <a:ea typeface="Courier New" pitchFamily="34" charset="-122"/>
                 <a:cs typeface="Courier New" pitchFamily="34" charset="-120"/>
               </a:rPr>
-              <a:t>KODA — Groupe Nseya Digital / JNN Global Ltd  ·  Kinshasa, RD Congo  ·  un service de vérification des paiements ; il ne détient, ne déplace ni ne règle jamais de fonds.</a:t>
+              <a:t>KODA — un service de vérification des paiements ; il ne détient, ne déplace ni ne règle jamais de fonds. Groupe Nseya Digital / JNN Global Ltd · Kinshasa, RD Congo.</a:t>
             </a:r>
             <a:endParaRPr lang="en-US" sz="850" dirty="0"/>
           </a:p>
@@ -4246,7 +5454,7 @@
         <p:spPr>
           <a:xfrm>
             <a:off x="566928" y="640080"/>
-            <a:ext cx="8229600" cy="274320"/>
+            <a:ext cx="10058400" cy="274320"/>
           </a:xfrm>
           <a:prstGeom prst="rect">
             <a:avLst/>
@@ -4262,7 +5470,7 @@
               <a:buNone/>
             </a:pPr>
             <a:r>
-              <a:rPr lang="en-US" sz="1150" b="1" spc="300" kern="0" dirty="0">
+              <a:rPr lang="en-US" sz="1150" b="1" spc="250" kern="0" dirty="0">
                 <a:solidFill>
                   <a:srgbClr val="E8A11F"/>
                 </a:solidFill>
@@ -4284,8 +5492,8 @@
         </p:nvSpPr>
         <p:spPr>
           <a:xfrm>
-            <a:off x="566928" y="960120"/>
-            <a:ext cx="7863840" cy="1463040"/>
+            <a:off x="566928" y="914400"/>
+            <a:ext cx="7863840" cy="1554480"/>
           </a:xfrm>
           <a:prstGeom prst="rect">
             <a:avLst/>
@@ -4304,7 +5512,7 @@
               <a:buNone/>
             </a:pPr>
             <a:r>
-              <a:rPr lang="en-US" sz="3600" b="1" dirty="0">
+              <a:rPr lang="en-US" sz="3300" b="1" dirty="0">
                 <a:solidFill>
                   <a:srgbClr val="E9E4D5"/>
                 </a:solidFill>
@@ -4312,9 +5520,9 @@
                 <a:ea typeface="Arial" pitchFamily="34" charset="-122"/>
                 <a:cs typeface="Arial" pitchFamily="34" charset="-120"/>
               </a:rPr>
-              <a:t>Le commerce finit encore par</a:t>
-            </a:r>
-            <a:endParaRPr lang="en-US" sz="3600" dirty="0"/>
+              <a:t>Chaque fausse capture, c’est de l’argent</a:t>
+            </a:r>
+            <a:endParaRPr lang="en-US" sz="3300" dirty="0"/>
           </a:p>
           <a:p>
             <a:pPr indent="0" marL="0">
@@ -4324,7 +5532,7 @@
               <a:buNone/>
             </a:pPr>
             <a:r>
-              <a:rPr lang="en-US" sz="3600" b="1" dirty="0">
+              <a:rPr lang="en-US" sz="3300" b="1" dirty="0">
                 <a:solidFill>
                   <a:srgbClr val="E9E4D5"/>
                 </a:solidFill>
@@ -4332,9 +5540,9 @@
                 <a:ea typeface="Arial" pitchFamily="34" charset="-122"/>
                 <a:cs typeface="Arial" pitchFamily="34" charset="-120"/>
               </a:rPr>
-              <a:t>« envoie-moi une capture ».</a:t>
-            </a:r>
-            <a:endParaRPr lang="en-US" sz="3600" dirty="0"/>
+              <a:t>en moins dans votre poche.</a:t>
+            </a:r>
+            <a:endParaRPr lang="en-US" sz="3300" dirty="0"/>
           </a:p>
         </p:txBody>
       </p:sp>
@@ -4431,7 +5639,7 @@
         </p:nvSpPr>
         <p:spPr>
           <a:xfrm>
-            <a:off x="1591056" y="2834640"/>
+            <a:off x="1591056" y="2825496"/>
             <a:ext cx="5532120" cy="365760"/>
           </a:xfrm>
           <a:prstGeom prst="rect">
@@ -4448,7 +5656,7 @@
               <a:buNone/>
             </a:pPr>
             <a:r>
-              <a:rPr lang="en-US" sz="1550" b="1" dirty="0">
+              <a:rPr lang="en-US" sz="1500" b="1" dirty="0">
                 <a:solidFill>
                   <a:srgbClr val="E9E4D5"/>
                 </a:solidFill>
@@ -4456,9 +5664,9 @@
                 <a:ea typeface="Arial" pitchFamily="34" charset="-122"/>
                 <a:cs typeface="Arial" pitchFamily="34" charset="-120"/>
               </a:rPr>
-              <a:t>Une capture ne prouve rien</a:t>
-            </a:r>
-            <a:endParaRPr lang="en-US" sz="1550" dirty="0"/>
+              <a:t>Impossible de savoir si c’est vrai</a:t>
+            </a:r>
+            <a:endParaRPr lang="en-US" sz="1500" dirty="0"/>
           </a:p>
         </p:txBody>
       </p:sp>
@@ -4470,8 +5678,8 @@
         </p:nvSpPr>
         <p:spPr>
           <a:xfrm>
-            <a:off x="1591056" y="3191256"/>
-            <a:ext cx="5577840" cy="502920"/>
+            <a:off x="1591056" y="3172968"/>
+            <a:ext cx="5577840" cy="530352"/>
           </a:xfrm>
           <a:prstGeom prst="rect">
             <a:avLst/>
@@ -4485,12 +5693,12 @@
           <a:p>
             <a:pPr indent="0" marL="0">
               <a:lnSpc>
-                <a:spcPct val="105000"/>
+                <a:spcPct val="103000"/>
               </a:lnSpc>
               <a:buNone/>
             </a:pPr>
             <a:r>
-              <a:rPr lang="en-US" sz="1200" dirty="0">
+              <a:rPr lang="en-US" sz="1150" dirty="0">
                 <a:solidFill>
                   <a:srgbClr val="9BA79B"/>
                 </a:solidFill>
@@ -4498,9 +5706,9 @@
                 <a:ea typeface="Calibri" pitchFamily="34" charset="-122"/>
                 <a:cs typeface="Calibri" pitchFamily="34" charset="-120"/>
               </a:rPr>
-              <a:t>Elle peut être modifiée, réutilisée ou inventée en quelques secondes — invisible pour le commerçant.</a:t>
-            </a:r>
-            <a:endParaRPr lang="en-US" sz="1200" dirty="0"/>
+              <a:t>Une capture est modifiée, réutilisée ou inventée en quelques secondes — et ressemble à s’y méprendre à une vraie.</a:t>
+            </a:r>
+            <a:endParaRPr lang="en-US" sz="1150" dirty="0"/>
           </a:p>
         </p:txBody>
       </p:sp>
@@ -4597,7 +5805,7 @@
         </p:nvSpPr>
         <p:spPr>
           <a:xfrm>
-            <a:off x="1591056" y="4041648"/>
+            <a:off x="1591056" y="4032504"/>
             <a:ext cx="5532120" cy="365760"/>
           </a:xfrm>
           <a:prstGeom prst="rect">
@@ -4614,7 +5822,7 @@
               <a:buNone/>
             </a:pPr>
             <a:r>
-              <a:rPr lang="en-US" sz="1550" b="1" dirty="0">
+              <a:rPr lang="en-US" sz="1500" b="1" dirty="0">
                 <a:solidFill>
                   <a:srgbClr val="E9E4D5"/>
                 </a:solidFill>
@@ -4622,9 +5830,9 @@
                 <a:ea typeface="Arial" pitchFamily="34" charset="-122"/>
                 <a:cs typeface="Arial" pitchFamily="34" charset="-120"/>
               </a:rPr>
-              <a:t>La marchandise part avant l’argent</a:t>
-            </a:r>
-            <a:endParaRPr lang="en-US" sz="1550" dirty="0"/>
+              <a:t>La marchandise part, pas l’argent</a:t>
+            </a:r>
+            <a:endParaRPr lang="en-US" sz="1500" dirty="0"/>
           </a:p>
         </p:txBody>
       </p:sp>
@@ -4636,8 +5844,8 @@
         </p:nvSpPr>
         <p:spPr>
           <a:xfrm>
-            <a:off x="1591056" y="4398264"/>
-            <a:ext cx="5577840" cy="502920"/>
+            <a:off x="1591056" y="4379976"/>
+            <a:ext cx="5577840" cy="530352"/>
           </a:xfrm>
           <a:prstGeom prst="rect">
             <a:avLst/>
@@ -4651,12 +5859,12 @@
           <a:p>
             <a:pPr indent="0" marL="0">
               <a:lnSpc>
-                <a:spcPct val="105000"/>
+                <a:spcPct val="103000"/>
               </a:lnSpc>
               <a:buNone/>
             </a:pPr>
             <a:r>
-              <a:rPr lang="en-US" sz="1200" dirty="0">
+              <a:rPr lang="en-US" sz="1150" dirty="0">
                 <a:solidFill>
                   <a:srgbClr val="9BA79B"/>
                 </a:solidFill>
@@ -4664,9 +5872,9 @@
                 <a:ea typeface="Calibri" pitchFamily="34" charset="-122"/>
                 <a:cs typeface="Calibri" pitchFamily="34" charset="-120"/>
               </a:rPr>
-              <a:t>Livrer contre une fausse confirmation, et la perte est immédiate et totale.</a:t>
-            </a:r>
-            <a:endParaRPr lang="en-US" sz="1200" dirty="0"/>
+              <a:t>Livrez contre une fausse confirmation et la perte est pour vous — immédiate et totale.</a:t>
+            </a:r>
+            <a:endParaRPr lang="en-US" sz="1150" dirty="0"/>
           </a:p>
         </p:txBody>
       </p:sp>
@@ -4763,7 +5971,7 @@
         </p:nvSpPr>
         <p:spPr>
           <a:xfrm>
-            <a:off x="1591056" y="5248656"/>
+            <a:off x="1591056" y="5239512"/>
             <a:ext cx="5532120" cy="365760"/>
           </a:xfrm>
           <a:prstGeom prst="rect">
@@ -4780,7 +5988,7 @@
               <a:buNone/>
             </a:pPr>
             <a:r>
-              <a:rPr lang="en-US" sz="1550" b="1" dirty="0">
+              <a:rPr lang="en-US" sz="1500" b="1" dirty="0">
                 <a:solidFill>
                   <a:srgbClr val="E9E4D5"/>
                 </a:solidFill>
@@ -4788,9 +5996,9 @@
                 <a:ea typeface="Arial" pitchFamily="34" charset="-122"/>
                 <a:cs typeface="Arial" pitchFamily="34" charset="-120"/>
               </a:rPr>
-              <a:t>Le rapprochement est manuel</a:t>
-            </a:r>
-            <a:endParaRPr lang="en-US" sz="1550" dirty="0"/>
+              <a:t>Vérifier à la main gâche vos journées</a:t>
+            </a:r>
+            <a:endParaRPr lang="en-US" sz="1500" dirty="0"/>
           </a:p>
         </p:txBody>
       </p:sp>
@@ -4802,8 +6010,8 @@
         </p:nvSpPr>
         <p:spPr>
           <a:xfrm>
-            <a:off x="1591056" y="5605272"/>
-            <a:ext cx="5577840" cy="502920"/>
+            <a:off x="1591056" y="5586984"/>
+            <a:ext cx="5577840" cy="530352"/>
           </a:xfrm>
           <a:prstGeom prst="rect">
             <a:avLst/>
@@ -4817,12 +6025,12 @@
           <a:p>
             <a:pPr indent="0" marL="0">
               <a:lnSpc>
-                <a:spcPct val="105000"/>
+                <a:spcPct val="103000"/>
               </a:lnSpc>
               <a:buNone/>
             </a:pPr>
             <a:r>
-              <a:rPr lang="en-US" sz="1200" dirty="0">
+              <a:rPr lang="en-US" sz="1150" dirty="0">
                 <a:solidFill>
                   <a:srgbClr val="9BA79B"/>
                 </a:solidFill>
@@ -4830,9 +6038,9 @@
                 <a:ea typeface="Calibri" pitchFamily="34" charset="-122"/>
                 <a:cs typeface="Calibri" pitchFamily="34" charset="-120"/>
               </a:rPr>
-              <a:t>Associer paiements et commandes à la main est lent, source d’erreurs, et ne passe pas à l’échelle.</a:t>
-            </a:r>
-            <a:endParaRPr lang="en-US" sz="1200" dirty="0"/>
+              <a:t>Faire défiler les SMS et rapprocher les paiements un par un ne tient pas au-delà de quelques ventes.</a:t>
+            </a:r>
+            <a:endParaRPr lang="en-US" sz="1150" dirty="0"/>
           </a:p>
         </p:txBody>
       </p:sp>
@@ -4903,7 +6111,7 @@
                 <a:ea typeface="Courier New" pitchFamily="34" charset="-122"/>
                 <a:cs typeface="Courier New" pitchFamily="34" charset="-120"/>
               </a:rPr>
-              <a:t>CLIENT</a:t>
+              <a:t>VOTRE CLIENT</a:t>
             </a:r>
             <a:endParaRPr lang="en-US" sz="900" dirty="0"/>
           </a:p>
@@ -5074,7 +6282,7 @@
                 <a:ea typeface="Calibri" pitchFamily="34" charset="-122"/>
                 <a:cs typeface="Calibri" pitchFamily="34" charset="-120"/>
               </a:rPr>
-              <a:t>Chaque commerçant, chaque jour — sans aucun moyen de savoir.</a:t>
+              <a:t>Vous, chaque jour — sans aucun moyen de savoir.</a:t>
             </a:r>
             <a:endParaRPr lang="en-US" sz="1250" dirty="0"/>
           </a:p>
@@ -5174,7 +6382,7 @@
         <p:spPr>
           <a:xfrm>
             <a:off x="566928" y="640080"/>
-            <a:ext cx="8229600" cy="274320"/>
+            <a:ext cx="10058400" cy="274320"/>
           </a:xfrm>
           <a:prstGeom prst="rect">
             <a:avLst/>
@@ -5190,7 +6398,7 @@
               <a:buNone/>
             </a:pPr>
             <a:r>
-              <a:rPr lang="en-US" sz="1150" b="1" spc="300" kern="0" dirty="0">
+              <a:rPr lang="en-US" sz="1150" b="1" spc="250" kern="0" dirty="0">
                 <a:solidFill>
                   <a:srgbClr val="E8A11F"/>
                 </a:solidFill>
@@ -5198,7 +6406,7 @@
                 <a:ea typeface="Courier New" pitchFamily="34" charset="-122"/>
                 <a:cs typeface="Courier New" pitchFamily="34" charset="-120"/>
               </a:rPr>
-              <a:t>POURQUOI ÇA RESTE NON RÉSOLU</a:t>
+              <a:t>POURQUOI VOUS EN ÊTES ENCORE À LA CAPTURE</a:t>
             </a:r>
             <a:endParaRPr lang="en-US" sz="1150" dirty="0"/>
           </a:p>
@@ -5232,7 +6440,7 @@
               <a:buNone/>
             </a:pPr>
             <a:r>
-              <a:rPr lang="en-US" sz="3400" b="1" dirty="0">
+              <a:rPr lang="en-US" sz="3200" b="1" dirty="0">
                 <a:solidFill>
                   <a:srgbClr val="E9E4D5"/>
                 </a:solidFill>
@@ -5240,9 +6448,9 @@
                 <a:ea typeface="Arial" pitchFamily="34" charset="-122"/>
                 <a:cs typeface="Arial" pitchFamily="34" charset="-120"/>
               </a:rPr>
-              <a:t>La « vraie » solution prend 6 à 18 mois —</a:t>
-            </a:r>
-            <a:endParaRPr lang="en-US" sz="3400" dirty="0"/>
+              <a:t>La « vraie » solution : un contrat télécom</a:t>
+            </a:r>
+            <a:endParaRPr lang="en-US" sz="3200" dirty="0"/>
           </a:p>
           <a:p>
             <a:pPr indent="0" marL="0">
@@ -5252,7 +6460,7 @@
               <a:buNone/>
             </a:pPr>
             <a:r>
-              <a:rPr lang="en-US" sz="3400" b="1" dirty="0">
+              <a:rPr lang="en-US" sz="3200" b="1" dirty="0">
                 <a:solidFill>
                   <a:srgbClr val="E9E4D5"/>
                 </a:solidFill>
@@ -5260,9 +6468,9 @@
                 <a:ea typeface="Arial" pitchFamily="34" charset="-122"/>
                 <a:cs typeface="Arial" pitchFamily="34" charset="-120"/>
               </a:rPr>
-              <a:t>par opérateur, par pays.</a:t>
-            </a:r>
-            <a:endParaRPr lang="en-US" sz="3400" dirty="0"/>
+              <a:t>que vous n’aurez jamais.</a:t>
+            </a:r>
+            <a:endParaRPr lang="en-US" sz="3200" dirty="0"/>
           </a:p>
         </p:txBody>
       </p:sp>
@@ -5274,7 +6482,7 @@
         </p:nvSpPr>
         <p:spPr>
           <a:xfrm>
-            <a:off x="566928" y="2651760"/>
+            <a:off x="566928" y="2697480"/>
             <a:ext cx="6492240" cy="2194560"/>
           </a:xfrm>
           <a:prstGeom prst="rect">
@@ -5305,7 +6513,7 @@
                 <a:ea typeface="Calibri" pitchFamily="34" charset="-122"/>
                 <a:cs typeface="Calibri" pitchFamily="34" charset="-120"/>
               </a:rPr>
-              <a:t>La voie classique : négocier un accès API B2B avec chaque opérateur.</a:t>
+              <a:t>Un accès direct à l’API opérateur, c’est 6 à 18 mois de négociation B2B — par opérateur, par pays.</a:t>
             </a:r>
             <a:endParaRPr lang="en-US" sz="1500" dirty="0"/>
           </a:p>
@@ -5328,7 +6536,7 @@
                 <a:ea typeface="Calibri" pitchFamily="34" charset="-122"/>
                 <a:cs typeface="Calibri" pitchFamily="34" charset="-120"/>
               </a:rPr>
-              <a:t>Contrats longs. Pays par pays. Et un refus catégorique fréquent pour les PME qui en ont le plus besoin.</a:t>
+              <a:t>Et les PME se voient régulièrement refuser l’accès.</a:t>
             </a:r>
             <a:endParaRPr lang="en-US" sz="1500" dirty="0"/>
           </a:p>
@@ -5340,15 +6548,15 @@
               <a:buNone/>
             </a:pPr>
             <a:r>
-              <a:rPr lang="en-US" sz="1500" dirty="0">
-                <a:solidFill>
-                  <a:srgbClr val="9BA79B"/>
+              <a:rPr lang="en-US" sz="1500" b="1" dirty="0">
+                <a:solidFill>
+                  <a:srgbClr val="F2B944"/>
                 </a:solidFill>
                 <a:latin typeface="Calibri" pitchFamily="34" charset="0"/>
                 <a:ea typeface="Calibri" pitchFamily="34" charset="-122"/>
                 <a:cs typeface="Calibri" pitchFamily="34" charset="-120"/>
               </a:rPr>
-              <a:t>Alors la plupart du commerce mobile money n’y accède jamais — et revient à la capture d’écran.</a:t>
+              <a:t>Alors des millions de vendeurs en restent à la capture. Jusqu’à maintenant.</a:t>
             </a:r>
             <a:endParaRPr lang="en-US" sz="1500" dirty="0"/>
           </a:p>
@@ -5760,7 +6968,7 @@
         <p:spPr>
           <a:xfrm>
             <a:off x="566928" y="1051560"/>
-            <a:ext cx="8229600" cy="274320"/>
+            <a:ext cx="10058400" cy="274320"/>
           </a:xfrm>
           <a:prstGeom prst="rect">
             <a:avLst/>
@@ -5776,7 +6984,7 @@
               <a:buNone/>
             </a:pPr>
             <a:r>
-              <a:rPr lang="en-US" sz="1150" b="1" spc="300" kern="0" dirty="0">
+              <a:rPr lang="en-US" sz="1150" b="1" spc="250" kern="0" dirty="0">
                 <a:solidFill>
                   <a:srgbClr val="081813"/>
                 </a:solidFill>
@@ -5908,7 +7116,7 @@
                 <a:ea typeface="Calibri" pitchFamily="34" charset="-122"/>
                 <a:cs typeface="Calibri" pitchFamily="34" charset="-120"/>
               </a:rPr>
-              <a:t>KODA lit le SMS que le commerçant reçoit déjà — référence, montant, expéditeur, solde — et le transforme en une vérité vérifiable, verrouillée contre le rejeu. Aucune intégration opérateur. Jamais.</a:t>
+              <a:t>KODA lit le SMS que vous recevez déjà — référence, montant, expéditeur, solde — et le transforme en une vérité vérifiable, verrouillée contre le rejeu. Aucune intégration opérateur. Jamais.</a:t>
             </a:r>
             <a:endParaRPr lang="en-US" sz="1750" dirty="0"/>
           </a:p>
@@ -5955,7 +7163,7 @@
         <p:spPr>
           <a:xfrm>
             <a:off x="566928" y="640080"/>
-            <a:ext cx="8229600" cy="274320"/>
+            <a:ext cx="10058400" cy="274320"/>
           </a:xfrm>
           <a:prstGeom prst="rect">
             <a:avLst/>
@@ -5971,7 +7179,7 @@
               <a:buNone/>
             </a:pPr>
             <a:r>
-              <a:rPr lang="en-US" sz="1150" b="1" spc="300" kern="0" dirty="0">
+              <a:rPr lang="en-US" sz="1150" b="1" spc="250" kern="0" dirty="0">
                 <a:solidFill>
                   <a:srgbClr val="E8A11F"/>
                 </a:solidFill>
@@ -6366,7 +7574,7 @@
                 <a:ea typeface="Calibri" pitchFamily="34" charset="-122"/>
                 <a:cs typeface="Calibri" pitchFamily="34" charset="-120"/>
               </a:rPr>
-              <a:t>Le SMS de confirmation arrive sur le téléphone du commerçant, comme toujours.</a:t>
+              <a:t>Le SMS de confirmation arrive sur votre téléphone, exactement comme toujours.</a:t>
             </a:r>
             <a:endParaRPr lang="en-US" sz="1250" dirty="0"/>
           </a:p>
@@ -6814,7 +8022,7 @@
         <p:spPr>
           <a:xfrm>
             <a:off x="566928" y="640080"/>
-            <a:ext cx="8229600" cy="274320"/>
+            <a:ext cx="10058400" cy="274320"/>
           </a:xfrm>
           <a:prstGeom prst="rect">
             <a:avLst/>
@@ -6830,7 +8038,7 @@
               <a:buNone/>
             </a:pPr>
             <a:r>
-              <a:rPr lang="en-US" sz="1150" b="1" spc="300" kern="0" dirty="0">
+              <a:rPr lang="en-US" sz="1150" b="1" spc="250" kern="0" dirty="0">
                 <a:solidFill>
                   <a:srgbClr val="E8A11F"/>
                 </a:solidFill>
@@ -6838,7 +8046,7 @@
                 <a:ea typeface="Courier New" pitchFamily="34" charset="-122"/>
                 <a:cs typeface="Courier New" pitchFamily="34" charset="-120"/>
               </a:rPr>
-              <a:t>S’ADAPTE À CHAQUE COMMERÇANT</a:t>
+              <a:t>LA SEULE CONDITION</a:t>
             </a:r>
             <a:endParaRPr lang="en-US" sz="1150" dirty="0"/>
           </a:p>
@@ -6853,7 +8061,7 @@
         <p:spPr>
           <a:xfrm>
             <a:off x="566928" y="960120"/>
-            <a:ext cx="7315200" cy="640080"/>
+            <a:ext cx="11155680" cy="731520"/>
           </a:xfrm>
           <a:prstGeom prst="rect">
             <a:avLst/>
@@ -6869,7 +8077,7 @@
               <a:buNone/>
             </a:pPr>
             <a:r>
-              <a:rPr lang="en-US" sz="3400" b="1" dirty="0">
+              <a:rPr lang="en-US" sz="2800" b="1" dirty="0">
                 <a:solidFill>
                   <a:srgbClr val="E9E4D5"/>
                 </a:solidFill>
@@ -6877,9 +8085,9 @@
                 <a:ea typeface="Arial" pitchFamily="34" charset="-122"/>
                 <a:cs typeface="Arial" pitchFamily="34" charset="-120"/>
               </a:rPr>
-              <a:t>Un moteur. Cinq portes.</a:t>
-            </a:r>
-            <a:endParaRPr lang="en-US" sz="3400" dirty="0"/>
+              <a:t>Si votre opérateur VOUS écrit quand vous êtes payé, KODA fonctionne.</a:t>
+            </a:r>
+            <a:endParaRPr lang="en-US" sz="2800" dirty="0"/>
           </a:p>
         </p:txBody>
       </p:sp>
@@ -6891,8 +8099,8 @@
         </p:nvSpPr>
         <p:spPr>
           <a:xfrm>
-            <a:off x="566928" y="1572768"/>
-            <a:ext cx="10881360" cy="457200"/>
+            <a:off x="566928" y="1737360"/>
+            <a:ext cx="10972800" cy="457200"/>
           </a:xfrm>
           <a:prstGeom prst="rect">
             <a:avLst/>
@@ -6908,7 +8116,7 @@
               <a:buNone/>
             </a:pPr>
             <a:r>
-              <a:rPr lang="en-US" sz="1450" dirty="0">
+              <a:rPr lang="en-US" sz="1400" dirty="0">
                 <a:solidFill>
                   <a:srgbClr val="9BA79B"/>
                 </a:solidFill>
@@ -6916,9 +8124,9 @@
                 <a:ea typeface="Calibri" pitchFamily="34" charset="-122"/>
                 <a:cs typeface="Calibri" pitchFamily="34" charset="-120"/>
               </a:rPr>
-              <a:t>Du paiement sur smartphone au téléphone simple sans internet — le client confirme comme il peut.</a:t>
-            </a:r>
-            <a:endParaRPr lang="en-US" sz="1450" dirty="0"/>
+              <a:t>KODA vérifie grâce au SMS de confirmation que votre opérateur mobile money envoie déjà à votre numéro marchand. Toute la liste :</a:t>
+            </a:r>
+            <a:endParaRPr lang="en-US" sz="1400" dirty="0"/>
           </a:p>
         </p:txBody>
       </p:sp>
@@ -6930,12 +8138,12 @@
         </p:nvSpPr>
         <p:spPr>
           <a:xfrm>
-            <a:off x="566928" y="2331720"/>
-            <a:ext cx="2006742" cy="3017520"/>
+            <a:off x="566928" y="2423160"/>
+            <a:ext cx="3503066" cy="2880360"/>
           </a:xfrm>
           <a:prstGeom prst="roundRect">
             <a:avLst>
-              <a:gd name="adj" fmla="val 5012"/>
+              <a:gd name="adj" fmla="val 3492"/>
             </a:avLst>
           </a:prstGeom>
           <a:solidFill>
@@ -6964,12 +8172,12 @@
         </p:nvSpPr>
         <p:spPr>
           <a:xfrm>
-            <a:off x="822960" y="2624328"/>
-            <a:ext cx="603504" cy="603504"/>
+            <a:off x="841248" y="2697480"/>
+            <a:ext cx="658368" cy="658368"/>
           </a:xfrm>
           <a:prstGeom prst="roundRect">
             <a:avLst>
-              <a:gd name="adj" fmla="val 15152"/>
+              <a:gd name="adj" fmla="val 13889"/>
             </a:avLst>
           </a:prstGeom>
           <a:solidFill>
@@ -6999,8 +8207,8 @@
         </p:blipFill>
         <p:spPr>
           <a:xfrm>
-            <a:off x="943661" y="2745029"/>
-            <a:ext cx="362102" cy="362102"/>
+            <a:off x="972922" y="2829154"/>
+            <a:ext cx="395021" cy="395021"/>
           </a:xfrm>
           <a:prstGeom prst="rect">
             <a:avLst/>
@@ -7015,8 +8223,8 @@
         </p:nvSpPr>
         <p:spPr>
           <a:xfrm>
-            <a:off x="786384" y="3383280"/>
-            <a:ext cx="1567830" cy="411480"/>
+            <a:off x="841248" y="3538728"/>
+            <a:ext cx="2954426" cy="777240"/>
           </a:xfrm>
           <a:prstGeom prst="rect">
             <a:avLst/>
@@ -7040,7 +8248,7 @@
                 <a:ea typeface="Arial" pitchFamily="34" charset="-122"/>
                 <a:cs typeface="Arial" pitchFamily="34" charset="-120"/>
               </a:rPr>
-              <a:t>Manuel</a:t>
+              <a:t>Vous acceptez le mobile money</a:t>
             </a:r>
             <a:endParaRPr lang="en-US" sz="1500" dirty="0"/>
           </a:p>
@@ -7054,8 +8262,8 @@
         </p:nvSpPr>
         <p:spPr>
           <a:xfrm>
-            <a:off x="786384" y="3813048"/>
-            <a:ext cx="1567830" cy="1417320"/>
+            <a:off x="841248" y="4297680"/>
+            <a:ext cx="2954426" cy="914400"/>
           </a:xfrm>
           <a:prstGeom prst="rect">
             <a:avLst/>
@@ -7069,12 +8277,12 @@
           <a:p>
             <a:pPr indent="0" marL="0">
               <a:lnSpc>
-                <a:spcPct val="108000"/>
+                <a:spcPct val="110000"/>
               </a:lnSpc>
               <a:buNone/>
             </a:pPr>
             <a:r>
-              <a:rPr lang="en-US" sz="1150" dirty="0">
+              <a:rPr lang="en-US" sz="1200" dirty="0">
                 <a:solidFill>
                   <a:srgbClr val="9BA79B"/>
                 </a:solidFill>
@@ -7082,9 +8290,9 @@
                 <a:ea typeface="Calibri" pitchFamily="34" charset="-122"/>
                 <a:cs typeface="Calibri" pitchFamily="34" charset="-120"/>
               </a:rPr>
-              <a:t>Collez le code dans la Console — aucun code à écrire.</a:t>
-            </a:r>
-            <a:endParaRPr lang="en-US" sz="1150" dirty="0"/>
+              <a:t>Orange Money, M-Pesa, Airtel, Afrimoney, MTN, Wave — et plus de 200 opérateurs.</a:t>
+            </a:r>
+            <a:endParaRPr lang="en-US" sz="1200" dirty="0"/>
           </a:p>
         </p:txBody>
       </p:sp>
@@ -7096,12 +8304,12 @@
         </p:nvSpPr>
         <p:spPr>
           <a:xfrm>
-            <a:off x="2829702" y="2331720"/>
-            <a:ext cx="2006742" cy="3017520"/>
+            <a:off x="4344314" y="2423160"/>
+            <a:ext cx="3503066" cy="2880360"/>
           </a:xfrm>
           <a:prstGeom prst="roundRect">
             <a:avLst>
-              <a:gd name="adj" fmla="val 5012"/>
+              <a:gd name="adj" fmla="val 3492"/>
             </a:avLst>
           </a:prstGeom>
           <a:solidFill>
@@ -7130,12 +8338,12 @@
         </p:nvSpPr>
         <p:spPr>
           <a:xfrm>
-            <a:off x="3085734" y="2624328"/>
-            <a:ext cx="603504" cy="603504"/>
+            <a:off x="4618634" y="2697480"/>
+            <a:ext cx="658368" cy="658368"/>
           </a:xfrm>
           <a:prstGeom prst="roundRect">
             <a:avLst>
-              <a:gd name="adj" fmla="val 15152"/>
+              <a:gd name="adj" fmla="val 13889"/>
             </a:avLst>
           </a:prstGeom>
           <a:solidFill>
@@ -7165,8 +8373,8 @@
         </p:blipFill>
         <p:spPr>
           <a:xfrm>
-            <a:off x="3206435" y="2745029"/>
-            <a:ext cx="362102" cy="362102"/>
+            <a:off x="4750308" y="2829154"/>
+            <a:ext cx="395021" cy="395021"/>
           </a:xfrm>
           <a:prstGeom prst="rect">
             <a:avLst/>
@@ -7181,8 +8389,8 @@
         </p:nvSpPr>
         <p:spPr>
           <a:xfrm>
-            <a:off x="3049158" y="3383280"/>
-            <a:ext cx="1567830" cy="411480"/>
+            <a:off x="4618634" y="3538728"/>
+            <a:ext cx="2954426" cy="777240"/>
           </a:xfrm>
           <a:prstGeom prst="rect">
             <a:avLst/>
@@ -7206,7 +8414,7 @@
                 <a:ea typeface="Arial" pitchFamily="34" charset="-122"/>
                 <a:cs typeface="Arial" pitchFamily="34" charset="-120"/>
               </a:rPr>
-              <a:t>WhatsApp</a:t>
+              <a:t>Le SMS de confirmation arrive sur votre téléphone</a:t>
             </a:r>
             <a:endParaRPr lang="en-US" sz="1500" dirty="0"/>
           </a:p>
@@ -7220,8 +8428,8 @@
         </p:nvSpPr>
         <p:spPr>
           <a:xfrm>
-            <a:off x="3049158" y="3813048"/>
-            <a:ext cx="1567830" cy="1417320"/>
+            <a:off x="4618634" y="4297680"/>
+            <a:ext cx="2954426" cy="914400"/>
           </a:xfrm>
           <a:prstGeom prst="rect">
             <a:avLst/>
@@ -7235,12 +8443,12 @@
           <a:p>
             <a:pPr indent="0" marL="0">
               <a:lnSpc>
-                <a:spcPct val="108000"/>
+                <a:spcPct val="110000"/>
               </a:lnSpc>
               <a:buNone/>
             </a:pPr>
             <a:r>
-              <a:rPr lang="en-US" sz="1150" dirty="0">
+              <a:rPr lang="en-US" sz="1200" dirty="0">
                 <a:solidFill>
                   <a:srgbClr val="9BA79B"/>
                 </a:solidFill>
@@ -7248,9 +8456,9 @@
                 <a:ea typeface="Calibri" pitchFamily="34" charset="-122"/>
                 <a:cs typeface="Calibri" pitchFamily="34" charset="-120"/>
               </a:rPr>
-              <a:t>Le code déposé dans le chat est vérifié dans la conversation.</a:t>
-            </a:r>
-            <a:endParaRPr lang="en-US" sz="1150" dirty="0"/>
+              <a:t>Celui que votre opérateur envoie à votre numéro marchand à chaque paiement.</a:t>
+            </a:r>
+            <a:endParaRPr lang="en-US" sz="1200" dirty="0"/>
           </a:p>
         </p:txBody>
       </p:sp>
@@ -7262,12 +8470,12 @@
         </p:nvSpPr>
         <p:spPr>
           <a:xfrm>
-            <a:off x="5092476" y="2331720"/>
-            <a:ext cx="2006742" cy="3017520"/>
+            <a:off x="8121701" y="2423160"/>
+            <a:ext cx="3503066" cy="2880360"/>
           </a:xfrm>
           <a:prstGeom prst="roundRect">
             <a:avLst>
-              <a:gd name="adj" fmla="val 5012"/>
+              <a:gd name="adj" fmla="val 3492"/>
             </a:avLst>
           </a:prstGeom>
           <a:solidFill>
@@ -7296,12 +8504,12 @@
         </p:nvSpPr>
         <p:spPr>
           <a:xfrm>
-            <a:off x="5348508" y="2624328"/>
-            <a:ext cx="603504" cy="603504"/>
+            <a:off x="8396021" y="2697480"/>
+            <a:ext cx="658368" cy="658368"/>
           </a:xfrm>
           <a:prstGeom prst="roundRect">
             <a:avLst>
-              <a:gd name="adj" fmla="val 15152"/>
+              <a:gd name="adj" fmla="val 13889"/>
             </a:avLst>
           </a:prstGeom>
           <a:solidFill>
@@ -7331,8 +8539,8 @@
         </p:blipFill>
         <p:spPr>
           <a:xfrm>
-            <a:off x="5469209" y="2745029"/>
-            <a:ext cx="362102" cy="362102"/>
+            <a:off x="8527694" y="2829154"/>
+            <a:ext cx="395021" cy="395021"/>
           </a:xfrm>
           <a:prstGeom prst="rect">
             <a:avLst/>
@@ -7347,8 +8555,8 @@
         </p:nvSpPr>
         <p:spPr>
           <a:xfrm>
-            <a:off x="5311932" y="3383280"/>
-            <a:ext cx="1567830" cy="411480"/>
+            <a:off x="8396021" y="3538728"/>
+            <a:ext cx="2954426" cy="777240"/>
           </a:xfrm>
           <a:prstGeom prst="rect">
             <a:avLst/>
@@ -7372,7 +8580,7 @@
                 <a:ea typeface="Arial" pitchFamily="34" charset="-122"/>
                 <a:cs typeface="Arial" pitchFamily="34" charset="-120"/>
               </a:rPr>
-              <a:t>API / intégré</a:t>
+              <a:t>C’est tout — vous êtes prêt</a:t>
             </a:r>
             <a:endParaRPr lang="en-US" sz="1500" dirty="0"/>
           </a:p>
@@ -7386,8 +8594,8 @@
         </p:nvSpPr>
         <p:spPr>
           <a:xfrm>
-            <a:off x="5311932" y="3813048"/>
-            <a:ext cx="1567830" cy="1417320"/>
+            <a:off x="8396021" y="4297680"/>
+            <a:ext cx="2954426" cy="914400"/>
           </a:xfrm>
           <a:prstGeom prst="rect">
             <a:avLst/>
@@ -7401,12 +8609,12 @@
           <a:p>
             <a:pPr indent="0" marL="0">
               <a:lnSpc>
-                <a:spcPct val="108000"/>
+                <a:spcPct val="110000"/>
               </a:lnSpc>
               <a:buNone/>
             </a:pPr>
             <a:r>
-              <a:rPr lang="en-US" sz="1150" dirty="0">
+              <a:rPr lang="en-US" sz="1200" dirty="0">
                 <a:solidFill>
                   <a:srgbClr val="9BA79B"/>
                 </a:solidFill>
@@ -7414,347 +8622,15 @@
                 <a:ea typeface="Calibri" pitchFamily="34" charset="-122"/>
                 <a:cs typeface="Calibri" pitchFamily="34" charset="-120"/>
               </a:rPr>
-              <a:t>Trois endpoints, un widget et des webhooks signés.</a:t>
-            </a:r>
-            <a:endParaRPr lang="en-US" sz="1150" dirty="0"/>
-          </a:p>
-        </p:txBody>
-      </p:sp>
-      <p:sp>
-        <p:nvSpPr>
-          <p:cNvPr id="20" name="Shape 15"/>
-          <p:cNvSpPr/>
-          <p:nvPr/>
-        </p:nvSpPr>
-        <p:spPr>
-          <a:xfrm>
-            <a:off x="7355251" y="2331720"/>
-            <a:ext cx="2006742" cy="3017520"/>
-          </a:xfrm>
-          <a:prstGeom prst="roundRect">
-            <a:avLst>
-              <a:gd name="adj" fmla="val 5012"/>
-            </a:avLst>
-          </a:prstGeom>
-          <a:solidFill>
-            <a:srgbClr val="123027"/>
-          </a:solidFill>
-          <a:ln w="12700">
-            <a:solidFill>
-              <a:srgbClr val="2A4034"/>
-            </a:solidFill>
-            <a:prstDash val="solid"/>
-          </a:ln>
-          <a:effectLst>
-            <a:outerShdw sx="100000" sy="100000" kx="0" ky="0" algn="bl" rotWithShape="0" blurRad="127000" dist="50800" dir="5400000">
-              <a:srgbClr val="000000">
-                <a:alpha val="35000"/>
-              </a:srgbClr>
-            </a:outerShdw>
-          </a:effectLst>
-        </p:spPr>
-      </p:sp>
-      <p:sp>
-        <p:nvSpPr>
-          <p:cNvPr id="21" name="Shape 16"/>
-          <p:cNvSpPr/>
-          <p:nvPr/>
-        </p:nvSpPr>
-        <p:spPr>
-          <a:xfrm>
-            <a:off x="7611283" y="2624328"/>
-            <a:ext cx="603504" cy="603504"/>
-          </a:xfrm>
-          <a:prstGeom prst="roundRect">
-            <a:avLst>
-              <a:gd name="adj" fmla="val 15152"/>
-            </a:avLst>
-          </a:prstGeom>
-          <a:solidFill>
-            <a:srgbClr val="17392E"/>
-          </a:solidFill>
-          <a:ln w="12700">
-            <a:solidFill>
-              <a:srgbClr val="E8A11F"/>
-            </a:solidFill>
-            <a:prstDash val="solid"/>
-          </a:ln>
-        </p:spPr>
-      </p:sp>
-      <p:pic>
-        <p:nvPicPr>
-          <p:cNvPr id="22" name="Image 3" descr="preencoded.png">    </p:cNvPr>
-          <p:cNvPicPr>
-            <a:picLocks noChangeAspect="1"/>
-          </p:cNvPicPr>
-          <p:nvPr/>
-        </p:nvPicPr>
-        <p:blipFill>
-          <a:blip r:embed="rId4"/>
-          <a:stretch>
-            <a:fillRect/>
-          </a:stretch>
-        </p:blipFill>
-        <p:spPr>
-          <a:xfrm>
-            <a:off x="7731984" y="2745029"/>
-            <a:ext cx="362102" cy="362102"/>
-          </a:xfrm>
-          <a:prstGeom prst="rect">
-            <a:avLst/>
-          </a:prstGeom>
-        </p:spPr>
-      </p:pic>
-      <p:sp>
-        <p:nvSpPr>
-          <p:cNvPr id="23" name="Text 17"/>
-          <p:cNvSpPr txBox="1"/>
-          <p:nvPr/>
-        </p:nvSpPr>
-        <p:spPr>
-          <a:xfrm>
-            <a:off x="7574707" y="3383280"/>
-            <a:ext cx="1567830" cy="411480"/>
-          </a:xfrm>
-          <a:prstGeom prst="rect">
-            <a:avLst/>
-          </a:prstGeom>
-          <a:noFill/>
-          <a:ln/>
-        </p:spPr>
-        <p:txBody>
-          <a:bodyPr wrap="square" lIns="0" tIns="0" rIns="0" bIns="0" rtlCol="0" anchor="ctr"/>
-          <a:lstStyle/>
-          <a:p>
-            <a:pPr indent="0" marL="0">
-              <a:buNone/>
-            </a:pPr>
-            <a:r>
-              <a:rPr lang="en-US" sz="1500" b="1" dirty="0">
-                <a:solidFill>
-                  <a:srgbClr val="F2B944"/>
-                </a:solidFill>
-                <a:latin typeface="Arial" pitchFamily="34" charset="0"/>
-                <a:ea typeface="Arial" pitchFamily="34" charset="-122"/>
-                <a:cs typeface="Arial" pitchFamily="34" charset="-120"/>
-              </a:rPr>
-              <a:t>USSD</a:t>
-            </a:r>
-            <a:endParaRPr lang="en-US" sz="1500" dirty="0"/>
-          </a:p>
-        </p:txBody>
-      </p:sp>
-      <p:sp>
-        <p:nvSpPr>
-          <p:cNvPr id="24" name="Text 18"/>
-          <p:cNvSpPr txBox="1"/>
-          <p:nvPr/>
-        </p:nvSpPr>
-        <p:spPr>
-          <a:xfrm>
-            <a:off x="7574707" y="3813048"/>
-            <a:ext cx="1567830" cy="1417320"/>
-          </a:xfrm>
-          <a:prstGeom prst="rect">
-            <a:avLst/>
-          </a:prstGeom>
-          <a:noFill/>
-          <a:ln/>
-        </p:spPr>
-        <p:txBody>
-          <a:bodyPr wrap="square" lIns="0" tIns="0" rIns="0" bIns="0" rtlCol="0" anchor="ctr"/>
-          <a:lstStyle/>
-          <a:p>
-            <a:pPr indent="0" marL="0">
-              <a:lnSpc>
-                <a:spcPct val="108000"/>
-              </a:lnSpc>
-              <a:buNone/>
-            </a:pPr>
-            <a:r>
-              <a:rPr lang="en-US" sz="1150" dirty="0">
-                <a:solidFill>
-                  <a:srgbClr val="9BA79B"/>
-                </a:solidFill>
-                <a:latin typeface="Calibri" pitchFamily="34" charset="0"/>
-                <a:ea typeface="Calibri" pitchFamily="34" charset="-122"/>
-                <a:cs typeface="Calibri" pitchFamily="34" charset="-120"/>
-              </a:rPr>
-              <a:t>Composez un code court — tout téléphone, sans internet.</a:t>
-            </a:r>
-            <a:endParaRPr lang="en-US" sz="1150" dirty="0"/>
-          </a:p>
-        </p:txBody>
-      </p:sp>
-      <p:sp>
-        <p:nvSpPr>
-          <p:cNvPr id="25" name="Shape 19"/>
-          <p:cNvSpPr/>
-          <p:nvPr/>
-        </p:nvSpPr>
-        <p:spPr>
-          <a:xfrm>
-            <a:off x="9618025" y="2331720"/>
-            <a:ext cx="2006742" cy="3017520"/>
-          </a:xfrm>
-          <a:prstGeom prst="roundRect">
-            <a:avLst>
-              <a:gd name="adj" fmla="val 5012"/>
-            </a:avLst>
-          </a:prstGeom>
-          <a:solidFill>
-            <a:srgbClr val="123027"/>
-          </a:solidFill>
-          <a:ln w="12700">
-            <a:solidFill>
-              <a:srgbClr val="2A4034"/>
-            </a:solidFill>
-            <a:prstDash val="solid"/>
-          </a:ln>
-          <a:effectLst>
-            <a:outerShdw sx="100000" sy="100000" kx="0" ky="0" algn="bl" rotWithShape="0" blurRad="127000" dist="50800" dir="5400000">
-              <a:srgbClr val="000000">
-                <a:alpha val="35000"/>
-              </a:srgbClr>
-            </a:outerShdw>
-          </a:effectLst>
-        </p:spPr>
-      </p:sp>
-      <p:sp>
-        <p:nvSpPr>
-          <p:cNvPr id="26" name="Shape 20"/>
-          <p:cNvSpPr/>
-          <p:nvPr/>
-        </p:nvSpPr>
-        <p:spPr>
-          <a:xfrm>
-            <a:off x="9874057" y="2624328"/>
-            <a:ext cx="603504" cy="603504"/>
-          </a:xfrm>
-          <a:prstGeom prst="roundRect">
-            <a:avLst>
-              <a:gd name="adj" fmla="val 15152"/>
-            </a:avLst>
-          </a:prstGeom>
-          <a:solidFill>
-            <a:srgbClr val="17392E"/>
-          </a:solidFill>
-          <a:ln w="12700">
-            <a:solidFill>
-              <a:srgbClr val="E8A11F"/>
-            </a:solidFill>
-            <a:prstDash val="solid"/>
-          </a:ln>
-        </p:spPr>
-      </p:sp>
-      <p:pic>
-        <p:nvPicPr>
-          <p:cNvPr id="27" name="Image 4" descr="preencoded.png">    </p:cNvPr>
-          <p:cNvPicPr>
-            <a:picLocks noChangeAspect="1"/>
-          </p:cNvPicPr>
-          <p:nvPr/>
-        </p:nvPicPr>
-        <p:blipFill>
-          <a:blip r:embed="rId5"/>
-          <a:stretch>
-            <a:fillRect/>
-          </a:stretch>
-        </p:blipFill>
-        <p:spPr>
-          <a:xfrm>
-            <a:off x="9994758" y="2745029"/>
-            <a:ext cx="362102" cy="362102"/>
-          </a:xfrm>
-          <a:prstGeom prst="rect">
-            <a:avLst/>
-          </a:prstGeom>
-        </p:spPr>
-      </p:pic>
-      <p:sp>
-        <p:nvSpPr>
-          <p:cNvPr id="28" name="Text 21"/>
-          <p:cNvSpPr txBox="1"/>
-          <p:nvPr/>
-        </p:nvSpPr>
-        <p:spPr>
-          <a:xfrm>
-            <a:off x="9837481" y="3383280"/>
-            <a:ext cx="1567830" cy="411480"/>
-          </a:xfrm>
-          <a:prstGeom prst="rect">
-            <a:avLst/>
-          </a:prstGeom>
-          <a:noFill/>
-          <a:ln/>
-        </p:spPr>
-        <p:txBody>
-          <a:bodyPr wrap="square" lIns="0" tIns="0" rIns="0" bIns="0" rtlCol="0" anchor="ctr"/>
-          <a:lstStyle/>
-          <a:p>
-            <a:pPr indent="0" marL="0">
-              <a:buNone/>
-            </a:pPr>
-            <a:r>
-              <a:rPr lang="en-US" sz="1500" b="1" dirty="0">
-                <a:solidFill>
-                  <a:srgbClr val="F2B944"/>
-                </a:solidFill>
-                <a:latin typeface="Arial" pitchFamily="34" charset="0"/>
-                <a:ea typeface="Arial" pitchFamily="34" charset="-122"/>
-                <a:cs typeface="Arial" pitchFamily="34" charset="-120"/>
-              </a:rPr>
-              <a:t>SMS entrant</a:t>
-            </a:r>
-            <a:endParaRPr lang="en-US" sz="1500" dirty="0"/>
-          </a:p>
-        </p:txBody>
-      </p:sp>
-      <p:sp>
-        <p:nvSpPr>
-          <p:cNvPr id="29" name="Text 22"/>
-          <p:cNvSpPr txBox="1"/>
-          <p:nvPr/>
-        </p:nvSpPr>
-        <p:spPr>
-          <a:xfrm>
-            <a:off x="9837481" y="3813048"/>
-            <a:ext cx="1567830" cy="1417320"/>
-          </a:xfrm>
-          <a:prstGeom prst="rect">
-            <a:avLst/>
-          </a:prstGeom>
-          <a:noFill/>
-          <a:ln/>
-        </p:spPr>
-        <p:txBody>
-          <a:bodyPr wrap="square" lIns="0" tIns="0" rIns="0" bIns="0" rtlCol="0" anchor="ctr"/>
-          <a:lstStyle/>
-          <a:p>
-            <a:pPr indent="0" marL="0">
-              <a:lnSpc>
-                <a:spcPct val="108000"/>
-              </a:lnSpc>
-              <a:buNone/>
-            </a:pPr>
-            <a:r>
-              <a:rPr lang="en-US" sz="1150" dirty="0">
-                <a:solidFill>
-                  <a:srgbClr val="9BA79B"/>
-                </a:solidFill>
-                <a:latin typeface="Calibri" pitchFamily="34" charset="0"/>
-                <a:ea typeface="Calibri" pitchFamily="34" charset="-122"/>
-                <a:cs typeface="Calibri" pitchFamily="34" charset="-120"/>
-              </a:rPr>
-              <a:t>Envoyez le code (ou transférez le SMS) pour vérifier.</a:t>
-            </a:r>
-            <a:endParaRPr lang="en-US" sz="1150" dirty="0"/>
-          </a:p>
-        </p:txBody>
-      </p:sp>
-      <p:sp>
-        <p:nvSpPr>
-          <p:cNvPr id="30" name="Text 23"/>
+              <a:t>Aucune nouvelle SIM. Aucun nouveau numéro. Rien à installer pour votre client.</a:t>
+            </a:r>
+            <a:endParaRPr lang="en-US" sz="1200" dirty="0"/>
+          </a:p>
+        </p:txBody>
+      </p:sp>
+      <p:sp>
+        <p:nvSpPr>
+          <p:cNvPr id="20" name="Text 15"/>
           <p:cNvSpPr txBox="1"/>
           <p:nvPr/>
         </p:nvSpPr>
@@ -7846,7 +8722,7 @@
         <p:spPr>
           <a:xfrm>
             <a:off x="566928" y="640080"/>
-            <a:ext cx="8229600" cy="274320"/>
+            <a:ext cx="10058400" cy="274320"/>
           </a:xfrm>
           <a:prstGeom prst="rect">
             <a:avLst/>
@@ -7862,7 +8738,7 @@
               <a:buNone/>
             </a:pPr>
             <a:r>
-              <a:rPr lang="en-US" sz="1150" b="1" spc="300" kern="0" dirty="0">
+              <a:rPr lang="en-US" sz="1150" b="1" spc="250" kern="0" dirty="0">
                 <a:solidFill>
                   <a:srgbClr val="E8A11F"/>
                 </a:solidFill>
@@ -7870,7 +8746,7 @@
                 <a:ea typeface="Courier New" pitchFamily="34" charset="-122"/>
                 <a:cs typeface="Courier New" pitchFamily="34" charset="-120"/>
               </a:rPr>
-              <a:t>ANTI-FRAUDE, PAR CONCEPTION</a:t>
+              <a:t>S’ADAPTE À CHAQUE COMMERÇANT</a:t>
             </a:r>
             <a:endParaRPr lang="en-US" sz="1150" dirty="0"/>
           </a:p>
@@ -7885,7 +8761,7 @@
         <p:spPr>
           <a:xfrm>
             <a:off x="566928" y="960120"/>
-            <a:ext cx="9144000" cy="731520"/>
+            <a:ext cx="7315200" cy="640080"/>
           </a:xfrm>
           <a:prstGeom prst="rect">
             <a:avLst/>
@@ -7901,7 +8777,7 @@
               <a:buNone/>
             </a:pPr>
             <a:r>
-              <a:rPr lang="en-US" sz="3800" b="1" dirty="0">
+              <a:rPr lang="en-US" sz="3400" b="1" dirty="0">
                 <a:solidFill>
                   <a:srgbClr val="E9E4D5"/>
                 </a:solidFill>
@@ -7909,9 +8785,9 @@
                 <a:ea typeface="Arial" pitchFamily="34" charset="-122"/>
                 <a:cs typeface="Arial" pitchFamily="34" charset="-120"/>
               </a:rPr>
-              <a:t>Conçu pour qu’on lui mente.</a:t>
-            </a:r>
-            <a:endParaRPr lang="en-US" sz="3800" dirty="0"/>
+              <a:t>Un moteur. Cinq portes.</a:t>
+            </a:r>
+            <a:endParaRPr lang="en-US" sz="3400" dirty="0"/>
           </a:p>
         </p:txBody>
       </p:sp>
@@ -7923,7 +8799,7 @@
         </p:nvSpPr>
         <p:spPr>
           <a:xfrm>
-            <a:off x="566928" y="1691640"/>
+            <a:off x="566928" y="1572768"/>
             <a:ext cx="10881360" cy="457200"/>
           </a:xfrm>
           <a:prstGeom prst="rect">
@@ -7948,7 +8824,7 @@
                 <a:ea typeface="Calibri" pitchFamily="34" charset="-122"/>
                 <a:cs typeface="Calibri" pitchFamily="34" charset="-120"/>
               </a:rPr>
-              <a:t>La vérité vient du côté commerçant, émise par l’opérateur — jamais de ce que l’acheteur peut taper ou modifier.</a:t>
+              <a:t>Du paiement sur smartphone au téléphone simple sans internet — votre client confirme comme il peut.</a:t>
             </a:r>
             <a:endParaRPr lang="en-US" sz="1450" dirty="0"/>
           </a:p>
@@ -7962,12 +8838,12 @@
         </p:nvSpPr>
         <p:spPr>
           <a:xfrm>
-            <a:off x="566928" y="2286000"/>
-            <a:ext cx="5349240" cy="1463040"/>
+            <a:off x="566928" y="2331720"/>
+            <a:ext cx="2006742" cy="3017520"/>
           </a:xfrm>
           <a:prstGeom prst="roundRect">
             <a:avLst>
-              <a:gd name="adj" fmla="val 6875"/>
+              <a:gd name="adj" fmla="val 5012"/>
             </a:avLst>
           </a:prstGeom>
           <a:solidFill>
@@ -7996,12 +8872,12 @@
         </p:nvSpPr>
         <p:spPr>
           <a:xfrm>
-            <a:off x="822960" y="2560320"/>
-            <a:ext cx="548640" cy="548640"/>
+            <a:off x="822960" y="2624328"/>
+            <a:ext cx="603504" cy="603504"/>
           </a:xfrm>
           <a:prstGeom prst="roundRect">
             <a:avLst>
-              <a:gd name="adj" fmla="val 16667"/>
+              <a:gd name="adj" fmla="val 15152"/>
             </a:avLst>
           </a:prstGeom>
           <a:solidFill>
@@ -8031,8 +8907,8 @@
         </p:blipFill>
         <p:spPr>
           <a:xfrm>
-            <a:off x="932688" y="2670048"/>
-            <a:ext cx="329184" cy="329184"/>
+            <a:off x="943661" y="2745029"/>
+            <a:ext cx="362102" cy="362102"/>
           </a:xfrm>
           <a:prstGeom prst="rect">
             <a:avLst/>
@@ -8047,8 +8923,8 @@
         </p:nvSpPr>
         <p:spPr>
           <a:xfrm>
-            <a:off x="1572768" y="2450592"/>
-            <a:ext cx="4206240" cy="365760"/>
+            <a:off x="786384" y="3383280"/>
+            <a:ext cx="1567830" cy="411480"/>
           </a:xfrm>
           <a:prstGeom prst="rect">
             <a:avLst/>
@@ -8072,7 +8948,7 @@
                 <a:ea typeface="Arial" pitchFamily="34" charset="-122"/>
                 <a:cs typeface="Arial" pitchFamily="34" charset="-120"/>
               </a:rPr>
-              <a:t>À usage unique, pour toujours</a:t>
+              <a:t>Manuel</a:t>
             </a:r>
             <a:endParaRPr lang="en-US" sz="1500" dirty="0"/>
           </a:p>
@@ -8086,8 +8962,8 @@
         </p:nvSpPr>
         <p:spPr>
           <a:xfrm>
-            <a:off x="1572768" y="2834640"/>
-            <a:ext cx="4224528" cy="822960"/>
+            <a:off x="786384" y="3813048"/>
+            <a:ext cx="1567830" cy="1417320"/>
           </a:xfrm>
           <a:prstGeom prst="rect">
             <a:avLst/>
@@ -8101,12 +8977,12 @@
           <a:p>
             <a:pPr indent="0" marL="0">
               <a:lnSpc>
-                <a:spcPct val="106000"/>
+                <a:spcPct val="108000"/>
               </a:lnSpc>
               <a:buNone/>
             </a:pPr>
             <a:r>
-              <a:rPr lang="en-US" sz="1180" dirty="0">
+              <a:rPr lang="en-US" sz="1150" dirty="0">
                 <a:solidFill>
                   <a:srgbClr val="9BA79B"/>
                 </a:solidFill>
@@ -8114,9 +8990,9 @@
                 <a:ea typeface="Calibri" pitchFamily="34" charset="-122"/>
                 <a:cs typeface="Calibri" pitchFamily="34" charset="-120"/>
               </a:rPr>
-              <a:t>Une référence confirme un seul paiement et est verrouillée à vie — les rejeux sont refusés.</a:t>
-            </a:r>
-            <a:endParaRPr lang="en-US" sz="1180" dirty="0"/>
+              <a:t>Collez le code dans la Console — aucun code à écrire.</a:t>
+            </a:r>
+            <a:endParaRPr lang="en-US" sz="1150" dirty="0"/>
           </a:p>
         </p:txBody>
       </p:sp>
@@ -8128,12 +9004,12 @@
         </p:nvSpPr>
         <p:spPr>
           <a:xfrm>
-            <a:off x="6144768" y="2286000"/>
-            <a:ext cx="5349240" cy="1463040"/>
+            <a:off x="2829702" y="2331720"/>
+            <a:ext cx="2006742" cy="3017520"/>
           </a:xfrm>
           <a:prstGeom prst="roundRect">
             <a:avLst>
-              <a:gd name="adj" fmla="val 6875"/>
+              <a:gd name="adj" fmla="val 5012"/>
             </a:avLst>
           </a:prstGeom>
           <a:solidFill>
@@ -8162,12 +9038,12 @@
         </p:nvSpPr>
         <p:spPr>
           <a:xfrm>
-            <a:off x="6400800" y="2560320"/>
-            <a:ext cx="548640" cy="548640"/>
+            <a:off x="3085734" y="2624328"/>
+            <a:ext cx="603504" cy="603504"/>
           </a:xfrm>
           <a:prstGeom prst="roundRect">
             <a:avLst>
-              <a:gd name="adj" fmla="val 16667"/>
+              <a:gd name="adj" fmla="val 15152"/>
             </a:avLst>
           </a:prstGeom>
           <a:solidFill>
@@ -8197,8 +9073,8 @@
         </p:blipFill>
         <p:spPr>
           <a:xfrm>
-            <a:off x="6510528" y="2670048"/>
-            <a:ext cx="329184" cy="329184"/>
+            <a:off x="3206435" y="2745029"/>
+            <a:ext cx="362102" cy="362102"/>
           </a:xfrm>
           <a:prstGeom prst="rect">
             <a:avLst/>
@@ -8213,8 +9089,8 @@
         </p:nvSpPr>
         <p:spPr>
           <a:xfrm>
-            <a:off x="7150608" y="2450592"/>
-            <a:ext cx="4206240" cy="365760"/>
+            <a:off x="3049158" y="3383280"/>
+            <a:ext cx="1567830" cy="411480"/>
           </a:xfrm>
           <a:prstGeom prst="rect">
             <a:avLst/>
@@ -8238,7 +9114,7 @@
                 <a:ea typeface="Arial" pitchFamily="34" charset="-122"/>
                 <a:cs typeface="Arial" pitchFamily="34" charset="-120"/>
               </a:rPr>
-              <a:t>Test anti-falsification (chaîne de solde)</a:t>
+              <a:t>WhatsApp</a:t>
             </a:r>
             <a:endParaRPr lang="en-US" sz="1500" dirty="0"/>
           </a:p>
@@ -8252,8 +9128,8 @@
         </p:nvSpPr>
         <p:spPr>
           <a:xfrm>
-            <a:off x="7150608" y="2834640"/>
-            <a:ext cx="4224528" cy="822960"/>
+            <a:off x="3049158" y="3813048"/>
+            <a:ext cx="1567830" cy="1417320"/>
           </a:xfrm>
           <a:prstGeom prst="rect">
             <a:avLst/>
@@ -8267,12 +9143,12 @@
           <a:p>
             <a:pPr indent="0" marL="0">
               <a:lnSpc>
-                <a:spcPct val="106000"/>
+                <a:spcPct val="108000"/>
               </a:lnSpc>
               <a:buNone/>
             </a:pPr>
             <a:r>
-              <a:rPr lang="en-US" sz="1180" dirty="0">
+              <a:rPr lang="en-US" sz="1150" dirty="0">
                 <a:solidFill>
                   <a:srgbClr val="9BA79B"/>
                 </a:solidFill>
@@ -8280,9 +9156,9 @@
                 <a:ea typeface="Calibri" pitchFamily="34" charset="-122"/>
                 <a:cs typeface="Calibri" pitchFamily="34" charset="-120"/>
               </a:rPr>
-              <a:t>Sur les flux appareils, les soldes doivent s’enchaîner — un SMS falsifié brise la chaîne.</a:t>
-            </a:r>
-            <a:endParaRPr lang="en-US" sz="1180" dirty="0"/>
+              <a:t>Le code déposé dans le chat est vérifié dans la conversation.</a:t>
+            </a:r>
+            <a:endParaRPr lang="en-US" sz="1150" dirty="0"/>
           </a:p>
         </p:txBody>
       </p:sp>
@@ -8294,12 +9170,12 @@
         </p:nvSpPr>
         <p:spPr>
           <a:xfrm>
-            <a:off x="566928" y="3913632"/>
-            <a:ext cx="5349240" cy="1463040"/>
+            <a:off x="5092476" y="2331720"/>
+            <a:ext cx="2006742" cy="3017520"/>
           </a:xfrm>
           <a:prstGeom prst="roundRect">
             <a:avLst>
-              <a:gd name="adj" fmla="val 6875"/>
+              <a:gd name="adj" fmla="val 5012"/>
             </a:avLst>
           </a:prstGeom>
           <a:solidFill>
@@ -8328,12 +9204,12 @@
         </p:nvSpPr>
         <p:spPr>
           <a:xfrm>
-            <a:off x="822960" y="4187952"/>
-            <a:ext cx="548640" cy="548640"/>
+            <a:off x="5348508" y="2624328"/>
+            <a:ext cx="603504" cy="603504"/>
           </a:xfrm>
           <a:prstGeom prst="roundRect">
             <a:avLst>
-              <a:gd name="adj" fmla="val 16667"/>
+              <a:gd name="adj" fmla="val 15152"/>
             </a:avLst>
           </a:prstGeom>
           <a:solidFill>
@@ -8363,8 +9239,8 @@
         </p:blipFill>
         <p:spPr>
           <a:xfrm>
-            <a:off x="932688" y="4297680"/>
-            <a:ext cx="329184" cy="329184"/>
+            <a:off x="5469209" y="2745029"/>
+            <a:ext cx="362102" cy="362102"/>
           </a:xfrm>
           <a:prstGeom prst="rect">
             <a:avLst/>
@@ -8379,8 +9255,8 @@
         </p:nvSpPr>
         <p:spPr>
           <a:xfrm>
-            <a:off x="1572768" y="4078224"/>
-            <a:ext cx="4206240" cy="365760"/>
+            <a:off x="5311932" y="3383280"/>
+            <a:ext cx="1567830" cy="411480"/>
           </a:xfrm>
           <a:prstGeom prst="rect">
             <a:avLst/>
@@ -8404,7 +9280,7 @@
                 <a:ea typeface="Arial" pitchFamily="34" charset="-122"/>
                 <a:cs typeface="Arial" pitchFamily="34" charset="-120"/>
               </a:rPr>
-              <a:t>Contrôles montant &amp; devise</a:t>
+              <a:t>API / intégré</a:t>
             </a:r>
             <a:endParaRPr lang="en-US" sz="1500" dirty="0"/>
           </a:p>
@@ -8418,8 +9294,8 @@
         </p:nvSpPr>
         <p:spPr>
           <a:xfrm>
-            <a:off x="1572768" y="4462272"/>
-            <a:ext cx="4224528" cy="822960"/>
+            <a:off x="5311932" y="3813048"/>
+            <a:ext cx="1567830" cy="1417320"/>
           </a:xfrm>
           <a:prstGeom prst="rect">
             <a:avLst/>
@@ -8433,12 +9309,12 @@
           <a:p>
             <a:pPr indent="0" marL="0">
               <a:lnSpc>
-                <a:spcPct val="106000"/>
+                <a:spcPct val="108000"/>
               </a:lnSpc>
               <a:buNone/>
             </a:pPr>
             <a:r>
-              <a:rPr lang="en-US" sz="1180" dirty="0">
+              <a:rPr lang="en-US" sz="1150" dirty="0">
                 <a:solidFill>
                   <a:srgbClr val="9BA79B"/>
                 </a:solidFill>
@@ -8446,9 +9322,9 @@
                 <a:ea typeface="Calibri" pitchFamily="34" charset="-122"/>
                 <a:cs typeface="Calibri" pitchFamily="34" charset="-120"/>
               </a:rPr>
-              <a:t>Un code ne passe que si le montant, la devise et la fenêtre correspondent à la commande.</a:t>
-            </a:r>
-            <a:endParaRPr lang="en-US" sz="1180" dirty="0"/>
+              <a:t>Trois endpoints, un widget et des webhooks signés.</a:t>
+            </a:r>
+            <a:endParaRPr lang="en-US" sz="1150" dirty="0"/>
           </a:p>
         </p:txBody>
       </p:sp>
@@ -8460,12 +9336,12 @@
         </p:nvSpPr>
         <p:spPr>
           <a:xfrm>
-            <a:off x="6144768" y="3913632"/>
-            <a:ext cx="5349240" cy="1463040"/>
+            <a:off x="7355251" y="2331720"/>
+            <a:ext cx="2006742" cy="3017520"/>
           </a:xfrm>
           <a:prstGeom prst="roundRect">
             <a:avLst>
-              <a:gd name="adj" fmla="val 6875"/>
+              <a:gd name="adj" fmla="val 5012"/>
             </a:avLst>
           </a:prstGeom>
           <a:solidFill>
@@ -8494,12 +9370,12 @@
         </p:nvSpPr>
         <p:spPr>
           <a:xfrm>
-            <a:off x="6400800" y="4187952"/>
-            <a:ext cx="548640" cy="548640"/>
+            <a:off x="7611283" y="2624328"/>
+            <a:ext cx="603504" cy="603504"/>
           </a:xfrm>
           <a:prstGeom prst="roundRect">
             <a:avLst>
-              <a:gd name="adj" fmla="val 16667"/>
+              <a:gd name="adj" fmla="val 15152"/>
             </a:avLst>
           </a:prstGeom>
           <a:solidFill>
@@ -8529,8 +9405,8 @@
         </p:blipFill>
         <p:spPr>
           <a:xfrm>
-            <a:off x="6510528" y="4297680"/>
-            <a:ext cx="329184" cy="329184"/>
+            <a:off x="7731984" y="2745029"/>
+            <a:ext cx="362102" cy="362102"/>
           </a:xfrm>
           <a:prstGeom prst="rect">
             <a:avLst/>
@@ -8545,8 +9421,8 @@
         </p:nvSpPr>
         <p:spPr>
           <a:xfrm>
-            <a:off x="7150608" y="4078224"/>
-            <a:ext cx="4206240" cy="365760"/>
+            <a:off x="7574707" y="3383280"/>
+            <a:ext cx="1567830" cy="411480"/>
           </a:xfrm>
           <a:prstGeom prst="rect">
             <a:avLst/>
@@ -8570,7 +9446,7 @@
                 <a:ea typeface="Arial" pitchFamily="34" charset="-122"/>
                 <a:cs typeface="Arial" pitchFamily="34" charset="-120"/>
               </a:rPr>
-              <a:t>Trois niveaux de confiance honnêtes</a:t>
+              <a:t>USSD</a:t>
             </a:r>
             <a:endParaRPr lang="en-US" sz="1500" dirty="0"/>
           </a:p>
@@ -8584,8 +9460,8 @@
         </p:nvSpPr>
         <p:spPr>
           <a:xfrm>
-            <a:off x="7150608" y="4462272"/>
-            <a:ext cx="4224528" cy="822960"/>
+            <a:off x="7574707" y="3813048"/>
+            <a:ext cx="1567830" cy="1417320"/>
           </a:xfrm>
           <a:prstGeom prst="rect">
             <a:avLst/>
@@ -8599,12 +9475,12 @@
           <a:p>
             <a:pPr indent="0" marL="0">
               <a:lnSpc>
-                <a:spcPct val="106000"/>
+                <a:spcPct val="108000"/>
               </a:lnSpc>
               <a:buNone/>
             </a:pPr>
             <a:r>
-              <a:rPr lang="en-US" sz="1180" dirty="0">
+              <a:rPr lang="en-US" sz="1150" dirty="0">
                 <a:solidFill>
                   <a:srgbClr val="9BA79B"/>
                 </a:solidFill>
@@ -8612,15 +9488,181 @@
                 <a:ea typeface="Calibri" pitchFamily="34" charset="-122"/>
                 <a:cs typeface="Calibri" pitchFamily="34" charset="-120"/>
               </a:rPr>
-              <a:t>Chaque reçu indique la force de la preuve : auto-déclaré, ancré à l’appareil ou confirmé par l’opérateur.</a:t>
-            </a:r>
-            <a:endParaRPr lang="en-US" sz="1180" dirty="0"/>
-          </a:p>
-        </p:txBody>
-      </p:sp>
-      <p:sp>
-        <p:nvSpPr>
-          <p:cNvPr id="25" name="Text 19"/>
+              <a:t>Composez un code court — tout téléphone, sans internet.</a:t>
+            </a:r>
+            <a:endParaRPr lang="en-US" sz="1150" dirty="0"/>
+          </a:p>
+        </p:txBody>
+      </p:sp>
+      <p:sp>
+        <p:nvSpPr>
+          <p:cNvPr id="25" name="Shape 19"/>
+          <p:cNvSpPr/>
+          <p:nvPr/>
+        </p:nvSpPr>
+        <p:spPr>
+          <a:xfrm>
+            <a:off x="9618025" y="2331720"/>
+            <a:ext cx="2006742" cy="3017520"/>
+          </a:xfrm>
+          <a:prstGeom prst="roundRect">
+            <a:avLst>
+              <a:gd name="adj" fmla="val 5012"/>
+            </a:avLst>
+          </a:prstGeom>
+          <a:solidFill>
+            <a:srgbClr val="123027"/>
+          </a:solidFill>
+          <a:ln w="12700">
+            <a:solidFill>
+              <a:srgbClr val="2A4034"/>
+            </a:solidFill>
+            <a:prstDash val="solid"/>
+          </a:ln>
+          <a:effectLst>
+            <a:outerShdw sx="100000" sy="100000" kx="0" ky="0" algn="bl" rotWithShape="0" blurRad="127000" dist="50800" dir="5400000">
+              <a:srgbClr val="000000">
+                <a:alpha val="35000"/>
+              </a:srgbClr>
+            </a:outerShdw>
+          </a:effectLst>
+        </p:spPr>
+      </p:sp>
+      <p:sp>
+        <p:nvSpPr>
+          <p:cNvPr id="26" name="Shape 20"/>
+          <p:cNvSpPr/>
+          <p:nvPr/>
+        </p:nvSpPr>
+        <p:spPr>
+          <a:xfrm>
+            <a:off x="9874057" y="2624328"/>
+            <a:ext cx="603504" cy="603504"/>
+          </a:xfrm>
+          <a:prstGeom prst="roundRect">
+            <a:avLst>
+              <a:gd name="adj" fmla="val 15152"/>
+            </a:avLst>
+          </a:prstGeom>
+          <a:solidFill>
+            <a:srgbClr val="17392E"/>
+          </a:solidFill>
+          <a:ln w="12700">
+            <a:solidFill>
+              <a:srgbClr val="E8A11F"/>
+            </a:solidFill>
+            <a:prstDash val="solid"/>
+          </a:ln>
+        </p:spPr>
+      </p:sp>
+      <p:pic>
+        <p:nvPicPr>
+          <p:cNvPr id="27" name="Image 4" descr="preencoded.png">    </p:cNvPr>
+          <p:cNvPicPr>
+            <a:picLocks noChangeAspect="1"/>
+          </p:cNvPicPr>
+          <p:nvPr/>
+        </p:nvPicPr>
+        <p:blipFill>
+          <a:blip r:embed="rId5"/>
+          <a:stretch>
+            <a:fillRect/>
+          </a:stretch>
+        </p:blipFill>
+        <p:spPr>
+          <a:xfrm>
+            <a:off x="9994758" y="2745029"/>
+            <a:ext cx="362102" cy="362102"/>
+          </a:xfrm>
+          <a:prstGeom prst="rect">
+            <a:avLst/>
+          </a:prstGeom>
+        </p:spPr>
+      </p:pic>
+      <p:sp>
+        <p:nvSpPr>
+          <p:cNvPr id="28" name="Text 21"/>
+          <p:cNvSpPr txBox="1"/>
+          <p:nvPr/>
+        </p:nvSpPr>
+        <p:spPr>
+          <a:xfrm>
+            <a:off x="9837481" y="3383280"/>
+            <a:ext cx="1567830" cy="411480"/>
+          </a:xfrm>
+          <a:prstGeom prst="rect">
+            <a:avLst/>
+          </a:prstGeom>
+          <a:noFill/>
+          <a:ln/>
+        </p:spPr>
+        <p:txBody>
+          <a:bodyPr wrap="square" lIns="0" tIns="0" rIns="0" bIns="0" rtlCol="0" anchor="ctr"/>
+          <a:lstStyle/>
+          <a:p>
+            <a:pPr indent="0" marL="0">
+              <a:buNone/>
+            </a:pPr>
+            <a:r>
+              <a:rPr lang="en-US" sz="1500" b="1" dirty="0">
+                <a:solidFill>
+                  <a:srgbClr val="F2B944"/>
+                </a:solidFill>
+                <a:latin typeface="Arial" pitchFamily="34" charset="0"/>
+                <a:ea typeface="Arial" pitchFamily="34" charset="-122"/>
+                <a:cs typeface="Arial" pitchFamily="34" charset="-120"/>
+              </a:rPr>
+              <a:t>SMS entrant</a:t>
+            </a:r>
+            <a:endParaRPr lang="en-US" sz="1500" dirty="0"/>
+          </a:p>
+        </p:txBody>
+      </p:sp>
+      <p:sp>
+        <p:nvSpPr>
+          <p:cNvPr id="29" name="Text 22"/>
+          <p:cNvSpPr txBox="1"/>
+          <p:nvPr/>
+        </p:nvSpPr>
+        <p:spPr>
+          <a:xfrm>
+            <a:off x="9837481" y="3813048"/>
+            <a:ext cx="1567830" cy="1417320"/>
+          </a:xfrm>
+          <a:prstGeom prst="rect">
+            <a:avLst/>
+          </a:prstGeom>
+          <a:noFill/>
+          <a:ln/>
+        </p:spPr>
+        <p:txBody>
+          <a:bodyPr wrap="square" lIns="0" tIns="0" rIns="0" bIns="0" rtlCol="0" anchor="ctr"/>
+          <a:lstStyle/>
+          <a:p>
+            <a:pPr indent="0" marL="0">
+              <a:lnSpc>
+                <a:spcPct val="108000"/>
+              </a:lnSpc>
+              <a:buNone/>
+            </a:pPr>
+            <a:r>
+              <a:rPr lang="en-US" sz="1150" dirty="0">
+                <a:solidFill>
+                  <a:srgbClr val="9BA79B"/>
+                </a:solidFill>
+                <a:latin typeface="Calibri" pitchFamily="34" charset="0"/>
+                <a:ea typeface="Calibri" pitchFamily="34" charset="-122"/>
+                <a:cs typeface="Calibri" pitchFamily="34" charset="-120"/>
+              </a:rPr>
+              <a:t>Envoyez le code (ou transférez le SMS) pour vérifier.</a:t>
+            </a:r>
+            <a:endParaRPr lang="en-US" sz="1150" dirty="0"/>
+          </a:p>
+        </p:txBody>
+      </p:sp>
+      <p:sp>
+        <p:nvSpPr>
+          <p:cNvPr id="30" name="Text 23"/>
           <p:cNvSpPr txBox="1"/>
           <p:nvPr/>
         </p:nvSpPr>
@@ -8712,7 +9754,7 @@
         <p:spPr>
           <a:xfrm>
             <a:off x="566928" y="640080"/>
-            <a:ext cx="8229600" cy="274320"/>
+            <a:ext cx="10058400" cy="274320"/>
           </a:xfrm>
           <a:prstGeom prst="rect">
             <a:avLst/>
@@ -8728,7 +9770,7 @@
               <a:buNone/>
             </a:pPr>
             <a:r>
-              <a:rPr lang="en-US" sz="1150" b="1" spc="300" kern="0" dirty="0">
+              <a:rPr lang="en-US" sz="1150" b="1" spc="250" kern="0" dirty="0">
                 <a:solidFill>
                   <a:srgbClr val="E8A11F"/>
                 </a:solidFill>
@@ -8736,7 +9778,7 @@
                 <a:ea typeface="Courier New" pitchFamily="34" charset="-122"/>
                 <a:cs typeface="Courier New" pitchFamily="34" charset="-120"/>
               </a:rPr>
-              <a:t>MONDIAL PAR CONCEPTION</a:t>
+              <a:t>ANTI-FRAUDE, PAR CONCEPTION</a:t>
             </a:r>
             <a:endParaRPr lang="en-US" sz="1150" dirty="0"/>
           </a:p>
@@ -8751,7 +9793,7 @@
         <p:spPr>
           <a:xfrm>
             <a:off x="566928" y="960120"/>
-            <a:ext cx="11064240" cy="640080"/>
+            <a:ext cx="9144000" cy="731520"/>
           </a:xfrm>
           <a:prstGeom prst="rect">
             <a:avLst/>
@@ -8767,7 +9809,7 @@
               <a:buNone/>
             </a:pPr>
             <a:r>
-              <a:rPr lang="en-US" sz="2900" b="1" dirty="0">
+              <a:rPr lang="en-US" sz="3800" b="1" dirty="0">
                 <a:solidFill>
                   <a:srgbClr val="E9E4D5"/>
                 </a:solidFill>
@@ -8775,26 +9817,65 @@
                 <a:ea typeface="Arial" pitchFamily="34" charset="-122"/>
                 <a:cs typeface="Arial" pitchFamily="34" charset="-120"/>
               </a:rPr>
-              <a:t>La couverture est une carte d’analyse — pas une pile de contrats.</a:t>
-            </a:r>
-            <a:endParaRPr lang="en-US" sz="2900" dirty="0"/>
-          </a:p>
-        </p:txBody>
-      </p:sp>
-      <p:sp>
-        <p:nvSpPr>
-          <p:cNvPr id="4" name="Shape 2"/>
+              <a:t>Conçu pour qu’on lui mente.</a:t>
+            </a:r>
+            <a:endParaRPr lang="en-US" sz="3800" dirty="0"/>
+          </a:p>
+        </p:txBody>
+      </p:sp>
+      <p:sp>
+        <p:nvSpPr>
+          <p:cNvPr id="4" name="Text 2"/>
+          <p:cNvSpPr txBox="1"/>
+          <p:nvPr/>
+        </p:nvSpPr>
+        <p:spPr>
+          <a:xfrm>
+            <a:off x="566928" y="1691640"/>
+            <a:ext cx="10881360" cy="457200"/>
+          </a:xfrm>
+          <a:prstGeom prst="rect">
+            <a:avLst/>
+          </a:prstGeom>
+          <a:noFill/>
+          <a:ln/>
+        </p:spPr>
+        <p:txBody>
+          <a:bodyPr wrap="square" lIns="0" tIns="0" rIns="0" bIns="0" rtlCol="0" anchor="ctr"/>
+          <a:lstStyle/>
+          <a:p>
+            <a:pPr indent="0" marL="0">
+              <a:buNone/>
+            </a:pPr>
+            <a:r>
+              <a:rPr lang="en-US" sz="1450" dirty="0">
+                <a:solidFill>
+                  <a:srgbClr val="9BA79B"/>
+                </a:solidFill>
+                <a:latin typeface="Calibri" pitchFamily="34" charset="0"/>
+                <a:ea typeface="Calibri" pitchFamily="34" charset="-122"/>
+                <a:cs typeface="Calibri" pitchFamily="34" charset="-120"/>
+              </a:rPr>
+              <a:t>La vérité vient du côté commerçant, émise par l’opérateur — jamais de ce que l’acheteur peut taper ou modifier.</a:t>
+            </a:r>
+            <a:endParaRPr lang="en-US" sz="1450" dirty="0"/>
+          </a:p>
+        </p:txBody>
+      </p:sp>
+      <p:sp>
+        <p:nvSpPr>
+          <p:cNvPr id="5" name="Shape 3"/>
           <p:cNvSpPr/>
           <p:nvPr/>
         </p:nvSpPr>
         <p:spPr>
           <a:xfrm>
-            <a:off x="566928" y="2148840"/>
-            <a:ext cx="2558720" cy="1737360"/>
+            <a:off x="566928" y="2286000"/>
+            <a:ext cx="5349240" cy="1463040"/>
           </a:xfrm>
           <a:prstGeom prst="roundRect">
             <a:avLst>
-              <a:gd name="adj" fmla="val 5789"/>
+              <a:gd name="adj" fmla="val 6875"/>
             </a:avLst>
           </a:prstGeom>
           <a:solidFill>
@@ -8817,69 +9898,123 @@
       </p:sp>
       <p:sp>
         <p:nvSpPr>
-          <p:cNvPr id="5" name="Text 3"/>
-          <p:cNvSpPr txBox="1"/>
-          <p:nvPr/>
-        </p:nvSpPr>
-        <p:spPr>
-          <a:xfrm>
-            <a:off x="658368" y="2377440"/>
-            <a:ext cx="2375840" cy="868680"/>
-          </a:xfrm>
-          <a:prstGeom prst="rect">
-            <a:avLst/>
-          </a:prstGeom>
-          <a:noFill/>
-          <a:ln/>
-        </p:spPr>
-        <p:txBody>
-          <a:bodyPr wrap="square" lIns="0" tIns="0" rIns="0" bIns="0" rtlCol="0" anchor="ctr"/>
-          <a:lstStyle/>
-          <a:p>
-            <a:pPr algn="ctr" indent="0" marL="0">
-              <a:buNone/>
-            </a:pPr>
-            <a:r>
-              <a:rPr lang="en-US" sz="6000" b="1" dirty="0">
-                <a:solidFill>
-                  <a:srgbClr val="E8A11F"/>
+          <p:cNvPr id="6" name="Shape 4"/>
+          <p:cNvSpPr/>
+          <p:nvPr/>
+        </p:nvSpPr>
+        <p:spPr>
+          <a:xfrm>
+            <a:off x="822960" y="2560320"/>
+            <a:ext cx="548640" cy="548640"/>
+          </a:xfrm>
+          <a:prstGeom prst="roundRect">
+            <a:avLst>
+              <a:gd name="adj" fmla="val 16667"/>
+            </a:avLst>
+          </a:prstGeom>
+          <a:solidFill>
+            <a:srgbClr val="17392E"/>
+          </a:solidFill>
+          <a:ln w="12700">
+            <a:solidFill>
+              <a:srgbClr val="E8A11F"/>
+            </a:solidFill>
+            <a:prstDash val="solid"/>
+          </a:ln>
+        </p:spPr>
+      </p:sp>
+      <p:pic>
+        <p:nvPicPr>
+          <p:cNvPr id="7" name="Image 0" descr="preencoded.png">    </p:cNvPr>
+          <p:cNvPicPr>
+            <a:picLocks noChangeAspect="1"/>
+          </p:cNvPicPr>
+          <p:nvPr/>
+        </p:nvPicPr>
+        <p:blipFill>
+          <a:blip r:embed="rId1"/>
+          <a:stretch>
+            <a:fillRect/>
+          </a:stretch>
+        </p:blipFill>
+        <p:spPr>
+          <a:xfrm>
+            <a:off x="932688" y="2670048"/>
+            <a:ext cx="329184" cy="329184"/>
+          </a:xfrm>
+          <a:prstGeom prst="rect">
+            <a:avLst/>
+          </a:prstGeom>
+        </p:spPr>
+      </p:pic>
+      <p:sp>
+        <p:nvSpPr>
+          <p:cNvPr id="8" name="Text 5"/>
+          <p:cNvSpPr txBox="1"/>
+          <p:nvPr/>
+        </p:nvSpPr>
+        <p:spPr>
+          <a:xfrm>
+            <a:off x="1572768" y="2450592"/>
+            <a:ext cx="4206240" cy="365760"/>
+          </a:xfrm>
+          <a:prstGeom prst="rect">
+            <a:avLst/>
+          </a:prstGeom>
+          <a:noFill/>
+          <a:ln/>
+        </p:spPr>
+        <p:txBody>
+          <a:bodyPr wrap="square" lIns="0" tIns="0" rIns="0" bIns="0" rtlCol="0" anchor="ctr"/>
+          <a:lstStyle/>
+          <a:p>
+            <a:pPr indent="0" marL="0">
+              <a:buNone/>
+            </a:pPr>
+            <a:r>
+              <a:rPr lang="en-US" sz="1500" b="1" dirty="0">
+                <a:solidFill>
+                  <a:srgbClr val="F2B944"/>
                 </a:solidFill>
                 <a:latin typeface="Arial" pitchFamily="34" charset="0"/>
                 <a:ea typeface="Arial" pitchFamily="34" charset="-122"/>
                 <a:cs typeface="Arial" pitchFamily="34" charset="-120"/>
               </a:rPr>
-              <a:t>235</a:t>
-            </a:r>
-            <a:endParaRPr lang="en-US" sz="6000" dirty="0"/>
-          </a:p>
-        </p:txBody>
-      </p:sp>
-      <p:sp>
-        <p:nvSpPr>
-          <p:cNvPr id="6" name="Text 4"/>
-          <p:cNvSpPr txBox="1"/>
-          <p:nvPr/>
-        </p:nvSpPr>
-        <p:spPr>
-          <a:xfrm>
-            <a:off x="640080" y="3319272"/>
-            <a:ext cx="2412416" cy="457200"/>
-          </a:xfrm>
-          <a:prstGeom prst="rect">
-            <a:avLst/>
-          </a:prstGeom>
-          <a:noFill/>
-          <a:ln/>
-        </p:spPr>
-        <p:txBody>
-          <a:bodyPr wrap="square" lIns="0" tIns="0" rIns="0" bIns="0" rtlCol="0" anchor="ctr"/>
-          <a:lstStyle/>
-          <a:p>
-            <a:pPr algn="ctr" indent="0" marL="0">
-              <a:buNone/>
-            </a:pPr>
-            <a:r>
-              <a:rPr lang="en-US" sz="1200" dirty="0">
+              <a:t>À usage unique, pour toujours</a:t>
+            </a:r>
+            <a:endParaRPr lang="en-US" sz="1500" dirty="0"/>
+          </a:p>
+        </p:txBody>
+      </p:sp>
+      <p:sp>
+        <p:nvSpPr>
+          <p:cNvPr id="9" name="Text 6"/>
+          <p:cNvSpPr txBox="1"/>
+          <p:nvPr/>
+        </p:nvSpPr>
+        <p:spPr>
+          <a:xfrm>
+            <a:off x="1572768" y="2834640"/>
+            <a:ext cx="4224528" cy="822960"/>
+          </a:xfrm>
+          <a:prstGeom prst="rect">
+            <a:avLst/>
+          </a:prstGeom>
+          <a:noFill/>
+          <a:ln/>
+        </p:spPr>
+        <p:txBody>
+          <a:bodyPr wrap="square" lIns="0" tIns="0" rIns="0" bIns="0" rtlCol="0" anchor="ctr"/>
+          <a:lstStyle/>
+          <a:p>
+            <a:pPr indent="0" marL="0">
+              <a:lnSpc>
+                <a:spcPct val="106000"/>
+              </a:lnSpc>
+              <a:buNone/>
+            </a:pPr>
+            <a:r>
+              <a:rPr lang="en-US" sz="1180" dirty="0">
                 <a:solidFill>
                   <a:srgbClr val="9BA79B"/>
                 </a:solidFill>
@@ -8887,26 +10022,26 @@
                 <a:ea typeface="Calibri" pitchFamily="34" charset="-122"/>
                 <a:cs typeface="Calibri" pitchFamily="34" charset="-120"/>
               </a:rPr>
-              <a:t>opérateurs au registre</a:t>
-            </a:r>
-            <a:endParaRPr lang="en-US" sz="1200" dirty="0"/>
-          </a:p>
-        </p:txBody>
-      </p:sp>
-      <p:sp>
-        <p:nvSpPr>
-          <p:cNvPr id="7" name="Shape 5"/>
+              <a:t>Une référence confirme un seul paiement et est verrouillée à vie — les rejeux sont refusés.</a:t>
+            </a:r>
+            <a:endParaRPr lang="en-US" sz="1180" dirty="0"/>
+          </a:p>
+        </p:txBody>
+      </p:sp>
+      <p:sp>
+        <p:nvSpPr>
+          <p:cNvPr id="10" name="Shape 7"/>
           <p:cNvSpPr/>
           <p:nvPr/>
         </p:nvSpPr>
         <p:spPr>
           <a:xfrm>
-            <a:off x="3399968" y="2148840"/>
-            <a:ext cx="2558720" cy="1737360"/>
+            <a:off x="6144768" y="2286000"/>
+            <a:ext cx="5349240" cy="1463040"/>
           </a:xfrm>
           <a:prstGeom prst="roundRect">
             <a:avLst>
-              <a:gd name="adj" fmla="val 5789"/>
+              <a:gd name="adj" fmla="val 6875"/>
             </a:avLst>
           </a:prstGeom>
           <a:solidFill>
@@ -8929,69 +10064,123 @@
       </p:sp>
       <p:sp>
         <p:nvSpPr>
-          <p:cNvPr id="8" name="Text 6"/>
-          <p:cNvSpPr txBox="1"/>
-          <p:nvPr/>
-        </p:nvSpPr>
-        <p:spPr>
-          <a:xfrm>
-            <a:off x="3491408" y="2377440"/>
-            <a:ext cx="2375840" cy="868680"/>
-          </a:xfrm>
-          <a:prstGeom prst="rect">
-            <a:avLst/>
-          </a:prstGeom>
-          <a:noFill/>
-          <a:ln/>
-        </p:spPr>
-        <p:txBody>
-          <a:bodyPr wrap="square" lIns="0" tIns="0" rIns="0" bIns="0" rtlCol="0" anchor="ctr"/>
-          <a:lstStyle/>
-          <a:p>
-            <a:pPr algn="ctr" indent="0" marL="0">
-              <a:buNone/>
-            </a:pPr>
-            <a:r>
-              <a:rPr lang="en-US" sz="6000" b="1" dirty="0">
-                <a:solidFill>
-                  <a:srgbClr val="E8A11F"/>
+          <p:cNvPr id="11" name="Shape 8"/>
+          <p:cNvSpPr/>
+          <p:nvPr/>
+        </p:nvSpPr>
+        <p:spPr>
+          <a:xfrm>
+            <a:off x="6400800" y="2560320"/>
+            <a:ext cx="548640" cy="548640"/>
+          </a:xfrm>
+          <a:prstGeom prst="roundRect">
+            <a:avLst>
+              <a:gd name="adj" fmla="val 16667"/>
+            </a:avLst>
+          </a:prstGeom>
+          <a:solidFill>
+            <a:srgbClr val="17392E"/>
+          </a:solidFill>
+          <a:ln w="12700">
+            <a:solidFill>
+              <a:srgbClr val="E8A11F"/>
+            </a:solidFill>
+            <a:prstDash val="solid"/>
+          </a:ln>
+        </p:spPr>
+      </p:sp>
+      <p:pic>
+        <p:nvPicPr>
+          <p:cNvPr id="12" name="Image 1" descr="preencoded.png">    </p:cNvPr>
+          <p:cNvPicPr>
+            <a:picLocks noChangeAspect="1"/>
+          </p:cNvPicPr>
+          <p:nvPr/>
+        </p:nvPicPr>
+        <p:blipFill>
+          <a:blip r:embed="rId2"/>
+          <a:stretch>
+            <a:fillRect/>
+          </a:stretch>
+        </p:blipFill>
+        <p:spPr>
+          <a:xfrm>
+            <a:off x="6510528" y="2670048"/>
+            <a:ext cx="329184" cy="329184"/>
+          </a:xfrm>
+          <a:prstGeom prst="rect">
+            <a:avLst/>
+          </a:prstGeom>
+        </p:spPr>
+      </p:pic>
+      <p:sp>
+        <p:nvSpPr>
+          <p:cNvPr id="13" name="Text 9"/>
+          <p:cNvSpPr txBox="1"/>
+          <p:nvPr/>
+        </p:nvSpPr>
+        <p:spPr>
+          <a:xfrm>
+            <a:off x="7150608" y="2450592"/>
+            <a:ext cx="4206240" cy="365760"/>
+          </a:xfrm>
+          <a:prstGeom prst="rect">
+            <a:avLst/>
+          </a:prstGeom>
+          <a:noFill/>
+          <a:ln/>
+        </p:spPr>
+        <p:txBody>
+          <a:bodyPr wrap="square" lIns="0" tIns="0" rIns="0" bIns="0" rtlCol="0" anchor="ctr"/>
+          <a:lstStyle/>
+          <a:p>
+            <a:pPr indent="0" marL="0">
+              <a:buNone/>
+            </a:pPr>
+            <a:r>
+              <a:rPr lang="en-US" sz="1500" b="1" dirty="0">
+                <a:solidFill>
+                  <a:srgbClr val="F2B944"/>
                 </a:solidFill>
                 <a:latin typeface="Arial" pitchFamily="34" charset="0"/>
                 <a:ea typeface="Arial" pitchFamily="34" charset="-122"/>
                 <a:cs typeface="Arial" pitchFamily="34" charset="-120"/>
               </a:rPr>
-              <a:t>95</a:t>
-            </a:r>
-            <a:endParaRPr lang="en-US" sz="6000" dirty="0"/>
-          </a:p>
-        </p:txBody>
-      </p:sp>
-      <p:sp>
-        <p:nvSpPr>
-          <p:cNvPr id="9" name="Text 7"/>
-          <p:cNvSpPr txBox="1"/>
-          <p:nvPr/>
-        </p:nvSpPr>
-        <p:spPr>
-          <a:xfrm>
-            <a:off x="3473120" y="3319272"/>
-            <a:ext cx="2412416" cy="457200"/>
-          </a:xfrm>
-          <a:prstGeom prst="rect">
-            <a:avLst/>
-          </a:prstGeom>
-          <a:noFill/>
-          <a:ln/>
-        </p:spPr>
-        <p:txBody>
-          <a:bodyPr wrap="square" lIns="0" tIns="0" rIns="0" bIns="0" rtlCol="0" anchor="ctr"/>
-          <a:lstStyle/>
-          <a:p>
-            <a:pPr algn="ctr" indent="0" marL="0">
-              <a:buNone/>
-            </a:pPr>
-            <a:r>
-              <a:rPr lang="en-US" sz="1200" dirty="0">
+              <a:t>Test anti-falsification (chaîne de solde)</a:t>
+            </a:r>
+            <a:endParaRPr lang="en-US" sz="1500" dirty="0"/>
+          </a:p>
+        </p:txBody>
+      </p:sp>
+      <p:sp>
+        <p:nvSpPr>
+          <p:cNvPr id="14" name="Text 10"/>
+          <p:cNvSpPr txBox="1"/>
+          <p:nvPr/>
+        </p:nvSpPr>
+        <p:spPr>
+          <a:xfrm>
+            <a:off x="7150608" y="2834640"/>
+            <a:ext cx="4224528" cy="822960"/>
+          </a:xfrm>
+          <a:prstGeom prst="rect">
+            <a:avLst/>
+          </a:prstGeom>
+          <a:noFill/>
+          <a:ln/>
+        </p:spPr>
+        <p:txBody>
+          <a:bodyPr wrap="square" lIns="0" tIns="0" rIns="0" bIns="0" rtlCol="0" anchor="ctr"/>
+          <a:lstStyle/>
+          <a:p>
+            <a:pPr indent="0" marL="0">
+              <a:lnSpc>
+                <a:spcPct val="106000"/>
+              </a:lnSpc>
+              <a:buNone/>
+            </a:pPr>
+            <a:r>
+              <a:rPr lang="en-US" sz="1180" dirty="0">
                 <a:solidFill>
                   <a:srgbClr val="9BA79B"/>
                 </a:solidFill>
@@ -8999,26 +10188,26 @@
                 <a:ea typeface="Calibri" pitchFamily="34" charset="-122"/>
                 <a:cs typeface="Calibri" pitchFamily="34" charset="-120"/>
               </a:rPr>
-              <a:t>pays</a:t>
-            </a:r>
-            <a:endParaRPr lang="en-US" sz="1200" dirty="0"/>
-          </a:p>
-        </p:txBody>
-      </p:sp>
-      <p:sp>
-        <p:nvSpPr>
-          <p:cNvPr id="10" name="Shape 8"/>
+              <a:t>Sur les flux appareils, les soldes doivent s’enchaîner — un SMS falsifié brise la chaîne.</a:t>
+            </a:r>
+            <a:endParaRPr lang="en-US" sz="1180" dirty="0"/>
+          </a:p>
+        </p:txBody>
+      </p:sp>
+      <p:sp>
+        <p:nvSpPr>
+          <p:cNvPr id="15" name="Shape 11"/>
           <p:cNvSpPr/>
           <p:nvPr/>
         </p:nvSpPr>
         <p:spPr>
           <a:xfrm>
-            <a:off x="6233008" y="2148840"/>
-            <a:ext cx="2558720" cy="1737360"/>
+            <a:off x="566928" y="3913632"/>
+            <a:ext cx="5349240" cy="1463040"/>
           </a:xfrm>
           <a:prstGeom prst="roundRect">
             <a:avLst>
-              <a:gd name="adj" fmla="val 5789"/>
+              <a:gd name="adj" fmla="val 6875"/>
             </a:avLst>
           </a:prstGeom>
           <a:solidFill>
@@ -9041,69 +10230,123 @@
       </p:sp>
       <p:sp>
         <p:nvSpPr>
-          <p:cNvPr id="11" name="Text 9"/>
-          <p:cNvSpPr txBox="1"/>
-          <p:nvPr/>
-        </p:nvSpPr>
-        <p:spPr>
-          <a:xfrm>
-            <a:off x="6324448" y="2377440"/>
-            <a:ext cx="2375840" cy="868680"/>
-          </a:xfrm>
-          <a:prstGeom prst="rect">
-            <a:avLst/>
-          </a:prstGeom>
-          <a:noFill/>
-          <a:ln/>
-        </p:spPr>
-        <p:txBody>
-          <a:bodyPr wrap="square" lIns="0" tIns="0" rIns="0" bIns="0" rtlCol="0" anchor="ctr"/>
-          <a:lstStyle/>
-          <a:p>
-            <a:pPr algn="ctr" indent="0" marL="0">
-              <a:buNone/>
-            </a:pPr>
-            <a:r>
-              <a:rPr lang="en-US" sz="6000" b="1" dirty="0">
-                <a:solidFill>
-                  <a:srgbClr val="E8A11F"/>
+          <p:cNvPr id="16" name="Shape 12"/>
+          <p:cNvSpPr/>
+          <p:nvPr/>
+        </p:nvSpPr>
+        <p:spPr>
+          <a:xfrm>
+            <a:off x="822960" y="4187952"/>
+            <a:ext cx="548640" cy="548640"/>
+          </a:xfrm>
+          <a:prstGeom prst="roundRect">
+            <a:avLst>
+              <a:gd name="adj" fmla="val 16667"/>
+            </a:avLst>
+          </a:prstGeom>
+          <a:solidFill>
+            <a:srgbClr val="17392E"/>
+          </a:solidFill>
+          <a:ln w="12700">
+            <a:solidFill>
+              <a:srgbClr val="E8A11F"/>
+            </a:solidFill>
+            <a:prstDash val="solid"/>
+          </a:ln>
+        </p:spPr>
+      </p:sp>
+      <p:pic>
+        <p:nvPicPr>
+          <p:cNvPr id="17" name="Image 2" descr="preencoded.png">    </p:cNvPr>
+          <p:cNvPicPr>
+            <a:picLocks noChangeAspect="1"/>
+          </p:cNvPicPr>
+          <p:nvPr/>
+        </p:nvPicPr>
+        <p:blipFill>
+          <a:blip r:embed="rId3"/>
+          <a:stretch>
+            <a:fillRect/>
+          </a:stretch>
+        </p:blipFill>
+        <p:spPr>
+          <a:xfrm>
+            <a:off x="932688" y="4297680"/>
+            <a:ext cx="329184" cy="329184"/>
+          </a:xfrm>
+          <a:prstGeom prst="rect">
+            <a:avLst/>
+          </a:prstGeom>
+        </p:spPr>
+      </p:pic>
+      <p:sp>
+        <p:nvSpPr>
+          <p:cNvPr id="18" name="Text 13"/>
+          <p:cNvSpPr txBox="1"/>
+          <p:nvPr/>
+        </p:nvSpPr>
+        <p:spPr>
+          <a:xfrm>
+            <a:off x="1572768" y="4078224"/>
+            <a:ext cx="4206240" cy="365760"/>
+          </a:xfrm>
+          <a:prstGeom prst="rect">
+            <a:avLst/>
+          </a:prstGeom>
+          <a:noFill/>
+          <a:ln/>
+        </p:spPr>
+        <p:txBody>
+          <a:bodyPr wrap="square" lIns="0" tIns="0" rIns="0" bIns="0" rtlCol="0" anchor="ctr"/>
+          <a:lstStyle/>
+          <a:p>
+            <a:pPr indent="0" marL="0">
+              <a:buNone/>
+            </a:pPr>
+            <a:r>
+              <a:rPr lang="en-US" sz="1500" b="1" dirty="0">
+                <a:solidFill>
+                  <a:srgbClr val="F2B944"/>
                 </a:solidFill>
                 <a:latin typeface="Arial" pitchFamily="34" charset="0"/>
                 <a:ea typeface="Arial" pitchFamily="34" charset="-122"/>
                 <a:cs typeface="Arial" pitchFamily="34" charset="-120"/>
               </a:rPr>
-              <a:t>12</a:t>
-            </a:r>
-            <a:endParaRPr lang="en-US" sz="6000" dirty="0"/>
-          </a:p>
-        </p:txBody>
-      </p:sp>
-      <p:sp>
-        <p:nvSpPr>
-          <p:cNvPr id="12" name="Text 10"/>
-          <p:cNvSpPr txBox="1"/>
-          <p:nvPr/>
-        </p:nvSpPr>
-        <p:spPr>
-          <a:xfrm>
-            <a:off x="6306160" y="3319272"/>
-            <a:ext cx="2412416" cy="457200"/>
-          </a:xfrm>
-          <a:prstGeom prst="rect">
-            <a:avLst/>
-          </a:prstGeom>
-          <a:noFill/>
-          <a:ln/>
-        </p:spPr>
-        <p:txBody>
-          <a:bodyPr wrap="square" lIns="0" tIns="0" rIns="0" bIns="0" rtlCol="0" anchor="ctr"/>
-          <a:lstStyle/>
-          <a:p>
-            <a:pPr algn="ctr" indent="0" marL="0">
-              <a:buNone/>
-            </a:pPr>
-            <a:r>
-              <a:rPr lang="en-US" sz="1200" dirty="0">
+              <a:t>Contrôles montant &amp; devise</a:t>
+            </a:r>
+            <a:endParaRPr lang="en-US" sz="1500" dirty="0"/>
+          </a:p>
+        </p:txBody>
+      </p:sp>
+      <p:sp>
+        <p:nvSpPr>
+          <p:cNvPr id="19" name="Text 14"/>
+          <p:cNvSpPr txBox="1"/>
+          <p:nvPr/>
+        </p:nvSpPr>
+        <p:spPr>
+          <a:xfrm>
+            <a:off x="1572768" y="4462272"/>
+            <a:ext cx="4224528" cy="822960"/>
+          </a:xfrm>
+          <a:prstGeom prst="rect">
+            <a:avLst/>
+          </a:prstGeom>
+          <a:noFill/>
+          <a:ln/>
+        </p:spPr>
+        <p:txBody>
+          <a:bodyPr wrap="square" lIns="0" tIns="0" rIns="0" bIns="0" rtlCol="0" anchor="ctr"/>
+          <a:lstStyle/>
+          <a:p>
+            <a:pPr indent="0" marL="0">
+              <a:lnSpc>
+                <a:spcPct val="106000"/>
+              </a:lnSpc>
+              <a:buNone/>
+            </a:pPr>
+            <a:r>
+              <a:rPr lang="en-US" sz="1180" dirty="0">
                 <a:solidFill>
                   <a:srgbClr val="9BA79B"/>
                 </a:solidFill>
@@ -9111,26 +10354,26 @@
                 <a:ea typeface="Calibri" pitchFamily="34" charset="-122"/>
                 <a:cs typeface="Calibri" pitchFamily="34" charset="-120"/>
               </a:rPr>
-              <a:t>régions du monde</a:t>
-            </a:r>
-            <a:endParaRPr lang="en-US" sz="1200" dirty="0"/>
-          </a:p>
-        </p:txBody>
-      </p:sp>
-      <p:sp>
-        <p:nvSpPr>
-          <p:cNvPr id="13" name="Shape 11"/>
+              <a:t>Un code ne passe que si le montant, la devise et la fenêtre correspondent à la commande.</a:t>
+            </a:r>
+            <a:endParaRPr lang="en-US" sz="1180" dirty="0"/>
+          </a:p>
+        </p:txBody>
+      </p:sp>
+      <p:sp>
+        <p:nvSpPr>
+          <p:cNvPr id="20" name="Shape 15"/>
           <p:cNvSpPr/>
           <p:nvPr/>
         </p:nvSpPr>
         <p:spPr>
           <a:xfrm>
-            <a:off x="9066047" y="2148840"/>
-            <a:ext cx="2558720" cy="1737360"/>
+            <a:off x="6144768" y="3913632"/>
+            <a:ext cx="5349240" cy="1463040"/>
           </a:xfrm>
           <a:prstGeom prst="roundRect">
             <a:avLst>
-              <a:gd name="adj" fmla="val 5789"/>
+              <a:gd name="adj" fmla="val 6875"/>
             </a:avLst>
           </a:prstGeom>
           <a:solidFill>
@@ -9153,69 +10396,123 @@
       </p:sp>
       <p:sp>
         <p:nvSpPr>
-          <p:cNvPr id="14" name="Text 12"/>
-          <p:cNvSpPr txBox="1"/>
-          <p:nvPr/>
-        </p:nvSpPr>
-        <p:spPr>
-          <a:xfrm>
-            <a:off x="9157487" y="2377440"/>
-            <a:ext cx="2375840" cy="868680"/>
-          </a:xfrm>
-          <a:prstGeom prst="rect">
-            <a:avLst/>
-          </a:prstGeom>
-          <a:noFill/>
-          <a:ln/>
-        </p:spPr>
-        <p:txBody>
-          <a:bodyPr wrap="square" lIns="0" tIns="0" rIns="0" bIns="0" rtlCol="0" anchor="ctr"/>
-          <a:lstStyle/>
-          <a:p>
-            <a:pPr algn="ctr" indent="0" marL="0">
-              <a:buNone/>
-            </a:pPr>
-            <a:r>
-              <a:rPr lang="en-US" sz="6000" b="1" dirty="0">
-                <a:solidFill>
-                  <a:srgbClr val="E8A11F"/>
+          <p:cNvPr id="21" name="Shape 16"/>
+          <p:cNvSpPr/>
+          <p:nvPr/>
+        </p:nvSpPr>
+        <p:spPr>
+          <a:xfrm>
+            <a:off x="6400800" y="4187952"/>
+            <a:ext cx="548640" cy="548640"/>
+          </a:xfrm>
+          <a:prstGeom prst="roundRect">
+            <a:avLst>
+              <a:gd name="adj" fmla="val 16667"/>
+            </a:avLst>
+          </a:prstGeom>
+          <a:solidFill>
+            <a:srgbClr val="17392E"/>
+          </a:solidFill>
+          <a:ln w="12700">
+            <a:solidFill>
+              <a:srgbClr val="E8A11F"/>
+            </a:solidFill>
+            <a:prstDash val="solid"/>
+          </a:ln>
+        </p:spPr>
+      </p:sp>
+      <p:pic>
+        <p:nvPicPr>
+          <p:cNvPr id="22" name="Image 3" descr="preencoded.png">    </p:cNvPr>
+          <p:cNvPicPr>
+            <a:picLocks noChangeAspect="1"/>
+          </p:cNvPicPr>
+          <p:nvPr/>
+        </p:nvPicPr>
+        <p:blipFill>
+          <a:blip r:embed="rId4"/>
+          <a:stretch>
+            <a:fillRect/>
+          </a:stretch>
+        </p:blipFill>
+        <p:spPr>
+          <a:xfrm>
+            <a:off x="6510528" y="4297680"/>
+            <a:ext cx="329184" cy="329184"/>
+          </a:xfrm>
+          <a:prstGeom prst="rect">
+            <a:avLst/>
+          </a:prstGeom>
+        </p:spPr>
+      </p:pic>
+      <p:sp>
+        <p:nvSpPr>
+          <p:cNvPr id="23" name="Text 17"/>
+          <p:cNvSpPr txBox="1"/>
+          <p:nvPr/>
+        </p:nvSpPr>
+        <p:spPr>
+          <a:xfrm>
+            <a:off x="7150608" y="4078224"/>
+            <a:ext cx="4206240" cy="365760"/>
+          </a:xfrm>
+          <a:prstGeom prst="rect">
+            <a:avLst/>
+          </a:prstGeom>
+          <a:noFill/>
+          <a:ln/>
+        </p:spPr>
+        <p:txBody>
+          <a:bodyPr wrap="square" lIns="0" tIns="0" rIns="0" bIns="0" rtlCol="0" anchor="ctr"/>
+          <a:lstStyle/>
+          <a:p>
+            <a:pPr indent="0" marL="0">
+              <a:buNone/>
+            </a:pPr>
+            <a:r>
+              <a:rPr lang="en-US" sz="1500" b="1" dirty="0">
+                <a:solidFill>
+                  <a:srgbClr val="F2B944"/>
                 </a:solidFill>
                 <a:latin typeface="Arial" pitchFamily="34" charset="0"/>
                 <a:ea typeface="Arial" pitchFamily="34" charset="-122"/>
                 <a:cs typeface="Arial" pitchFamily="34" charset="-120"/>
               </a:rPr>
-              <a:t>111</a:t>
-            </a:r>
-            <a:endParaRPr lang="en-US" sz="6000" dirty="0"/>
-          </a:p>
-        </p:txBody>
-      </p:sp>
-      <p:sp>
-        <p:nvSpPr>
-          <p:cNvPr id="15" name="Text 13"/>
-          <p:cNvSpPr txBox="1"/>
-          <p:nvPr/>
-        </p:nvSpPr>
-        <p:spPr>
-          <a:xfrm>
-            <a:off x="9139199" y="3319272"/>
-            <a:ext cx="2412416" cy="457200"/>
-          </a:xfrm>
-          <a:prstGeom prst="rect">
-            <a:avLst/>
-          </a:prstGeom>
-          <a:noFill/>
-          <a:ln/>
-        </p:spPr>
-        <p:txBody>
-          <a:bodyPr wrap="square" lIns="0" tIns="0" rIns="0" bIns="0" rtlCol="0" anchor="ctr"/>
-          <a:lstStyle/>
-          <a:p>
-            <a:pPr algn="ctr" indent="0" marL="0">
-              <a:buNone/>
-            </a:pPr>
-            <a:r>
-              <a:rPr lang="en-US" sz="1200" dirty="0">
+              <a:t>Trois niveaux de confiance honnêtes</a:t>
+            </a:r>
+            <a:endParaRPr lang="en-US" sz="1500" dirty="0"/>
+          </a:p>
+        </p:txBody>
+      </p:sp>
+      <p:sp>
+        <p:nvSpPr>
+          <p:cNvPr id="24" name="Text 18"/>
+          <p:cNvSpPr txBox="1"/>
+          <p:nvPr/>
+        </p:nvSpPr>
+        <p:spPr>
+          <a:xfrm>
+            <a:off x="7150608" y="4462272"/>
+            <a:ext cx="4224528" cy="822960"/>
+          </a:xfrm>
+          <a:prstGeom prst="rect">
+            <a:avLst/>
+          </a:prstGeom>
+          <a:noFill/>
+          <a:ln/>
+        </p:spPr>
+        <p:txBody>
+          <a:bodyPr wrap="square" lIns="0" tIns="0" rIns="0" bIns="0" rtlCol="0" anchor="ctr"/>
+          <a:lstStyle/>
+          <a:p>
+            <a:pPr indent="0" marL="0">
+              <a:lnSpc>
+                <a:spcPct val="106000"/>
+              </a:lnSpc>
+              <a:buNone/>
+            </a:pPr>
+            <a:r>
+              <a:rPr lang="en-US" sz="1180" dirty="0">
                 <a:solidFill>
                   <a:srgbClr val="9BA79B"/>
                 </a:solidFill>
@@ -9223,142 +10520,15 @@
                 <a:ea typeface="Calibri" pitchFamily="34" charset="-122"/>
                 <a:cs typeface="Calibri" pitchFamily="34" charset="-120"/>
               </a:rPr>
-              <a:t>familles de modèles</a:t>
-            </a:r>
-            <a:endParaRPr lang="en-US" sz="1200" dirty="0"/>
-          </a:p>
-        </p:txBody>
-      </p:sp>
-      <p:sp>
-        <p:nvSpPr>
-          <p:cNvPr id="16" name="Shape 14"/>
-          <p:cNvSpPr/>
-          <p:nvPr/>
-        </p:nvSpPr>
-        <p:spPr>
-          <a:xfrm>
-            <a:off x="566928" y="4160520"/>
-            <a:ext cx="11057839" cy="1600200"/>
-          </a:xfrm>
-          <a:prstGeom prst="roundRect">
-            <a:avLst>
-              <a:gd name="adj" fmla="val 6286"/>
-            </a:avLst>
-          </a:prstGeom>
-          <a:solidFill>
-            <a:srgbClr val="0C231C"/>
-          </a:solidFill>
-          <a:ln w="12700">
-            <a:solidFill>
-              <a:srgbClr val="2A4034"/>
-            </a:solidFill>
-            <a:prstDash val="solid"/>
-          </a:ln>
-          <a:effectLst>
-            <a:outerShdw sx="100000" sy="100000" kx="0" ky="0" algn="bl" rotWithShape="0" blurRad="127000" dist="50800" dir="5400000">
-              <a:srgbClr val="000000">
-                <a:alpha val="35000"/>
-              </a:srgbClr>
-            </a:outerShdw>
-          </a:effectLst>
-        </p:spPr>
-      </p:sp>
-      <p:sp>
-        <p:nvSpPr>
-          <p:cNvPr id="17" name="Text 15"/>
-          <p:cNvSpPr txBox="1"/>
-          <p:nvPr/>
-        </p:nvSpPr>
-        <p:spPr>
-          <a:xfrm>
-            <a:off x="886968" y="4370832"/>
-            <a:ext cx="10417759" cy="1188720"/>
-          </a:xfrm>
-          <a:prstGeom prst="rect">
-            <a:avLst/>
-          </a:prstGeom>
-          <a:noFill/>
-          <a:ln/>
-        </p:spPr>
-        <p:txBody>
-          <a:bodyPr wrap="square" lIns="0" tIns="0" rIns="0" bIns="0" rtlCol="0" anchor="ctr"/>
-          <a:lstStyle/>
-          <a:p>
-            <a:pPr indent="0" marL="0">
-              <a:lnSpc>
-                <a:spcPct val="112000"/>
-              </a:lnSpc>
-              <a:buNone/>
-            </a:pPr>
-            <a:r>
-              <a:rPr lang="en-US" sz="1350" b="1" dirty="0">
-                <a:solidFill>
-                  <a:srgbClr val="F2B944"/>
-                </a:solidFill>
-                <a:latin typeface="Calibri" pitchFamily="34" charset="0"/>
-                <a:ea typeface="Calibri" pitchFamily="34" charset="-122"/>
-                <a:cs typeface="Calibri" pitchFamily="34" charset="-120"/>
-              </a:rPr>
-              <a:t>6 packs LIVE ajustés à la main aujourd’hui</a:t>
-            </a:r>
-            <a:pPr indent="0" marL="0">
-              <a:lnSpc>
-                <a:spcPct val="112000"/>
-              </a:lnSpc>
-              <a:buNone/>
-            </a:pPr>
-            <a:r>
-              <a:rPr lang="en-US" sz="1350" dirty="0">
-                <a:solidFill>
-                  <a:srgbClr val="E9E4D5"/>
-                </a:solidFill>
-                <a:latin typeface="Calibri" pitchFamily="34" charset="0"/>
-                <a:ea typeface="Calibri" pitchFamily="34" charset="-122"/>
-                <a:cs typeface="Calibri" pitchFamily="34" charset="-120"/>
-              </a:rPr>
-              <a:t> et en croissance — vérification automatique, sans intervention. Tout autre opérateur est </a:t>
-            </a:r>
-            <a:pPr indent="0" marL="0">
-              <a:lnSpc>
-                <a:spcPct val="112000"/>
-              </a:lnSpc>
-              <a:buNone/>
-            </a:pPr>
-            <a:r>
-              <a:rPr lang="en-US" sz="1350" b="1" dirty="0">
-                <a:solidFill>
-                  <a:srgbClr val="F2B944"/>
-                </a:solidFill>
-                <a:latin typeface="Calibri" pitchFamily="34" charset="0"/>
-                <a:ea typeface="Calibri" pitchFamily="34" charset="-122"/>
-                <a:cs typeface="Calibri" pitchFamily="34" charset="-120"/>
-              </a:rPr>
-              <a:t>prêt à l’emploi</a:t>
-            </a:r>
-            <a:pPr indent="0" marL="0">
-              <a:lnSpc>
-                <a:spcPct val="112000"/>
-              </a:lnSpc>
-              <a:buNone/>
-            </a:pPr>
-            <a:r>
-              <a:rPr lang="en-US" sz="1350" dirty="0">
-                <a:solidFill>
-                  <a:srgbClr val="E9E4D5"/>
-                </a:solidFill>
-                <a:latin typeface="Calibri" pitchFamily="34" charset="0"/>
-                <a:ea typeface="Calibri" pitchFamily="34" charset="-122"/>
-                <a:cs typeface="Calibri" pitchFamily="34" charset="-120"/>
-              </a:rPr>
-              <a:t> : un analyseur générique multilingue structure déjà son SMS à un niveau de confiance moindre jusqu’à la publication d’un pack précis. Rien n’est présenté comme pleinement pris en charge tant que ça ne l’est pas — et aucune API opérateur n’est jamais requise.</a:t>
-            </a:r>
-            <a:endParaRPr lang="en-US" sz="1350" dirty="0"/>
-          </a:p>
-        </p:txBody>
-      </p:sp>
-      <p:sp>
-        <p:nvSpPr>
-          <p:cNvPr id="18" name="Text 16"/>
+              <a:t>Chaque reçu indique la force de la preuve : auto-déclaré, ancré à l’appareil ou confirmé par l’opérateur.</a:t>
+            </a:r>
+            <a:endParaRPr lang="en-US" sz="1180" dirty="0"/>
+          </a:p>
+        </p:txBody>
+      </p:sp>
+      <p:sp>
+        <p:nvSpPr>
+          <p:cNvPr id="25" name="Text 19"/>
           <p:cNvSpPr txBox="1"/>
           <p:nvPr/>
         </p:nvSpPr>
@@ -9423,7 +10593,7 @@
     <p:bg>
       <p:bgPr>
         <a:solidFill>
-          <a:srgbClr val="0C231C"/>
+          <a:srgbClr val="F5EFDF"/>
         </a:solidFill>
       </p:bgPr>
     </p:bg>
@@ -9450,7 +10620,7 @@
         <p:spPr>
           <a:xfrm>
             <a:off x="566928" y="640080"/>
-            <a:ext cx="8229600" cy="274320"/>
+            <a:ext cx="10058400" cy="274320"/>
           </a:xfrm>
           <a:prstGeom prst="rect">
             <a:avLst/>
@@ -9466,7 +10636,7 @@
               <a:buNone/>
             </a:pPr>
             <a:r>
-              <a:rPr lang="en-US" sz="1150" b="1" spc="300" kern="0" dirty="0">
+              <a:rPr lang="en-US" sz="1150" b="1" spc="250" kern="0" dirty="0">
                 <a:solidFill>
                   <a:srgbClr val="E8A11F"/>
                 </a:solidFill>
@@ -9474,7 +10644,7 @@
                 <a:ea typeface="Courier New" pitchFamily="34" charset="-122"/>
                 <a:cs typeface="Courier New" pitchFamily="34" charset="-120"/>
               </a:rPr>
-              <a:t>LE MODÈLE</a:t>
+              <a:t>CE QUE KODA EST — ET N’EST PAS</a:t>
             </a:r>
             <a:endParaRPr lang="en-US" sz="1150" dirty="0"/>
           </a:p>
@@ -9489,7 +10659,7 @@
         <p:spPr>
           <a:xfrm>
             <a:off x="566928" y="960120"/>
-            <a:ext cx="11064240" cy="640080"/>
+            <a:ext cx="11155680" cy="822960"/>
           </a:xfrm>
           <a:prstGeom prst="rect">
             <a:avLst/>
@@ -9505,17 +10675,17 @@
               <a:buNone/>
             </a:pPr>
             <a:r>
-              <a:rPr lang="en-US" sz="2900" b="1" dirty="0">
-                <a:solidFill>
-                  <a:srgbClr val="E9E4D5"/>
+              <a:rPr lang="en-US" sz="2800" b="1" dirty="0">
+                <a:solidFill>
+                  <a:srgbClr val="081813"/>
                 </a:solidFill>
                 <a:latin typeface="Arial" pitchFamily="34" charset="0"/>
                 <a:ea typeface="Arial" pitchFamily="34" charset="-122"/>
                 <a:cs typeface="Arial" pitchFamily="34" charset="-120"/>
               </a:rPr>
-              <a:t>Gratuit jusqu’à ce que votre commerçant soit vraiment payé.</a:t>
-            </a:r>
-            <a:endParaRPr lang="en-US" sz="2900" dirty="0"/>
+              <a:t>Nous vérifions vos paiements. Nous ne touchons jamais à votre argent.</a:t>
+            </a:r>
+            <a:endParaRPr lang="en-US" sz="2800" dirty="0"/>
           </a:p>
         </p:txBody>
       </p:sp>
@@ -9527,990 +10697,120 @@
         </p:nvSpPr>
         <p:spPr>
           <a:xfrm>
-            <a:off x="566928" y="2148840"/>
-            <a:ext cx="1660093" cy="2148840"/>
+            <a:off x="566928" y="2103120"/>
+            <a:ext cx="5349240" cy="2057400"/>
           </a:xfrm>
           <a:prstGeom prst="roundRect">
             <a:avLst>
-              <a:gd name="adj" fmla="val 6059"/>
+              <a:gd name="adj" fmla="val 4444"/>
             </a:avLst>
           </a:prstGeom>
           <a:solidFill>
-            <a:srgbClr val="123027"/>
+            <a:srgbClr val="FFFFFF"/>
           </a:solidFill>
           <a:ln w="12700">
             <a:solidFill>
-              <a:srgbClr val="2A4034"/>
+              <a:srgbClr val="E4DCC6"/>
             </a:solidFill>
             <a:prstDash val="solid"/>
           </a:ln>
-          <a:effectLst>
-            <a:outerShdw sx="100000" sy="100000" kx="0" ky="0" algn="bl" rotWithShape="0" blurRad="127000" dist="50800" dir="5400000">
-              <a:srgbClr val="000000">
-                <a:alpha val="35000"/>
-              </a:srgbClr>
-            </a:outerShdw>
-          </a:effectLst>
-        </p:spPr>
-      </p:sp>
-      <p:sp>
-        <p:nvSpPr>
-          <p:cNvPr id="5" name="Text 3"/>
-          <p:cNvSpPr txBox="1"/>
-          <p:nvPr/>
-        </p:nvSpPr>
-        <p:spPr>
-          <a:xfrm>
-            <a:off x="612648" y="2368296"/>
-            <a:ext cx="1568653" cy="365760"/>
-          </a:xfrm>
-          <a:prstGeom prst="rect">
-            <a:avLst/>
-          </a:prstGeom>
-          <a:noFill/>
-          <a:ln/>
-        </p:spPr>
-        <p:txBody>
-          <a:bodyPr wrap="square" lIns="0" tIns="0" rIns="0" bIns="0" rtlCol="0" anchor="ctr"/>
-          <a:lstStyle/>
-          <a:p>
-            <a:pPr algn="ctr" indent="0" marL="0">
-              <a:buNone/>
-            </a:pPr>
-            <a:r>
-              <a:rPr lang="en-US" sz="1350" b="1" dirty="0">
-                <a:solidFill>
-                  <a:srgbClr val="E9E4D5"/>
+        </p:spPr>
+      </p:sp>
+      <p:sp>
+        <p:nvSpPr>
+          <p:cNvPr id="5" name="Shape 3"/>
+          <p:cNvSpPr/>
+          <p:nvPr/>
+        </p:nvSpPr>
+        <p:spPr>
+          <a:xfrm>
+            <a:off x="841248" y="2350008"/>
+            <a:ext cx="548640" cy="548640"/>
+          </a:xfrm>
+          <a:prstGeom prst="roundRect">
+            <a:avLst>
+              <a:gd name="adj" fmla="val 16667"/>
+            </a:avLst>
+          </a:prstGeom>
+          <a:solidFill>
+            <a:srgbClr val="081813"/>
+          </a:solidFill>
+          <a:ln/>
+        </p:spPr>
+      </p:sp>
+      <p:pic>
+        <p:nvPicPr>
+          <p:cNvPr id="6" name="Image 0" descr="preencoded.png">    </p:cNvPr>
+          <p:cNvPicPr>
+            <a:picLocks noChangeAspect="1"/>
+          </p:cNvPicPr>
+          <p:nvPr/>
+        </p:nvPicPr>
+        <p:blipFill>
+          <a:blip r:embed="rId1"/>
+          <a:stretch>
+            <a:fillRect/>
+          </a:stretch>
+        </p:blipFill>
+        <p:spPr>
+          <a:xfrm>
+            <a:off x="950976" y="2459736"/>
+            <a:ext cx="329184" cy="329184"/>
+          </a:xfrm>
+          <a:prstGeom prst="rect">
+            <a:avLst/>
+          </a:prstGeom>
+        </p:spPr>
+      </p:pic>
+      <p:sp>
+        <p:nvSpPr>
+          <p:cNvPr id="7" name="Text 4"/>
+          <p:cNvSpPr txBox="1"/>
+          <p:nvPr/>
+        </p:nvSpPr>
+        <p:spPr>
+          <a:xfrm>
+            <a:off x="1572768" y="2404872"/>
+            <a:ext cx="4114800" cy="365760"/>
+          </a:xfrm>
+          <a:prstGeom prst="rect">
+            <a:avLst/>
+          </a:prstGeom>
+          <a:noFill/>
+          <a:ln/>
+        </p:spPr>
+        <p:txBody>
+          <a:bodyPr wrap="square" lIns="0" tIns="0" rIns="0" bIns="0" rtlCol="0" anchor="ctr"/>
+          <a:lstStyle/>
+          <a:p>
+            <a:pPr indent="0" marL="0">
+              <a:buNone/>
+            </a:pPr>
+            <a:r>
+              <a:rPr lang="en-US" sz="1700" b="1" dirty="0">
+                <a:solidFill>
+                  <a:srgbClr val="081813"/>
                 </a:solidFill>
                 <a:latin typeface="Arial" pitchFamily="34" charset="0"/>
                 <a:ea typeface="Arial" pitchFamily="34" charset="-122"/>
                 <a:cs typeface="Arial" pitchFamily="34" charset="-120"/>
               </a:rPr>
-              <a:t>Marché</a:t>
-            </a:r>
-            <a:endParaRPr lang="en-US" sz="1350" dirty="0"/>
-          </a:p>
-        </p:txBody>
-      </p:sp>
-      <p:sp>
-        <p:nvSpPr>
-          <p:cNvPr id="6" name="Text 4"/>
-          <p:cNvSpPr txBox="1"/>
-          <p:nvPr/>
-        </p:nvSpPr>
-        <p:spPr>
-          <a:xfrm>
-            <a:off x="603504" y="2834640"/>
-            <a:ext cx="1586941" cy="640080"/>
-          </a:xfrm>
-          <a:prstGeom prst="rect">
-            <a:avLst/>
-          </a:prstGeom>
-          <a:noFill/>
-          <a:ln/>
-        </p:spPr>
-        <p:txBody>
-          <a:bodyPr wrap="square" lIns="0" tIns="0" rIns="0" bIns="0" rtlCol="0" anchor="ctr"/>
-          <a:lstStyle/>
-          <a:p>
-            <a:pPr algn="ctr" indent="0" marL="0">
-              <a:buNone/>
-            </a:pPr>
-            <a:r>
-              <a:rPr lang="en-US" sz="2700" b="1" dirty="0">
-                <a:solidFill>
-                  <a:srgbClr val="E8A11F"/>
-                </a:solidFill>
-                <a:latin typeface="Arial" pitchFamily="34" charset="0"/>
-                <a:ea typeface="Arial" pitchFamily="34" charset="-122"/>
-                <a:cs typeface="Arial" pitchFamily="34" charset="-120"/>
-              </a:rPr>
-              <a:t>$0</a:t>
-            </a:r>
-            <a:endParaRPr lang="en-US" sz="2700" dirty="0"/>
-          </a:p>
-        </p:txBody>
-      </p:sp>
-      <p:sp>
-        <p:nvSpPr>
-          <p:cNvPr id="7" name="Text 5"/>
-          <p:cNvSpPr txBox="1"/>
-          <p:nvPr/>
-        </p:nvSpPr>
-        <p:spPr>
-          <a:xfrm>
-            <a:off x="621792" y="3566160"/>
-            <a:ext cx="1550365" cy="594360"/>
-          </a:xfrm>
-          <a:prstGeom prst="rect">
-            <a:avLst/>
-          </a:prstGeom>
-          <a:noFill/>
-          <a:ln/>
-        </p:spPr>
-        <p:txBody>
-          <a:bodyPr wrap="square" lIns="0" tIns="0" rIns="0" bIns="0" rtlCol="0" anchor="ctr"/>
-          <a:lstStyle/>
-          <a:p>
-            <a:pPr algn="ctr" indent="0" marL="0">
-              <a:lnSpc>
-                <a:spcPct val="105000"/>
-              </a:lnSpc>
-              <a:buNone/>
-            </a:pPr>
-            <a:r>
-              <a:rPr lang="en-US" sz="1000" dirty="0">
-                <a:solidFill>
-                  <a:srgbClr val="9BA79B"/>
-                </a:solidFill>
-                <a:latin typeface="Calibri" pitchFamily="34" charset="0"/>
-                <a:ea typeface="Calibri" pitchFamily="34" charset="-122"/>
-                <a:cs typeface="Calibri" pitchFamily="34" charset="-120"/>
-              </a:rPr>
-              <a:t>10 / mois · à vie</a:t>
-            </a:r>
-            <a:endParaRPr lang="en-US" sz="1000" dirty="0"/>
-          </a:p>
-        </p:txBody>
-      </p:sp>
-      <p:sp>
-        <p:nvSpPr>
-          <p:cNvPr id="8" name="Shape 6"/>
-          <p:cNvSpPr/>
-          <p:nvPr/>
-        </p:nvSpPr>
-        <p:spPr>
-          <a:xfrm>
-            <a:off x="2446477" y="2148840"/>
-            <a:ext cx="1660093" cy="2148840"/>
-          </a:xfrm>
-          <a:prstGeom prst="roundRect">
-            <a:avLst>
-              <a:gd name="adj" fmla="val 6059"/>
-            </a:avLst>
-          </a:prstGeom>
-          <a:solidFill>
-            <a:srgbClr val="123027"/>
-          </a:solidFill>
-          <a:ln w="12700">
-            <a:solidFill>
-              <a:srgbClr val="2A4034"/>
-            </a:solidFill>
-            <a:prstDash val="solid"/>
-          </a:ln>
-          <a:effectLst>
-            <a:outerShdw sx="100000" sy="100000" kx="0" ky="0" algn="bl" rotWithShape="0" blurRad="127000" dist="50800" dir="5400000">
-              <a:srgbClr val="000000">
-                <a:alpha val="35000"/>
-              </a:srgbClr>
-            </a:outerShdw>
-          </a:effectLst>
-        </p:spPr>
-      </p:sp>
-      <p:sp>
-        <p:nvSpPr>
-          <p:cNvPr id="9" name="Text 7"/>
-          <p:cNvSpPr txBox="1"/>
-          <p:nvPr/>
-        </p:nvSpPr>
-        <p:spPr>
-          <a:xfrm>
-            <a:off x="2492197" y="2368296"/>
-            <a:ext cx="1568653" cy="365760"/>
-          </a:xfrm>
-          <a:prstGeom prst="rect">
-            <a:avLst/>
-          </a:prstGeom>
-          <a:noFill/>
-          <a:ln/>
-        </p:spPr>
-        <p:txBody>
-          <a:bodyPr wrap="square" lIns="0" tIns="0" rIns="0" bIns="0" rtlCol="0" anchor="ctr"/>
-          <a:lstStyle/>
-          <a:p>
-            <a:pPr algn="ctr" indent="0" marL="0">
-              <a:buNone/>
-            </a:pPr>
-            <a:r>
-              <a:rPr lang="en-US" sz="1350" b="1" dirty="0">
-                <a:solidFill>
-                  <a:srgbClr val="E9E4D5"/>
-                </a:solidFill>
-                <a:latin typeface="Arial" pitchFamily="34" charset="0"/>
-                <a:ea typeface="Arial" pitchFamily="34" charset="-122"/>
-                <a:cs typeface="Arial" pitchFamily="34" charset="-120"/>
-              </a:rPr>
-              <a:t>Boutique</a:t>
-            </a:r>
-            <a:endParaRPr lang="en-US" sz="1350" dirty="0"/>
-          </a:p>
-        </p:txBody>
-      </p:sp>
-      <p:sp>
-        <p:nvSpPr>
-          <p:cNvPr id="10" name="Text 8"/>
-          <p:cNvSpPr txBox="1"/>
-          <p:nvPr/>
-        </p:nvSpPr>
-        <p:spPr>
-          <a:xfrm>
-            <a:off x="2483053" y="2834640"/>
-            <a:ext cx="1586941" cy="640080"/>
-          </a:xfrm>
-          <a:prstGeom prst="rect">
-            <a:avLst/>
-          </a:prstGeom>
-          <a:noFill/>
-          <a:ln/>
-        </p:spPr>
-        <p:txBody>
-          <a:bodyPr wrap="square" lIns="0" tIns="0" rIns="0" bIns="0" rtlCol="0" anchor="ctr"/>
-          <a:lstStyle/>
-          <a:p>
-            <a:pPr algn="ctr" indent="0" marL="0">
-              <a:buNone/>
-            </a:pPr>
-            <a:r>
-              <a:rPr lang="en-US" sz="2700" b="1" dirty="0">
-                <a:solidFill>
-                  <a:srgbClr val="E8A11F"/>
-                </a:solidFill>
-                <a:latin typeface="Arial" pitchFamily="34" charset="0"/>
-                <a:ea typeface="Arial" pitchFamily="34" charset="-122"/>
-                <a:cs typeface="Arial" pitchFamily="34" charset="-120"/>
-              </a:rPr>
-              <a:t>$5</a:t>
-            </a:r>
-            <a:endParaRPr lang="en-US" sz="2700" dirty="0"/>
-          </a:p>
-        </p:txBody>
-      </p:sp>
-      <p:sp>
-        <p:nvSpPr>
-          <p:cNvPr id="11" name="Text 9"/>
-          <p:cNvSpPr txBox="1"/>
-          <p:nvPr/>
-        </p:nvSpPr>
-        <p:spPr>
-          <a:xfrm>
-            <a:off x="2501341" y="3566160"/>
-            <a:ext cx="1550365" cy="594360"/>
-          </a:xfrm>
-          <a:prstGeom prst="rect">
-            <a:avLst/>
-          </a:prstGeom>
-          <a:noFill/>
-          <a:ln/>
-        </p:spPr>
-        <p:txBody>
-          <a:bodyPr wrap="square" lIns="0" tIns="0" rIns="0" bIns="0" rtlCol="0" anchor="ctr"/>
-          <a:lstStyle/>
-          <a:p>
-            <a:pPr algn="ctr" indent="0" marL="0">
-              <a:lnSpc>
-                <a:spcPct val="105000"/>
-              </a:lnSpc>
-              <a:buNone/>
-            </a:pPr>
-            <a:r>
-              <a:rPr lang="en-US" sz="1000" dirty="0">
-                <a:solidFill>
-                  <a:srgbClr val="9BA79B"/>
-                </a:solidFill>
-                <a:latin typeface="Calibri" pitchFamily="34" charset="0"/>
-                <a:ea typeface="Calibri" pitchFamily="34" charset="-122"/>
-                <a:cs typeface="Calibri" pitchFamily="34" charset="-120"/>
-              </a:rPr>
-              <a:t>190 vérifs / mois</a:t>
-            </a:r>
-            <a:endParaRPr lang="en-US" sz="1000" dirty="0"/>
-          </a:p>
-        </p:txBody>
-      </p:sp>
-      <p:sp>
-        <p:nvSpPr>
-          <p:cNvPr id="12" name="Shape 10"/>
-          <p:cNvSpPr/>
-          <p:nvPr/>
-        </p:nvSpPr>
-        <p:spPr>
-          <a:xfrm>
-            <a:off x="4326026" y="2148840"/>
-            <a:ext cx="1660093" cy="2148840"/>
-          </a:xfrm>
-          <a:prstGeom prst="roundRect">
-            <a:avLst>
-              <a:gd name="adj" fmla="val 6059"/>
-            </a:avLst>
-          </a:prstGeom>
-          <a:solidFill>
-            <a:srgbClr val="17392E"/>
-          </a:solidFill>
-          <a:ln w="12700">
-            <a:solidFill>
-              <a:srgbClr val="2A4034"/>
-            </a:solidFill>
-            <a:prstDash val="solid"/>
-          </a:ln>
-          <a:effectLst>
-            <a:outerShdw sx="100000" sy="100000" kx="0" ky="0" algn="bl" rotWithShape="0" blurRad="127000" dist="50800" dir="5400000">
-              <a:srgbClr val="000000">
-                <a:alpha val="35000"/>
-              </a:srgbClr>
-            </a:outerShdw>
-          </a:effectLst>
-        </p:spPr>
-      </p:sp>
-      <p:sp>
-        <p:nvSpPr>
-          <p:cNvPr id="13" name="Shape 11"/>
-          <p:cNvSpPr/>
-          <p:nvPr/>
-        </p:nvSpPr>
-        <p:spPr>
-          <a:xfrm>
-            <a:off x="4326026" y="2148840"/>
-            <a:ext cx="1660093" cy="2148840"/>
-          </a:xfrm>
-          <a:prstGeom prst="roundRect">
-            <a:avLst>
-              <a:gd name="adj" fmla="val 6059"/>
-            </a:avLst>
-          </a:prstGeom>
-          <a:ln w="25400">
-            <a:solidFill>
-              <a:srgbClr val="E8A11F"/>
-            </a:solidFill>
-            <a:prstDash val="solid"/>
-          </a:ln>
-        </p:spPr>
-      </p:sp>
-      <p:sp>
-        <p:nvSpPr>
-          <p:cNvPr id="14" name="Text 12"/>
-          <p:cNvSpPr txBox="1"/>
-          <p:nvPr/>
-        </p:nvSpPr>
-        <p:spPr>
-          <a:xfrm>
-            <a:off x="4371746" y="2368296"/>
-            <a:ext cx="1568653" cy="365760"/>
-          </a:xfrm>
-          <a:prstGeom prst="rect">
-            <a:avLst/>
-          </a:prstGeom>
-          <a:noFill/>
-          <a:ln/>
-        </p:spPr>
-        <p:txBody>
-          <a:bodyPr wrap="square" lIns="0" tIns="0" rIns="0" bIns="0" rtlCol="0" anchor="ctr"/>
-          <a:lstStyle/>
-          <a:p>
-            <a:pPr algn="ctr" indent="0" marL="0">
-              <a:buNone/>
-            </a:pPr>
-            <a:r>
-              <a:rPr lang="en-US" sz="1350" b="1" dirty="0">
-                <a:solidFill>
-                  <a:srgbClr val="E9E4D5"/>
-                </a:solidFill>
-                <a:latin typeface="Arial" pitchFamily="34" charset="0"/>
-                <a:ea typeface="Arial" pitchFamily="34" charset="-122"/>
-                <a:cs typeface="Arial" pitchFamily="34" charset="-120"/>
-              </a:rPr>
-              <a:t>Commerce</a:t>
-            </a:r>
-            <a:endParaRPr lang="en-US" sz="1350" dirty="0"/>
-          </a:p>
-        </p:txBody>
-      </p:sp>
-      <p:sp>
-        <p:nvSpPr>
-          <p:cNvPr id="15" name="Text 13"/>
-          <p:cNvSpPr txBox="1"/>
-          <p:nvPr/>
-        </p:nvSpPr>
-        <p:spPr>
-          <a:xfrm>
-            <a:off x="4362602" y="2834640"/>
-            <a:ext cx="1586941" cy="640080"/>
-          </a:xfrm>
-          <a:prstGeom prst="rect">
-            <a:avLst/>
-          </a:prstGeom>
-          <a:noFill/>
-          <a:ln/>
-        </p:spPr>
-        <p:txBody>
-          <a:bodyPr wrap="square" lIns="0" tIns="0" rIns="0" bIns="0" rtlCol="0" anchor="ctr"/>
-          <a:lstStyle/>
-          <a:p>
-            <a:pPr algn="ctr" indent="0" marL="0">
-              <a:buNone/>
-            </a:pPr>
-            <a:r>
-              <a:rPr lang="en-US" sz="2700" b="1" dirty="0">
-                <a:solidFill>
-                  <a:srgbClr val="E8A11F"/>
-                </a:solidFill>
-                <a:latin typeface="Arial" pitchFamily="34" charset="0"/>
-                <a:ea typeface="Arial" pitchFamily="34" charset="-122"/>
-                <a:cs typeface="Arial" pitchFamily="34" charset="-120"/>
-              </a:rPr>
-              <a:t>$20</a:t>
-            </a:r>
-            <a:endParaRPr lang="en-US" sz="2700" dirty="0"/>
-          </a:p>
-        </p:txBody>
-      </p:sp>
-      <p:sp>
-        <p:nvSpPr>
-          <p:cNvPr id="16" name="Text 14"/>
-          <p:cNvSpPr txBox="1"/>
-          <p:nvPr/>
-        </p:nvSpPr>
-        <p:spPr>
-          <a:xfrm>
-            <a:off x="4380890" y="3566160"/>
-            <a:ext cx="1550365" cy="594360"/>
-          </a:xfrm>
-          <a:prstGeom prst="rect">
-            <a:avLst/>
-          </a:prstGeom>
-          <a:noFill/>
-          <a:ln/>
-        </p:spPr>
-        <p:txBody>
-          <a:bodyPr wrap="square" lIns="0" tIns="0" rIns="0" bIns="0" rtlCol="0" anchor="ctr"/>
-          <a:lstStyle/>
-          <a:p>
-            <a:pPr algn="ctr" indent="0" marL="0">
-              <a:lnSpc>
-                <a:spcPct val="105000"/>
-              </a:lnSpc>
-              <a:buNone/>
-            </a:pPr>
-            <a:r>
-              <a:rPr lang="en-US" sz="1000" dirty="0">
-                <a:solidFill>
-                  <a:srgbClr val="9BA79B"/>
-                </a:solidFill>
-                <a:latin typeface="Calibri" pitchFamily="34" charset="0"/>
-                <a:ea typeface="Calibri" pitchFamily="34" charset="-122"/>
-                <a:cs typeface="Calibri" pitchFamily="34" charset="-120"/>
-              </a:rPr>
-              <a:t>760 vérifs / mois</a:t>
-            </a:r>
-            <a:endParaRPr lang="en-US" sz="1000" dirty="0"/>
-          </a:p>
-        </p:txBody>
-      </p:sp>
-      <p:sp>
-        <p:nvSpPr>
-          <p:cNvPr id="17" name="Shape 15"/>
-          <p:cNvSpPr/>
-          <p:nvPr/>
-        </p:nvSpPr>
-        <p:spPr>
-          <a:xfrm>
-            <a:off x="6205576" y="2148840"/>
-            <a:ext cx="1660093" cy="2148840"/>
-          </a:xfrm>
-          <a:prstGeom prst="roundRect">
-            <a:avLst>
-              <a:gd name="adj" fmla="val 6059"/>
-            </a:avLst>
-          </a:prstGeom>
-          <a:solidFill>
-            <a:srgbClr val="123027"/>
-          </a:solidFill>
-          <a:ln w="12700">
-            <a:solidFill>
-              <a:srgbClr val="2A4034"/>
-            </a:solidFill>
-            <a:prstDash val="solid"/>
-          </a:ln>
-          <a:effectLst>
-            <a:outerShdw sx="100000" sy="100000" kx="0" ky="0" algn="bl" rotWithShape="0" blurRad="127000" dist="50800" dir="5400000">
-              <a:srgbClr val="000000">
-                <a:alpha val="35000"/>
-              </a:srgbClr>
-            </a:outerShdw>
-          </a:effectLst>
-        </p:spPr>
-      </p:sp>
-      <p:sp>
-        <p:nvSpPr>
-          <p:cNvPr id="18" name="Text 16"/>
-          <p:cNvSpPr txBox="1"/>
-          <p:nvPr/>
-        </p:nvSpPr>
-        <p:spPr>
-          <a:xfrm>
-            <a:off x="6251296" y="2368296"/>
-            <a:ext cx="1568653" cy="365760"/>
-          </a:xfrm>
-          <a:prstGeom prst="rect">
-            <a:avLst/>
-          </a:prstGeom>
-          <a:noFill/>
-          <a:ln/>
-        </p:spPr>
-        <p:txBody>
-          <a:bodyPr wrap="square" lIns="0" tIns="0" rIns="0" bIns="0" rtlCol="0" anchor="ctr"/>
-          <a:lstStyle/>
-          <a:p>
-            <a:pPr algn="ctr" indent="0" marL="0">
-              <a:buNone/>
-            </a:pPr>
-            <a:r>
-              <a:rPr lang="en-US" sz="1350" b="1" dirty="0">
-                <a:solidFill>
-                  <a:srgbClr val="E9E4D5"/>
-                </a:solidFill>
-                <a:latin typeface="Arial" pitchFamily="34" charset="0"/>
-                <a:ea typeface="Arial" pitchFamily="34" charset="-122"/>
-                <a:cs typeface="Arial" pitchFamily="34" charset="-120"/>
-              </a:rPr>
-              <a:t>Plateforme</a:t>
-            </a:r>
-            <a:endParaRPr lang="en-US" sz="1350" dirty="0"/>
-          </a:p>
-        </p:txBody>
-      </p:sp>
-      <p:sp>
-        <p:nvSpPr>
-          <p:cNvPr id="19" name="Text 17"/>
-          <p:cNvSpPr txBox="1"/>
-          <p:nvPr/>
-        </p:nvSpPr>
-        <p:spPr>
-          <a:xfrm>
-            <a:off x="6242152" y="2834640"/>
-            <a:ext cx="1586941" cy="640080"/>
-          </a:xfrm>
-          <a:prstGeom prst="rect">
-            <a:avLst/>
-          </a:prstGeom>
-          <a:noFill/>
-          <a:ln/>
-        </p:spPr>
-        <p:txBody>
-          <a:bodyPr wrap="square" lIns="0" tIns="0" rIns="0" bIns="0" rtlCol="0" anchor="ctr"/>
-          <a:lstStyle/>
-          <a:p>
-            <a:pPr algn="ctr" indent="0" marL="0">
-              <a:buNone/>
-            </a:pPr>
-            <a:r>
-              <a:rPr lang="en-US" sz="2700" b="1" dirty="0">
-                <a:solidFill>
-                  <a:srgbClr val="E8A11F"/>
-                </a:solidFill>
-                <a:latin typeface="Arial" pitchFamily="34" charset="0"/>
-                <a:ea typeface="Arial" pitchFamily="34" charset="-122"/>
-                <a:cs typeface="Arial" pitchFamily="34" charset="-120"/>
-              </a:rPr>
-              <a:t>$100</a:t>
-            </a:r>
-            <a:endParaRPr lang="en-US" sz="2700" dirty="0"/>
-          </a:p>
-        </p:txBody>
-      </p:sp>
-      <p:sp>
-        <p:nvSpPr>
-          <p:cNvPr id="20" name="Text 18"/>
-          <p:cNvSpPr txBox="1"/>
-          <p:nvPr/>
-        </p:nvSpPr>
-        <p:spPr>
-          <a:xfrm>
-            <a:off x="6260440" y="3566160"/>
-            <a:ext cx="1550365" cy="594360"/>
-          </a:xfrm>
-          <a:prstGeom prst="rect">
-            <a:avLst/>
-          </a:prstGeom>
-          <a:noFill/>
-          <a:ln/>
-        </p:spPr>
-        <p:txBody>
-          <a:bodyPr wrap="square" lIns="0" tIns="0" rIns="0" bIns="0" rtlCol="0" anchor="ctr"/>
-          <a:lstStyle/>
-          <a:p>
-            <a:pPr algn="ctr" indent="0" marL="0">
-              <a:lnSpc>
-                <a:spcPct val="105000"/>
-              </a:lnSpc>
-              <a:buNone/>
-            </a:pPr>
-            <a:r>
-              <a:rPr lang="en-US" sz="1000" dirty="0">
-                <a:solidFill>
-                  <a:srgbClr val="9BA79B"/>
-                </a:solidFill>
-                <a:latin typeface="Calibri" pitchFamily="34" charset="0"/>
-                <a:ea typeface="Calibri" pitchFamily="34" charset="-122"/>
-                <a:cs typeface="Calibri" pitchFamily="34" charset="-120"/>
-              </a:rPr>
-              <a:t>3 800 / mois</a:t>
-            </a:r>
-            <a:endParaRPr lang="en-US" sz="1000" dirty="0"/>
-          </a:p>
-        </p:txBody>
-      </p:sp>
-      <p:sp>
-        <p:nvSpPr>
-          <p:cNvPr id="21" name="Shape 19"/>
-          <p:cNvSpPr/>
-          <p:nvPr/>
-        </p:nvSpPr>
-        <p:spPr>
-          <a:xfrm>
-            <a:off x="8085125" y="2148840"/>
-            <a:ext cx="1660093" cy="2148840"/>
-          </a:xfrm>
-          <a:prstGeom prst="roundRect">
-            <a:avLst>
-              <a:gd name="adj" fmla="val 6059"/>
-            </a:avLst>
-          </a:prstGeom>
-          <a:solidFill>
-            <a:srgbClr val="123027"/>
-          </a:solidFill>
-          <a:ln w="12700">
-            <a:solidFill>
-              <a:srgbClr val="2A4034"/>
-            </a:solidFill>
-            <a:prstDash val="solid"/>
-          </a:ln>
-          <a:effectLst>
-            <a:outerShdw sx="100000" sy="100000" kx="0" ky="0" algn="bl" rotWithShape="0" blurRad="127000" dist="50800" dir="5400000">
-              <a:srgbClr val="000000">
-                <a:alpha val="35000"/>
-              </a:srgbClr>
-            </a:outerShdw>
-          </a:effectLst>
-        </p:spPr>
-      </p:sp>
-      <p:sp>
-        <p:nvSpPr>
-          <p:cNvPr id="22" name="Text 20"/>
-          <p:cNvSpPr txBox="1"/>
-          <p:nvPr/>
-        </p:nvSpPr>
-        <p:spPr>
-          <a:xfrm>
-            <a:off x="8130845" y="2368296"/>
-            <a:ext cx="1568653" cy="365760"/>
-          </a:xfrm>
-          <a:prstGeom prst="rect">
-            <a:avLst/>
-          </a:prstGeom>
-          <a:noFill/>
-          <a:ln/>
-        </p:spPr>
-        <p:txBody>
-          <a:bodyPr wrap="square" lIns="0" tIns="0" rIns="0" bIns="0" rtlCol="0" anchor="ctr"/>
-          <a:lstStyle/>
-          <a:p>
-            <a:pPr algn="ctr" indent="0" marL="0">
-              <a:buNone/>
-            </a:pPr>
-            <a:r>
-              <a:rPr lang="en-US" sz="1350" b="1" dirty="0">
-                <a:solidFill>
-                  <a:srgbClr val="E9E4D5"/>
-                </a:solidFill>
-                <a:latin typeface="Arial" pitchFamily="34" charset="0"/>
-                <a:ea typeface="Arial" pitchFamily="34" charset="-122"/>
-                <a:cs typeface="Arial" pitchFamily="34" charset="-120"/>
-              </a:rPr>
-              <a:t>Scale</a:t>
-            </a:r>
-            <a:endParaRPr lang="en-US" sz="1350" dirty="0"/>
-          </a:p>
-        </p:txBody>
-      </p:sp>
-      <p:sp>
-        <p:nvSpPr>
-          <p:cNvPr id="23" name="Text 21"/>
-          <p:cNvSpPr txBox="1"/>
-          <p:nvPr/>
-        </p:nvSpPr>
-        <p:spPr>
-          <a:xfrm>
-            <a:off x="8121701" y="2834640"/>
-            <a:ext cx="1586941" cy="640080"/>
-          </a:xfrm>
-          <a:prstGeom prst="rect">
-            <a:avLst/>
-          </a:prstGeom>
-          <a:noFill/>
-          <a:ln/>
-        </p:spPr>
-        <p:txBody>
-          <a:bodyPr wrap="square" lIns="0" tIns="0" rIns="0" bIns="0" rtlCol="0" anchor="ctr"/>
-          <a:lstStyle/>
-          <a:p>
-            <a:pPr algn="ctr" indent="0" marL="0">
-              <a:buNone/>
-            </a:pPr>
-            <a:r>
-              <a:rPr lang="en-US" sz="2700" b="1" dirty="0">
-                <a:solidFill>
-                  <a:srgbClr val="E8A11F"/>
-                </a:solidFill>
-                <a:latin typeface="Arial" pitchFamily="34" charset="0"/>
-                <a:ea typeface="Arial" pitchFamily="34" charset="-122"/>
-                <a:cs typeface="Arial" pitchFamily="34" charset="-120"/>
-              </a:rPr>
-              <a:t>$399</a:t>
-            </a:r>
-            <a:endParaRPr lang="en-US" sz="2700" dirty="0"/>
-          </a:p>
-        </p:txBody>
-      </p:sp>
-      <p:sp>
-        <p:nvSpPr>
-          <p:cNvPr id="24" name="Text 22"/>
-          <p:cNvSpPr txBox="1"/>
-          <p:nvPr/>
-        </p:nvSpPr>
-        <p:spPr>
-          <a:xfrm>
-            <a:off x="8139989" y="3566160"/>
-            <a:ext cx="1550365" cy="594360"/>
-          </a:xfrm>
-          <a:prstGeom prst="rect">
-            <a:avLst/>
-          </a:prstGeom>
-          <a:noFill/>
-          <a:ln/>
-        </p:spPr>
-        <p:txBody>
-          <a:bodyPr wrap="square" lIns="0" tIns="0" rIns="0" bIns="0" rtlCol="0" anchor="ctr"/>
-          <a:lstStyle/>
-          <a:p>
-            <a:pPr algn="ctr" indent="0" marL="0">
-              <a:lnSpc>
-                <a:spcPct val="105000"/>
-              </a:lnSpc>
-              <a:buNone/>
-            </a:pPr>
-            <a:r>
-              <a:rPr lang="en-US" sz="1000" dirty="0">
-                <a:solidFill>
-                  <a:srgbClr val="9BA79B"/>
-                </a:solidFill>
-                <a:latin typeface="Calibri" pitchFamily="34" charset="0"/>
-                <a:ea typeface="Calibri" pitchFamily="34" charset="-122"/>
-                <a:cs typeface="Calibri" pitchFamily="34" charset="-120"/>
-              </a:rPr>
-              <a:t>15 200 / mois</a:t>
-            </a:r>
-            <a:endParaRPr lang="en-US" sz="1000" dirty="0"/>
-          </a:p>
-        </p:txBody>
-      </p:sp>
-      <p:sp>
-        <p:nvSpPr>
-          <p:cNvPr id="25" name="Shape 23"/>
-          <p:cNvSpPr/>
-          <p:nvPr/>
-        </p:nvSpPr>
-        <p:spPr>
-          <a:xfrm>
-            <a:off x="9964674" y="2148840"/>
-            <a:ext cx="1660093" cy="2148840"/>
-          </a:xfrm>
-          <a:prstGeom prst="roundRect">
-            <a:avLst>
-              <a:gd name="adj" fmla="val 6059"/>
-            </a:avLst>
-          </a:prstGeom>
-          <a:solidFill>
-            <a:srgbClr val="123027"/>
-          </a:solidFill>
-          <a:ln w="12700">
-            <a:solidFill>
-              <a:srgbClr val="2A4034"/>
-            </a:solidFill>
-            <a:prstDash val="solid"/>
-          </a:ln>
-          <a:effectLst>
-            <a:outerShdw sx="100000" sy="100000" kx="0" ky="0" algn="bl" rotWithShape="0" blurRad="127000" dist="50800" dir="5400000">
-              <a:srgbClr val="000000">
-                <a:alpha val="35000"/>
-              </a:srgbClr>
-            </a:outerShdw>
-          </a:effectLst>
-        </p:spPr>
-      </p:sp>
-      <p:sp>
-        <p:nvSpPr>
-          <p:cNvPr id="26" name="Text 24"/>
-          <p:cNvSpPr txBox="1"/>
-          <p:nvPr/>
-        </p:nvSpPr>
-        <p:spPr>
-          <a:xfrm>
-            <a:off x="10010394" y="2368296"/>
-            <a:ext cx="1568653" cy="365760"/>
-          </a:xfrm>
-          <a:prstGeom prst="rect">
-            <a:avLst/>
-          </a:prstGeom>
-          <a:noFill/>
-          <a:ln/>
-        </p:spPr>
-        <p:txBody>
-          <a:bodyPr wrap="square" lIns="0" tIns="0" rIns="0" bIns="0" rtlCol="0" anchor="ctr"/>
-          <a:lstStyle/>
-          <a:p>
-            <a:pPr algn="ctr" indent="0" marL="0">
-              <a:buNone/>
-            </a:pPr>
-            <a:r>
-              <a:rPr lang="en-US" sz="1350" b="1" dirty="0">
-                <a:solidFill>
-                  <a:srgbClr val="E9E4D5"/>
-                </a:solidFill>
-                <a:latin typeface="Arial" pitchFamily="34" charset="0"/>
-                <a:ea typeface="Arial" pitchFamily="34" charset="-122"/>
-                <a:cs typeface="Arial" pitchFamily="34" charset="-120"/>
-              </a:rPr>
-              <a:t>Entreprise</a:t>
-            </a:r>
-            <a:endParaRPr lang="en-US" sz="1350" dirty="0"/>
-          </a:p>
-        </p:txBody>
-      </p:sp>
-      <p:sp>
-        <p:nvSpPr>
-          <p:cNvPr id="27" name="Text 25"/>
-          <p:cNvSpPr txBox="1"/>
-          <p:nvPr/>
-        </p:nvSpPr>
-        <p:spPr>
-          <a:xfrm>
-            <a:off x="10001250" y="2834640"/>
-            <a:ext cx="1586941" cy="640080"/>
-          </a:xfrm>
-          <a:prstGeom prst="rect">
-            <a:avLst/>
-          </a:prstGeom>
-          <a:noFill/>
-          <a:ln/>
-        </p:spPr>
-        <p:txBody>
-          <a:bodyPr wrap="square" lIns="0" tIns="0" rIns="0" bIns="0" rtlCol="0" anchor="ctr"/>
-          <a:lstStyle/>
-          <a:p>
-            <a:pPr algn="ctr" indent="0" marL="0">
-              <a:buNone/>
-            </a:pPr>
-            <a:r>
-              <a:rPr lang="en-US" sz="1500" b="1" dirty="0">
-                <a:solidFill>
-                  <a:srgbClr val="E8A11F"/>
-                </a:solidFill>
-                <a:latin typeface="Arial" pitchFamily="34" charset="0"/>
-                <a:ea typeface="Arial" pitchFamily="34" charset="-122"/>
-                <a:cs typeface="Arial" pitchFamily="34" charset="-120"/>
-              </a:rPr>
-              <a:t>Sur mesure</a:t>
-            </a:r>
-            <a:endParaRPr lang="en-US" sz="1500" dirty="0"/>
-          </a:p>
-        </p:txBody>
-      </p:sp>
-      <p:sp>
-        <p:nvSpPr>
-          <p:cNvPr id="28" name="Text 26"/>
-          <p:cNvSpPr txBox="1"/>
-          <p:nvPr/>
-        </p:nvSpPr>
-        <p:spPr>
-          <a:xfrm>
-            <a:off x="10019538" y="3566160"/>
-            <a:ext cx="1550365" cy="594360"/>
-          </a:xfrm>
-          <a:prstGeom prst="rect">
-            <a:avLst/>
-          </a:prstGeom>
-          <a:noFill/>
-          <a:ln/>
-        </p:spPr>
-        <p:txBody>
-          <a:bodyPr wrap="square" lIns="0" tIns="0" rIns="0" bIns="0" rtlCol="0" anchor="ctr"/>
-          <a:lstStyle/>
-          <a:p>
-            <a:pPr algn="ctr" indent="0" marL="0">
-              <a:lnSpc>
-                <a:spcPct val="105000"/>
-              </a:lnSpc>
-              <a:buNone/>
-            </a:pPr>
-            <a:r>
-              <a:rPr lang="en-US" sz="1000" dirty="0">
-                <a:solidFill>
-                  <a:srgbClr val="9BA79B"/>
-                </a:solidFill>
-                <a:latin typeface="Calibri" pitchFamily="34" charset="0"/>
-                <a:ea typeface="Calibri" pitchFamily="34" charset="-122"/>
-                <a:cs typeface="Calibri" pitchFamily="34" charset="-120"/>
-              </a:rPr>
-              <a:t>volume engagé</a:t>
-            </a:r>
-            <a:endParaRPr lang="en-US" sz="1000" dirty="0"/>
-          </a:p>
-        </p:txBody>
-      </p:sp>
-      <p:sp>
-        <p:nvSpPr>
-          <p:cNvPr id="29" name="Shape 27"/>
-          <p:cNvSpPr/>
-          <p:nvPr/>
-        </p:nvSpPr>
-        <p:spPr>
-          <a:xfrm>
-            <a:off x="566928" y="4663440"/>
-            <a:ext cx="11057839" cy="1097280"/>
-          </a:xfrm>
-          <a:prstGeom prst="roundRect">
-            <a:avLst>
-              <a:gd name="adj" fmla="val 9167"/>
-            </a:avLst>
-          </a:prstGeom>
-          <a:solidFill>
-            <a:srgbClr val="081813"/>
-          </a:solidFill>
-          <a:ln w="12700">
-            <a:solidFill>
-              <a:srgbClr val="2A4034"/>
-            </a:solidFill>
-            <a:prstDash val="solid"/>
-          </a:ln>
-          <a:effectLst>
-            <a:outerShdw sx="100000" sy="100000" kx="0" ky="0" algn="bl" rotWithShape="0" blurRad="127000" dist="50800" dir="5400000">
-              <a:srgbClr val="000000">
-                <a:alpha val="35000"/>
-              </a:srgbClr>
-            </a:outerShdw>
-          </a:effectLst>
-        </p:spPr>
-      </p:sp>
-      <p:sp>
-        <p:nvSpPr>
-          <p:cNvPr id="30" name="Text 28"/>
-          <p:cNvSpPr txBox="1"/>
-          <p:nvPr/>
-        </p:nvSpPr>
-        <p:spPr>
-          <a:xfrm>
-            <a:off x="886968" y="4846320"/>
-            <a:ext cx="10417759" cy="777240"/>
+              <a:t>KODA EST</a:t>
+            </a:r>
+            <a:endParaRPr lang="en-US" sz="1700" dirty="0"/>
+          </a:p>
+        </p:txBody>
+      </p:sp>
+      <p:sp>
+        <p:nvSpPr>
+          <p:cNvPr id="8" name="Text 5"/>
+          <p:cNvSpPr txBox="1"/>
+          <p:nvPr/>
+        </p:nvSpPr>
+        <p:spPr>
+          <a:xfrm>
+            <a:off x="859536" y="3017520"/>
+            <a:ext cx="4800600" cy="1005840"/>
           </a:xfrm>
           <a:prstGeom prst="rect">
             <a:avLst/>
@@ -10529,16 +10829,153 @@
               <a:buNone/>
             </a:pPr>
             <a:r>
-              <a:rPr lang="en-US" sz="1250" b="1" i="1" dirty="0">
-                <a:solidFill>
-                  <a:srgbClr val="F2B944"/>
+              <a:rPr lang="en-US" sz="1250" dirty="0">
+                <a:solidFill>
+                  <a:srgbClr val="46534A"/>
                 </a:solidFill>
                 <a:latin typeface="Calibri" pitchFamily="34" charset="0"/>
                 <a:ea typeface="Calibri" pitchFamily="34" charset="-122"/>
                 <a:cs typeface="Calibri" pitchFamily="34" charset="-120"/>
               </a:rPr>
-              <a:t>« Payez seulement quand votre commerçant est payé. »  </a:t>
-            </a:r>
+              <a:t>Un service de VÉRIFICATION des paiements. Il lit la confirmation de l’opérateur, la note contre la fraude, la verrouille contre le rejeu, et vous dit en quelques secondes ce qui est réel.</a:t>
+            </a:r>
+            <a:endParaRPr lang="en-US" sz="1250" dirty="0"/>
+          </a:p>
+        </p:txBody>
+      </p:sp>
+      <p:sp>
+        <p:nvSpPr>
+          <p:cNvPr id="9" name="Shape 6"/>
+          <p:cNvSpPr/>
+          <p:nvPr/>
+        </p:nvSpPr>
+        <p:spPr>
+          <a:xfrm>
+            <a:off x="6281928" y="2103120"/>
+            <a:ext cx="5349240" cy="2057400"/>
+          </a:xfrm>
+          <a:prstGeom prst="roundRect">
+            <a:avLst>
+              <a:gd name="adj" fmla="val 4444"/>
+            </a:avLst>
+          </a:prstGeom>
+          <a:solidFill>
+            <a:srgbClr val="FFFFFF"/>
+          </a:solidFill>
+          <a:ln w="12700">
+            <a:solidFill>
+              <a:srgbClr val="E4DCC6"/>
+            </a:solidFill>
+            <a:prstDash val="solid"/>
+          </a:ln>
+        </p:spPr>
+      </p:sp>
+      <p:sp>
+        <p:nvSpPr>
+          <p:cNvPr id="10" name="Shape 7"/>
+          <p:cNvSpPr/>
+          <p:nvPr/>
+        </p:nvSpPr>
+        <p:spPr>
+          <a:xfrm>
+            <a:off x="6556248" y="2350008"/>
+            <a:ext cx="548640" cy="548640"/>
+          </a:xfrm>
+          <a:prstGeom prst="roundRect">
+            <a:avLst>
+              <a:gd name="adj" fmla="val 16667"/>
+            </a:avLst>
+          </a:prstGeom>
+          <a:solidFill>
+            <a:srgbClr val="EAE1CB"/>
+          </a:solidFill>
+          <a:ln/>
+        </p:spPr>
+      </p:sp>
+      <p:pic>
+        <p:nvPicPr>
+          <p:cNvPr id="11" name="Image 1" descr="preencoded.png">    </p:cNvPr>
+          <p:cNvPicPr>
+            <a:picLocks noChangeAspect="1"/>
+          </p:cNvPicPr>
+          <p:nvPr/>
+        </p:nvPicPr>
+        <p:blipFill>
+          <a:blip r:embed="rId2"/>
+          <a:stretch>
+            <a:fillRect/>
+          </a:stretch>
+        </p:blipFill>
+        <p:spPr>
+          <a:xfrm>
+            <a:off x="6665976" y="2459736"/>
+            <a:ext cx="329184" cy="329184"/>
+          </a:xfrm>
+          <a:prstGeom prst="rect">
+            <a:avLst/>
+          </a:prstGeom>
+        </p:spPr>
+      </p:pic>
+      <p:sp>
+        <p:nvSpPr>
+          <p:cNvPr id="12" name="Text 8"/>
+          <p:cNvSpPr txBox="1"/>
+          <p:nvPr/>
+        </p:nvSpPr>
+        <p:spPr>
+          <a:xfrm>
+            <a:off x="7287768" y="2404872"/>
+            <a:ext cx="4114800" cy="365760"/>
+          </a:xfrm>
+          <a:prstGeom prst="rect">
+            <a:avLst/>
+          </a:prstGeom>
+          <a:noFill/>
+          <a:ln/>
+        </p:spPr>
+        <p:txBody>
+          <a:bodyPr wrap="square" lIns="0" tIns="0" rIns="0" bIns="0" rtlCol="0" anchor="ctr"/>
+          <a:lstStyle/>
+          <a:p>
+            <a:pPr indent="0" marL="0">
+              <a:buNone/>
+            </a:pPr>
+            <a:r>
+              <a:rPr lang="en-US" sz="1700" b="1" dirty="0">
+                <a:solidFill>
+                  <a:srgbClr val="6B7A6E"/>
+                </a:solidFill>
+                <a:latin typeface="Arial" pitchFamily="34" charset="0"/>
+                <a:ea typeface="Arial" pitchFamily="34" charset="-122"/>
+                <a:cs typeface="Arial" pitchFamily="34" charset="-120"/>
+              </a:rPr>
+              <a:t>KODA N’EST PAS</a:t>
+            </a:r>
+            <a:endParaRPr lang="en-US" sz="1700" dirty="0"/>
+          </a:p>
+        </p:txBody>
+      </p:sp>
+      <p:sp>
+        <p:nvSpPr>
+          <p:cNvPr id="13" name="Text 9"/>
+          <p:cNvSpPr txBox="1"/>
+          <p:nvPr/>
+        </p:nvSpPr>
+        <p:spPr>
+          <a:xfrm>
+            <a:off x="6574536" y="3017520"/>
+            <a:ext cx="4800600" cy="1005840"/>
+          </a:xfrm>
+          <a:prstGeom prst="rect">
+            <a:avLst/>
+          </a:prstGeom>
+          <a:noFill/>
+          <a:ln/>
+        </p:spPr>
+        <p:txBody>
+          <a:bodyPr wrap="square" lIns="0" tIns="0" rIns="0" bIns="0" rtlCol="0" anchor="ctr"/>
+          <a:lstStyle/>
+          <a:p>
             <a:pPr indent="0" marL="0">
               <a:lnSpc>
                 <a:spcPct val="110000"/>
@@ -10548,13 +10985,13 @@
             <a:r>
               <a:rPr lang="en-US" sz="1250" dirty="0">
                 <a:solidFill>
-                  <a:srgbClr val="E9E4D5"/>
+                  <a:srgbClr val="46534A"/>
                 </a:solidFill>
                 <a:latin typeface="Calibri" pitchFamily="34" charset="0"/>
                 <a:ea typeface="Calibri" pitchFamily="34" charset="-122"/>
                 <a:cs typeface="Calibri" pitchFamily="34" charset="-120"/>
               </a:rPr>
-              <a:t>Au-delà du quota, les ACU prépayés — rechargés via mobile money et vérifiés par le moteur de KODA — couvrent le dépassement et les fonctions IA. Le tarif inclus d’un forfait bat toujours le paiement à l’usage.</a:t>
+              <a:t>Une banque, un portefeuille, un processeur de paiement, un agrégateur, un séquestre ou un émetteur de monnaie. Il ne détient, ne déplace ni ne règle jamais de fonds.</a:t>
             </a:r>
             <a:endParaRPr lang="en-US" sz="1250" dirty="0"/>
           </a:p>
@@ -10562,7 +10999,66 @@
       </p:sp>
       <p:sp>
         <p:nvSpPr>
-          <p:cNvPr id="31" name="Text 29"/>
+          <p:cNvPr id="14" name="Text 10"/>
+          <p:cNvSpPr txBox="1"/>
+          <p:nvPr/>
+        </p:nvSpPr>
+        <p:spPr>
+          <a:xfrm>
+            <a:off x="566928" y="4370832"/>
+            <a:ext cx="11057839" cy="1280160"/>
+          </a:xfrm>
+          <a:prstGeom prst="rect">
+            <a:avLst/>
+          </a:prstGeom>
+          <a:noFill/>
+          <a:ln/>
+        </p:spPr>
+        <p:txBody>
+          <a:bodyPr wrap="square" lIns="0" tIns="0" rIns="0" bIns="0" rtlCol="0" anchor="ctr"/>
+          <a:lstStyle/>
+          <a:p>
+            <a:pPr indent="0" marL="0">
+              <a:lnSpc>
+                <a:spcPct val="116000"/>
+              </a:lnSpc>
+              <a:buNone/>
+            </a:pPr>
+            <a:r>
+              <a:rPr lang="en-US" sz="1250" b="1" dirty="0">
+                <a:solidFill>
+                  <a:srgbClr val="081813"/>
+                </a:solidFill>
+                <a:latin typeface="Calibri" pitchFamily="34" charset="0"/>
+                <a:ea typeface="Calibri" pitchFamily="34" charset="-122"/>
+                <a:cs typeface="Calibri" pitchFamily="34" charset="-120"/>
+              </a:rPr>
+              <a:t>Votre argent va directement du client à vous, sur le réseau propre de l’opérateur. </a:t>
+            </a:r>
+            <a:pPr indent="0" marL="0">
+              <a:lnSpc>
+                <a:spcPct val="116000"/>
+              </a:lnSpc>
+              <a:buNone/>
+            </a:pPr>
+            <a:r>
+              <a:rPr lang="en-US" sz="1250" dirty="0">
+                <a:solidFill>
+                  <a:srgbClr val="5A6A5E"/>
+                </a:solidFill>
+                <a:latin typeface="Calibri" pitchFamily="34" charset="0"/>
+                <a:ea typeface="Calibri" pitchFamily="34" charset="-122"/>
+                <a:cs typeface="Calibri" pitchFamily="34" charset="-120"/>
+              </a:rPr>
+              <a:t>La vérification repose sur les confirmations opérateur côté commerçant — notée contre la fraude et protégée contre le rejeu — mais ne garantit pas contre les annulations côté opérateur ni ne constitue une preuve de règlement. KODA vous informe en premier.</a:t>
+            </a:r>
+            <a:endParaRPr lang="en-US" sz="1250" dirty="0"/>
+          </a:p>
+        </p:txBody>
+      </p:sp>
+      <p:sp>
+        <p:nvSpPr>
+          <p:cNvPr id="15" name="Text 11"/>
           <p:cNvSpPr txBox="1"/>
           <p:nvPr/>
         </p:nvSpPr>
@@ -10581,33 +11077,19 @@
           <a:bodyPr wrap="square" lIns="0" tIns="0" rIns="0" bIns="0" rtlCol="0" anchor="ctr"/>
           <a:lstStyle/>
           <a:p>
-            <a:pPr algn="l" indent="0" marL="0">
-              <a:buNone/>
-            </a:pPr>
-            <a:r>
-              <a:rPr lang="en-US" sz="950" b="1" dirty="0">
-                <a:solidFill>
-                  <a:srgbClr val="E8A11F"/>
+            <a:pPr indent="0" marL="0">
+              <a:buNone/>
+            </a:pPr>
+            <a:r>
+              <a:rPr lang="en-US" sz="950" dirty="0">
+                <a:solidFill>
+                  <a:srgbClr val="8A968C"/>
                 </a:solidFill>
                 <a:latin typeface="Courier New" pitchFamily="34" charset="0"/>
                 <a:ea typeface="Courier New" pitchFamily="34" charset="-122"/>
                 <a:cs typeface="Courier New" pitchFamily="34" charset="-120"/>
               </a:rPr>
-              <a:t>kodajnn.com</a:t>
-            </a:r>
-            <a:pPr algn="l" indent="0" marL="0">
-              <a:buNone/>
-            </a:pPr>
-            <a:r>
-              <a:rPr lang="en-US" sz="950" dirty="0">
-                <a:solidFill>
-                  <a:srgbClr val="9BA79B"/>
-                </a:solidFill>
-                <a:latin typeface="Courier New" pitchFamily="34" charset="0"/>
-                <a:ea typeface="Courier New" pitchFamily="34" charset="-122"/>
-                <a:cs typeface="Courier New" pitchFamily="34" charset="-120"/>
-              </a:rPr>
-              <a:t>   ·   Groupe Nseya Digital  ·  Kinshasa, RD Congo</a:t>
+              <a:t>kodajnn.com   ·   Groupe Nseya Digital  ·  Kinshasa, RD Congo</a:t>
             </a:r>
             <a:endParaRPr lang="en-US" sz="950" dirty="0"/>
           </a:p>
